--- a/PRESENTAZIONEEPICODE.pptx
+++ b/PRESENTAZIONEEPICODE.pptx
@@ -5,19 +5,20 @@
     <p:sldMasterId id="2147483648" r:id="rId1"/>
   </p:sldMasterIdLst>
   <p:notesMasterIdLst>
-    <p:notesMasterId r:id="rId12"/>
+    <p:notesMasterId r:id="rId13"/>
   </p:notesMasterIdLst>
   <p:sldIdLst>
     <p:sldId id="256" r:id="rId2"/>
     <p:sldId id="257" r:id="rId3"/>
     <p:sldId id="258" r:id="rId4"/>
-    <p:sldId id="259" r:id="rId5"/>
-    <p:sldId id="260" r:id="rId6"/>
-    <p:sldId id="261" r:id="rId7"/>
-    <p:sldId id="262" r:id="rId8"/>
-    <p:sldId id="263" r:id="rId9"/>
-    <p:sldId id="264" r:id="rId10"/>
-    <p:sldId id="265" r:id="rId11"/>
+    <p:sldId id="266" r:id="rId5"/>
+    <p:sldId id="267" r:id="rId6"/>
+    <p:sldId id="268" r:id="rId7"/>
+    <p:sldId id="261" r:id="rId8"/>
+    <p:sldId id="262" r:id="rId9"/>
+    <p:sldId id="263" r:id="rId10"/>
+    <p:sldId id="264" r:id="rId11"/>
+    <p:sldId id="265" r:id="rId12"/>
   </p:sldIdLst>
   <p:sldSz cx="12192000" cy="6858000"/>
   <p:notesSz cx="6858000" cy="12192000"/>
@@ -121,279 +122,676 @@
 </p:presentation>
 </file>
 
-<file path=ppt/charts/chart1.xml><?xml version="1.0" encoding="utf-8"?>
-<c:chartSpace xmlns:c="http://schemas.openxmlformats.org/drawingml/2006/chart" xmlns:a="http://schemas.openxmlformats.org/drawingml/2006/main" xmlns:r="http://schemas.openxmlformats.org/officeDocument/2006/relationships" xmlns:c16r2="http://schemas.microsoft.com/office/drawing/2015/06/chart">
-  <c:date1904 val="0"/>
-  <c:lang val="it-IT"/>
-  <c:roundedCorners val="1"/>
-  <c:style val="2"/>
-  <c:chart>
-    <c:autoTitleDeleted val="1"/>
-    <c:plotArea>
-      <c:layout/>
-      <c:barChart>
-        <c:barDir val="bar"/>
-        <c:grouping val="clustered"/>
-        <c:varyColors val="0"/>
-        <c:ser>
-          <c:idx val="0"/>
-          <c:order val="0"/>
-          <c:tx>
-            <c:strRef>
-              <c:f>Sheet1!$B$1</c:f>
-              <c:strCache>
-                <c:ptCount val="1"/>
-                <c:pt idx="0">
-                  <c:v>Strutture</c:v>
-                </c:pt>
-              </c:strCache>
-            </c:strRef>
-          </c:tx>
-          <c:spPr>
-            <a:solidFill>
-              <a:srgbClr val="1C7293"/>
-            </a:solidFill>
-            <a:effectLst/>
-          </c:spPr>
-          <c:invertIfNegative val="0"/>
-          <c:dLbls>
-            <c:numFmt formatCode="#,##0" sourceLinked="0"/>
-            <c:spPr>
-              <a:noFill/>
-              <a:ln>
-                <a:noFill/>
-              </a:ln>
-              <a:effectLst/>
-            </c:spPr>
-            <c:txPr>
-              <a:bodyPr/>
-              <a:lstStyle/>
-              <a:p>
-                <a:pPr>
-                  <a:defRPr sz="900" b="0" i="0" u="none" strike="noStrike">
-                    <a:solidFill>
-                      <a:srgbClr val="1A2733"/>
-                    </a:solidFill>
-                    <a:latin typeface="Arial"/>
-                  </a:defRPr>
-                </a:pPr>
-                <a:endParaRPr lang="it-IT"/>
-              </a:p>
-            </c:txPr>
-            <c:showLegendKey val="0"/>
-            <c:showVal val="1"/>
-            <c:showCatName val="0"/>
-            <c:showSerName val="0"/>
-            <c:showPercent val="0"/>
-            <c:showBubbleSize val="0"/>
-            <c:showLeaderLines val="0"/>
-            <c:extLst>
-              <c:ext xmlns:c15="http://schemas.microsoft.com/office/drawing/2012/chart" uri="{CE6537A1-D6FC-4f65-9D91-7224C49458BB}">
-                <c15:showLeaderLines val="0"/>
-              </c:ext>
-            </c:extLst>
-          </c:dLbls>
-          <c:cat>
-            <c:strRef>
-              <c:f>Sheet1!$A$2:$A$9</c:f>
-              <c:strCache>
-                <c:ptCount val="8"/>
-                <c:pt idx="0">
-                  <c:v>B&amp;B</c:v>
-                </c:pt>
-                <c:pt idx="1">
-                  <c:v>Stab. balneari</c:v>
-                </c:pt>
-                <c:pt idx="2">
-                  <c:v>Agriturismi</c:v>
-                </c:pt>
-                <c:pt idx="3">
-                  <c:v>Alberghi</c:v>
-                </c:pt>
-                <c:pt idx="4">
-                  <c:v>Altri priv.</c:v>
-                </c:pt>
-                <c:pt idx="5">
-                  <c:v>Affitto</c:v>
-                </c:pt>
-                <c:pt idx="6">
-                  <c:v>Rurale</c:v>
-                </c:pt>
-                <c:pt idx="7">
-                  <c:v>Campeggi</c:v>
-                </c:pt>
-              </c:strCache>
-            </c:strRef>
-          </c:cat>
-          <c:val>
-            <c:numRef>
-              <c:f>Sheet1!$B$2:$B$9</c:f>
-              <c:numCache>
-                <c:formatCode>General</c:formatCode>
-                <c:ptCount val="8"/>
-                <c:pt idx="0">
-                  <c:v>1808</c:v>
-                </c:pt>
-                <c:pt idx="1">
-                  <c:v>848</c:v>
-                </c:pt>
-                <c:pt idx="2">
-                  <c:v>829</c:v>
-                </c:pt>
-                <c:pt idx="3">
-                  <c:v>814</c:v>
-                </c:pt>
-                <c:pt idx="4">
-                  <c:v>719</c:v>
-                </c:pt>
-                <c:pt idx="5">
-                  <c:v>540</c:v>
-                </c:pt>
-                <c:pt idx="6">
-                  <c:v>303</c:v>
-                </c:pt>
-                <c:pt idx="7">
-                  <c:v>93</c:v>
-                </c:pt>
-              </c:numCache>
-            </c:numRef>
-          </c:val>
-          <c:extLst>
-            <c:ext xmlns:c16="http://schemas.microsoft.com/office/drawing/2014/chart" uri="{C3380CC4-5D6E-409C-BE32-E72D297353CC}">
-              <c16:uniqueId val="{00000000-ECD6-4133-8BCA-18B62D20090B}"/>
-            </c:ext>
-          </c:extLst>
-        </c:ser>
-        <c:dLbls>
-          <c:showLegendKey val="0"/>
-          <c:showVal val="1"/>
-          <c:showCatName val="0"/>
-          <c:showSerName val="0"/>
-          <c:showPercent val="0"/>
-          <c:showBubbleSize val="0"/>
-        </c:dLbls>
-        <c:gapWidth val="35"/>
-        <c:axId val="2094734554"/>
-        <c:axId val="2094734552"/>
-      </c:barChart>
-      <c:catAx>
-        <c:axId val="2094734554"/>
-        <c:scaling>
-          <c:orientation val="minMax"/>
-        </c:scaling>
-        <c:delete val="0"/>
-        <c:axPos val="l"/>
-        <c:numFmt formatCode="General" sourceLinked="1"/>
-        <c:majorTickMark val="out"/>
-        <c:minorTickMark val="none"/>
-        <c:tickLblPos val="nextTo"/>
-        <c:spPr>
-          <a:ln w="12700" cap="flat">
-            <a:solidFill>
-              <a:srgbClr val="888888"/>
-            </a:solidFill>
-            <a:prstDash val="solid"/>
-            <a:round/>
-          </a:ln>
-        </c:spPr>
-        <c:txPr>
-          <a:bodyPr/>
-          <a:lstStyle/>
-          <a:p>
-            <a:pPr>
-              <a:defRPr sz="1000" b="0" i="0" u="none" strike="noStrike">
-                <a:solidFill>
-                  <a:srgbClr val="1A2733"/>
-                </a:solidFill>
-                <a:latin typeface="Arial"/>
-              </a:defRPr>
-            </a:pPr>
-            <a:endParaRPr lang="en-US"/>
-          </a:p>
-        </c:txPr>
-        <c:crossAx val="2094734552"/>
-        <c:crosses val="autoZero"/>
-        <c:auto val="1"/>
-        <c:lblAlgn val="ctr"/>
-        <c:lblOffset val="100"/>
-        <c:noMultiLvlLbl val="1"/>
-      </c:catAx>
-      <c:valAx>
-        <c:axId val="2094734552"/>
-        <c:scaling>
-          <c:orientation val="minMax"/>
-        </c:scaling>
-        <c:delete val="0"/>
-        <c:axPos val="b"/>
-        <c:majorGridlines>
-          <c:spPr>
-            <a:ln w="12700" cap="flat">
-              <a:solidFill>
-                <a:srgbClr val="E3E9ED"/>
-              </a:solidFill>
-              <a:prstDash val="solid"/>
-              <a:round/>
-            </a:ln>
-          </c:spPr>
-        </c:majorGridlines>
-        <c:numFmt formatCode="General" sourceLinked="0"/>
-        <c:majorTickMark val="out"/>
-        <c:minorTickMark val="none"/>
-        <c:tickLblPos val="low"/>
-        <c:spPr>
-          <a:ln w="12700" cap="flat">
-            <a:solidFill>
-              <a:srgbClr val="888888"/>
-            </a:solidFill>
-            <a:prstDash val="solid"/>
-            <a:round/>
-          </a:ln>
-        </c:spPr>
-        <c:txPr>
-          <a:bodyPr/>
-          <a:lstStyle/>
-          <a:p>
-            <a:pPr>
-              <a:defRPr sz="900" b="0" i="0" u="none" strike="noStrike">
-                <a:solidFill>
-                  <a:srgbClr val="5B6B75"/>
-                </a:solidFill>
-                <a:latin typeface="Arial"/>
-              </a:defRPr>
-            </a:pPr>
-            <a:endParaRPr lang="en-US"/>
-          </a:p>
-        </c:txPr>
-        <c:crossAx val="2094734554"/>
-        <c:crosses val="autoZero"/>
-        <c:crossBetween val="between"/>
-      </c:valAx>
-      <c:spPr>
-        <a:noFill/>
-        <a:ln>
-          <a:noFill/>
-        </a:ln>
-        <a:effectLst/>
-      </c:spPr>
-    </c:plotArea>
-    <c:plotVisOnly val="1"/>
-    <c:dispBlanksAs val="span"/>
-    <c:showDLblsOverMax val="1"/>
-  </c:chart>
-  <c:spPr>
-    <a:noFill/>
-    <a:ln>
-      <a:noFill/>
-    </a:ln>
-    <a:effectLst/>
-  </c:spPr>
-  <c:externalData r:id="rId1">
-    <c:autoUpdate val="0"/>
-  </c:externalData>
-</c:chartSpace>
+<file path=ppt/revisionInfo.xml><?xml version="1.0" encoding="utf-8"?>
+<p1510:revInfo xmlns:a="http://schemas.openxmlformats.org/drawingml/2006/main" xmlns:r="http://schemas.openxmlformats.org/officeDocument/2006/relationships" xmlns:p1510="http://schemas.microsoft.com/office/powerpoint/2015/10/main">
+  <p1510:revLst>
+    <p1510:client id="{99AE43DB-54BB-4D03-95C6-0AF5DD23C1BC}" v="25" dt="2026-08-02T11:16:14.927"/>
+  </p1510:revLst>
+</p1510:revInfo>
 </file>
 
-<file path=ppt/charts/chart2.xml><?xml version="1.0" encoding="utf-8"?>
+<file path=ppt/changesInfos/changesInfo1.xml><?xml version="1.0" encoding="utf-8"?>
+<pc:chgInfo xmlns:a="http://schemas.openxmlformats.org/drawingml/2006/main" xmlns:r="http://schemas.openxmlformats.org/officeDocument/2006/relationships" xmlns:ac="http://schemas.microsoft.com/office/drawing/2013/main/command" xmlns:pc="http://schemas.microsoft.com/office/powerpoint/2013/main/command">
+  <pc:docChgLst>
+    <pc:chgData name="Yana Subotina" userId="582d08feedd9ffe4" providerId="LiveId" clId="{7C593706-327A-4D81-B230-D1A9C5766250}"/>
+    <pc:docChg chg="custSel addSld delSld modSld">
+      <pc:chgData name="Yana Subotina" userId="582d08feedd9ffe4" providerId="LiveId" clId="{7C593706-327A-4D81-B230-D1A9C5766250}" dt="2026-08-02T11:17:54.625" v="1543" actId="478"/>
+      <pc:docMkLst>
+        <pc:docMk/>
+      </pc:docMkLst>
+      <pc:sldChg chg="modSp mod">
+        <pc:chgData name="Yana Subotina" userId="582d08feedd9ffe4" providerId="LiveId" clId="{7C593706-327A-4D81-B230-D1A9C5766250}" dt="2026-08-02T08:45:15.445" v="93" actId="20577"/>
+        <pc:sldMkLst>
+          <pc:docMk/>
+          <pc:sldMk cId="0" sldId="257"/>
+        </pc:sldMkLst>
+        <pc:spChg chg="mod">
+          <ac:chgData name="Yana Subotina" userId="582d08feedd9ffe4" providerId="LiveId" clId="{7C593706-327A-4D81-B230-D1A9C5766250}" dt="2026-08-02T08:43:44.820" v="70" actId="20577"/>
+          <ac:spMkLst>
+            <pc:docMk/>
+            <pc:sldMk cId="0" sldId="257"/>
+            <ac:spMk id="3" creationId="{00000000-0000-0000-0000-000000000000}"/>
+          </ac:spMkLst>
+        </pc:spChg>
+        <pc:spChg chg="mod">
+          <ac:chgData name="Yana Subotina" userId="582d08feedd9ffe4" providerId="LiveId" clId="{7C593706-327A-4D81-B230-D1A9C5766250}" dt="2026-08-02T08:44:13.954" v="71" actId="20577"/>
+          <ac:spMkLst>
+            <pc:docMk/>
+            <pc:sldMk cId="0" sldId="257"/>
+            <ac:spMk id="14" creationId="{00000000-0000-0000-0000-000000000000}"/>
+          </ac:spMkLst>
+        </pc:spChg>
+        <pc:spChg chg="mod">
+          <ac:chgData name="Yana Subotina" userId="582d08feedd9ffe4" providerId="LiveId" clId="{7C593706-327A-4D81-B230-D1A9C5766250}" dt="2026-08-02T08:45:15.445" v="93" actId="20577"/>
+          <ac:spMkLst>
+            <pc:docMk/>
+            <pc:sldMk cId="0" sldId="257"/>
+            <ac:spMk id="16" creationId="{00000000-0000-0000-0000-000000000000}"/>
+          </ac:spMkLst>
+        </pc:spChg>
+      </pc:sldChg>
+      <pc:sldChg chg="addSp delSp modSp mod">
+        <pc:chgData name="Yana Subotina" userId="582d08feedd9ffe4" providerId="LiveId" clId="{7C593706-327A-4D81-B230-D1A9C5766250}" dt="2026-08-02T09:17:50.712" v="235" actId="1076"/>
+        <pc:sldMkLst>
+          <pc:docMk/>
+          <pc:sldMk cId="0" sldId="258"/>
+        </pc:sldMkLst>
+        <pc:spChg chg="mod">
+          <ac:chgData name="Yana Subotina" userId="582d08feedd9ffe4" providerId="LiveId" clId="{7C593706-327A-4D81-B230-D1A9C5766250}" dt="2026-08-02T08:54:02.423" v="115"/>
+          <ac:spMkLst>
+            <pc:docMk/>
+            <pc:sldMk cId="0" sldId="258"/>
+            <ac:spMk id="3" creationId="{00000000-0000-0000-0000-000000000000}"/>
+          </ac:spMkLst>
+        </pc:spChg>
+        <pc:spChg chg="mod">
+          <ac:chgData name="Yana Subotina" userId="582d08feedd9ffe4" providerId="LiveId" clId="{7C593706-327A-4D81-B230-D1A9C5766250}" dt="2026-08-02T08:52:56.649" v="114" actId="20577"/>
+          <ac:spMkLst>
+            <pc:docMk/>
+            <pc:sldMk cId="0" sldId="258"/>
+            <ac:spMk id="6" creationId="{00000000-0000-0000-0000-000000000000}"/>
+          </ac:spMkLst>
+        </pc:spChg>
+        <pc:spChg chg="mod">
+          <ac:chgData name="Yana Subotina" userId="582d08feedd9ffe4" providerId="LiveId" clId="{7C593706-327A-4D81-B230-D1A9C5766250}" dt="2026-08-02T09:00:36.019" v="161" actId="20577"/>
+          <ac:spMkLst>
+            <pc:docMk/>
+            <pc:sldMk cId="0" sldId="258"/>
+            <ac:spMk id="7" creationId="{00000000-0000-0000-0000-000000000000}"/>
+          </ac:spMkLst>
+        </pc:spChg>
+        <pc:spChg chg="del">
+          <ac:chgData name="Yana Subotina" userId="582d08feedd9ffe4" providerId="LiveId" clId="{7C593706-327A-4D81-B230-D1A9C5766250}" dt="2026-08-02T08:56:13.287" v="124" actId="478"/>
+          <ac:spMkLst>
+            <pc:docMk/>
+            <pc:sldMk cId="0" sldId="258"/>
+            <ac:spMk id="8" creationId="{00000000-0000-0000-0000-000000000000}"/>
+          </ac:spMkLst>
+        </pc:spChg>
+        <pc:spChg chg="del mod">
+          <ac:chgData name="Yana Subotina" userId="582d08feedd9ffe4" providerId="LiveId" clId="{7C593706-327A-4D81-B230-D1A9C5766250}" dt="2026-08-02T08:56:24.148" v="126" actId="478"/>
+          <ac:spMkLst>
+            <pc:docMk/>
+            <pc:sldMk cId="0" sldId="258"/>
+            <ac:spMk id="10" creationId="{00000000-0000-0000-0000-000000000000}"/>
+          </ac:spMkLst>
+        </pc:spChg>
+        <pc:spChg chg="del">
+          <ac:chgData name="Yana Subotina" userId="582d08feedd9ffe4" providerId="LiveId" clId="{7C593706-327A-4D81-B230-D1A9C5766250}" dt="2026-08-02T08:56:33.331" v="127" actId="478"/>
+          <ac:spMkLst>
+            <pc:docMk/>
+            <pc:sldMk cId="0" sldId="258"/>
+            <ac:spMk id="11" creationId="{00000000-0000-0000-0000-000000000000}"/>
+          </ac:spMkLst>
+        </pc:spChg>
+        <pc:spChg chg="mod">
+          <ac:chgData name="Yana Subotina" userId="582d08feedd9ffe4" providerId="LiveId" clId="{7C593706-327A-4D81-B230-D1A9C5766250}" dt="2026-08-02T09:14:41.137" v="213" actId="1076"/>
+          <ac:spMkLst>
+            <pc:docMk/>
+            <pc:sldMk cId="0" sldId="258"/>
+            <ac:spMk id="12" creationId="{00000000-0000-0000-0000-000000000000}"/>
+          </ac:spMkLst>
+        </pc:spChg>
+        <pc:spChg chg="mod">
+          <ac:chgData name="Yana Subotina" userId="582d08feedd9ffe4" providerId="LiveId" clId="{7C593706-327A-4D81-B230-D1A9C5766250}" dt="2026-08-02T09:14:48.492" v="214" actId="1076"/>
+          <ac:spMkLst>
+            <pc:docMk/>
+            <pc:sldMk cId="0" sldId="258"/>
+            <ac:spMk id="14" creationId="{00000000-0000-0000-0000-000000000000}"/>
+          </ac:spMkLst>
+        </pc:spChg>
+        <pc:spChg chg="mod">
+          <ac:chgData name="Yana Subotina" userId="582d08feedd9ffe4" providerId="LiveId" clId="{7C593706-327A-4D81-B230-D1A9C5766250}" dt="2026-08-02T09:15:01.566" v="215" actId="1076"/>
+          <ac:spMkLst>
+            <pc:docMk/>
+            <pc:sldMk cId="0" sldId="258"/>
+            <ac:spMk id="15" creationId="{00000000-0000-0000-0000-000000000000}"/>
+          </ac:spMkLst>
+        </pc:spChg>
+        <pc:spChg chg="del">
+          <ac:chgData name="Yana Subotina" userId="582d08feedd9ffe4" providerId="LiveId" clId="{7C593706-327A-4D81-B230-D1A9C5766250}" dt="2026-08-02T09:00:57.033" v="164" actId="478"/>
+          <ac:spMkLst>
+            <pc:docMk/>
+            <pc:sldMk cId="0" sldId="258"/>
+            <ac:spMk id="16" creationId="{00000000-0000-0000-0000-000000000000}"/>
+          </ac:spMkLst>
+        </pc:spChg>
+        <pc:spChg chg="del mod">
+          <ac:chgData name="Yana Subotina" userId="582d08feedd9ffe4" providerId="LiveId" clId="{7C593706-327A-4D81-B230-D1A9C5766250}" dt="2026-08-02T09:01:04.817" v="166" actId="478"/>
+          <ac:spMkLst>
+            <pc:docMk/>
+            <pc:sldMk cId="0" sldId="258"/>
+            <ac:spMk id="18" creationId="{00000000-0000-0000-0000-000000000000}"/>
+          </ac:spMkLst>
+        </pc:spChg>
+        <pc:spChg chg="mod">
+          <ac:chgData name="Yana Subotina" userId="582d08feedd9ffe4" providerId="LiveId" clId="{7C593706-327A-4D81-B230-D1A9C5766250}" dt="2026-08-02T09:00:51.420" v="162" actId="20577"/>
+          <ac:spMkLst>
+            <pc:docMk/>
+            <pc:sldMk cId="0" sldId="258"/>
+            <ac:spMk id="19" creationId="{00000000-0000-0000-0000-000000000000}"/>
+          </ac:spMkLst>
+        </pc:spChg>
+        <pc:spChg chg="mod">
+          <ac:chgData name="Yana Subotina" userId="582d08feedd9ffe4" providerId="LiveId" clId="{7C593706-327A-4D81-B230-D1A9C5766250}" dt="2026-08-02T09:15:17.454" v="218" actId="1076"/>
+          <ac:spMkLst>
+            <pc:docMk/>
+            <pc:sldMk cId="0" sldId="258"/>
+            <ac:spMk id="20" creationId="{00000000-0000-0000-0000-000000000000}"/>
+          </ac:spMkLst>
+        </pc:spChg>
+        <pc:spChg chg="mod">
+          <ac:chgData name="Yana Subotina" userId="582d08feedd9ffe4" providerId="LiveId" clId="{7C593706-327A-4D81-B230-D1A9C5766250}" dt="2026-08-02T09:15:30.292" v="220" actId="1076"/>
+          <ac:spMkLst>
+            <pc:docMk/>
+            <pc:sldMk cId="0" sldId="258"/>
+            <ac:spMk id="22" creationId="{00000000-0000-0000-0000-000000000000}"/>
+          </ac:spMkLst>
+        </pc:spChg>
+        <pc:spChg chg="mod">
+          <ac:chgData name="Yana Subotina" userId="582d08feedd9ffe4" providerId="LiveId" clId="{7C593706-327A-4D81-B230-D1A9C5766250}" dt="2026-08-02T09:15:36.341" v="221" actId="1076"/>
+          <ac:spMkLst>
+            <pc:docMk/>
+            <pc:sldMk cId="0" sldId="258"/>
+            <ac:spMk id="23" creationId="{00000000-0000-0000-0000-000000000000}"/>
+          </ac:spMkLst>
+        </pc:spChg>
+        <pc:spChg chg="mod">
+          <ac:chgData name="Yana Subotina" userId="582d08feedd9ffe4" providerId="LiveId" clId="{7C593706-327A-4D81-B230-D1A9C5766250}" dt="2026-08-02T08:55:42.987" v="118" actId="1076"/>
+          <ac:spMkLst>
+            <pc:docMk/>
+            <pc:sldMk cId="0" sldId="258"/>
+            <ac:spMk id="24" creationId="{00000000-0000-0000-0000-000000000000}"/>
+          </ac:spMkLst>
+        </pc:spChg>
+        <pc:spChg chg="mod">
+          <ac:chgData name="Yana Subotina" userId="582d08feedd9ffe4" providerId="LiveId" clId="{7C593706-327A-4D81-B230-D1A9C5766250}" dt="2026-08-02T08:55:48.679" v="119" actId="1076"/>
+          <ac:spMkLst>
+            <pc:docMk/>
+            <pc:sldMk cId="0" sldId="258"/>
+            <ac:spMk id="25" creationId="{00000000-0000-0000-0000-000000000000}"/>
+          </ac:spMkLst>
+        </pc:spChg>
+        <pc:spChg chg="mod">
+          <ac:chgData name="Yana Subotina" userId="582d08feedd9ffe4" providerId="LiveId" clId="{7C593706-327A-4D81-B230-D1A9C5766250}" dt="2026-08-02T08:55:54.252" v="120" actId="1076"/>
+          <ac:spMkLst>
+            <pc:docMk/>
+            <pc:sldMk cId="0" sldId="258"/>
+            <ac:spMk id="26" creationId="{00000000-0000-0000-0000-000000000000}"/>
+          </ac:spMkLst>
+        </pc:spChg>
+        <pc:spChg chg="add mod">
+          <ac:chgData name="Yana Subotina" userId="582d08feedd9ffe4" providerId="LiveId" clId="{7C593706-327A-4D81-B230-D1A9C5766250}" dt="2026-08-02T09:16:43.565" v="230" actId="1076"/>
+          <ac:spMkLst>
+            <pc:docMk/>
+            <pc:sldMk cId="0" sldId="258"/>
+            <ac:spMk id="32" creationId="{2D4E18F1-3EB3-8F91-4EE3-E5B23F73B33C}"/>
+          </ac:spMkLst>
+        </pc:spChg>
+        <pc:spChg chg="add mod">
+          <ac:chgData name="Yana Subotina" userId="582d08feedd9ffe4" providerId="LiveId" clId="{7C593706-327A-4D81-B230-D1A9C5766250}" dt="2026-08-02T09:17:16.200" v="232" actId="1076"/>
+          <ac:spMkLst>
+            <pc:docMk/>
+            <pc:sldMk cId="0" sldId="258"/>
+            <ac:spMk id="34" creationId="{2FC56D83-7F16-9471-0B0C-9E49DA486281}"/>
+          </ac:spMkLst>
+        </pc:spChg>
+        <pc:spChg chg="add mod">
+          <ac:chgData name="Yana Subotina" userId="582d08feedd9ffe4" providerId="LiveId" clId="{7C593706-327A-4D81-B230-D1A9C5766250}" dt="2026-08-02T09:17:50.712" v="235" actId="1076"/>
+          <ac:spMkLst>
+            <pc:docMk/>
+            <pc:sldMk cId="0" sldId="258"/>
+            <ac:spMk id="36" creationId="{C4B3CC28-8889-8C19-32B6-6484A2C36AA2}"/>
+          </ac:spMkLst>
+        </pc:spChg>
+        <pc:picChg chg="mod ord">
+          <ac:chgData name="Yana Subotina" userId="582d08feedd9ffe4" providerId="LiveId" clId="{7C593706-327A-4D81-B230-D1A9C5766250}" dt="2026-08-02T09:16:38.850" v="229" actId="1076"/>
+          <ac:picMkLst>
+            <pc:docMk/>
+            <pc:sldMk cId="0" sldId="258"/>
+            <ac:picMk id="5" creationId="{00000000-0000-0000-0000-000000000000}"/>
+          </ac:picMkLst>
+        </pc:picChg>
+        <pc:picChg chg="del">
+          <ac:chgData name="Yana Subotina" userId="582d08feedd9ffe4" providerId="LiveId" clId="{7C593706-327A-4D81-B230-D1A9C5766250}" dt="2026-08-02T08:56:09.583" v="123" actId="478"/>
+          <ac:picMkLst>
+            <pc:docMk/>
+            <pc:sldMk cId="0" sldId="258"/>
+            <ac:picMk id="9" creationId="{00000000-0000-0000-0000-000000000000}"/>
+          </ac:picMkLst>
+        </pc:picChg>
+        <pc:picChg chg="mod">
+          <ac:chgData name="Yana Subotina" userId="582d08feedd9ffe4" providerId="LiveId" clId="{7C593706-327A-4D81-B230-D1A9C5766250}" dt="2026-08-02T09:14:37.601" v="212" actId="1076"/>
+          <ac:picMkLst>
+            <pc:docMk/>
+            <pc:sldMk cId="0" sldId="258"/>
+            <ac:picMk id="13" creationId="{00000000-0000-0000-0000-000000000000}"/>
+          </ac:picMkLst>
+        </pc:picChg>
+        <pc:picChg chg="del">
+          <ac:chgData name="Yana Subotina" userId="582d08feedd9ffe4" providerId="LiveId" clId="{7C593706-327A-4D81-B230-D1A9C5766250}" dt="2026-08-02T09:00:55.572" v="163" actId="478"/>
+          <ac:picMkLst>
+            <pc:docMk/>
+            <pc:sldMk cId="0" sldId="258"/>
+            <ac:picMk id="17" creationId="{00000000-0000-0000-0000-000000000000}"/>
+          </ac:picMkLst>
+        </pc:picChg>
+        <pc:picChg chg="mod">
+          <ac:chgData name="Yana Subotina" userId="582d08feedd9ffe4" providerId="LiveId" clId="{7C593706-327A-4D81-B230-D1A9C5766250}" dt="2026-08-02T09:15:22.356" v="219" actId="1076"/>
+          <ac:picMkLst>
+            <pc:docMk/>
+            <pc:sldMk cId="0" sldId="258"/>
+            <ac:picMk id="21" creationId="{00000000-0000-0000-0000-000000000000}"/>
+          </ac:picMkLst>
+        </pc:picChg>
+        <pc:picChg chg="add mod">
+          <ac:chgData name="Yana Subotina" userId="582d08feedd9ffe4" providerId="LiveId" clId="{7C593706-327A-4D81-B230-D1A9C5766250}" dt="2026-08-02T09:16:07.128" v="224" actId="1076"/>
+          <ac:picMkLst>
+            <pc:docMk/>
+            <pc:sldMk cId="0" sldId="258"/>
+            <ac:picMk id="30" creationId="{C667B73C-267D-98C9-F764-855765DC8648}"/>
+          </ac:picMkLst>
+        </pc:picChg>
+      </pc:sldChg>
+      <pc:sldChg chg="del">
+        <pc:chgData name="Yana Subotina" userId="582d08feedd9ffe4" providerId="LiveId" clId="{7C593706-327A-4D81-B230-D1A9C5766250}" dt="2026-08-02T10:22:58.048" v="794" actId="2696"/>
+        <pc:sldMkLst>
+          <pc:docMk/>
+          <pc:sldMk cId="0" sldId="259"/>
+        </pc:sldMkLst>
+      </pc:sldChg>
+      <pc:sldChg chg="del">
+        <pc:chgData name="Yana Subotina" userId="582d08feedd9ffe4" providerId="LiveId" clId="{7C593706-327A-4D81-B230-D1A9C5766250}" dt="2026-08-02T10:23:12.771" v="795" actId="2696"/>
+        <pc:sldMkLst>
+          <pc:docMk/>
+          <pc:sldMk cId="0" sldId="260"/>
+        </pc:sldMkLst>
+      </pc:sldChg>
+      <pc:sldChg chg="delSp modSp mod">
+        <pc:chgData name="Yana Subotina" userId="582d08feedd9ffe4" providerId="LiveId" clId="{7C593706-327A-4D81-B230-D1A9C5766250}" dt="2026-08-02T11:17:54.625" v="1543" actId="478"/>
+        <pc:sldMkLst>
+          <pc:docMk/>
+          <pc:sldMk cId="0" sldId="265"/>
+        </pc:sldMkLst>
+        <pc:spChg chg="del mod">
+          <ac:chgData name="Yana Subotina" userId="582d08feedd9ffe4" providerId="LiveId" clId="{7C593706-327A-4D81-B230-D1A9C5766250}" dt="2026-08-02T11:17:54.625" v="1543" actId="478"/>
+          <ac:spMkLst>
+            <pc:docMk/>
+            <pc:sldMk cId="0" sldId="265"/>
+            <ac:spMk id="3" creationId="{00000000-0000-0000-0000-000000000000}"/>
+          </ac:spMkLst>
+        </pc:spChg>
+        <pc:spChg chg="del mod">
+          <ac:chgData name="Yana Subotina" userId="582d08feedd9ffe4" providerId="LiveId" clId="{7C593706-327A-4D81-B230-D1A9C5766250}" dt="2026-08-02T11:17:45.430" v="1540" actId="478"/>
+          <ac:spMkLst>
+            <pc:docMk/>
+            <pc:sldMk cId="0" sldId="265"/>
+            <ac:spMk id="17" creationId="{00000000-0000-0000-0000-000000000000}"/>
+          </ac:spMkLst>
+        </pc:spChg>
+      </pc:sldChg>
+      <pc:sldChg chg="addSp modSp add mod">
+        <pc:chgData name="Yana Subotina" userId="582d08feedd9ffe4" providerId="LiveId" clId="{7C593706-327A-4D81-B230-D1A9C5766250}" dt="2026-08-02T10:24:34.027" v="850" actId="20577"/>
+        <pc:sldMkLst>
+          <pc:docMk/>
+          <pc:sldMk cId="3569127481" sldId="266"/>
+        </pc:sldMkLst>
+        <pc:spChg chg="mod">
+          <ac:chgData name="Yana Subotina" userId="582d08feedd9ffe4" providerId="LiveId" clId="{7C593706-327A-4D81-B230-D1A9C5766250}" dt="2026-08-02T10:24:34.027" v="850" actId="20577"/>
+          <ac:spMkLst>
+            <pc:docMk/>
+            <pc:sldMk cId="3569127481" sldId="266"/>
+            <ac:spMk id="2" creationId="{EC6C4397-008B-0407-862E-D8C111DF1CC0}"/>
+          </ac:spMkLst>
+        </pc:spChg>
+        <pc:spChg chg="mod">
+          <ac:chgData name="Yana Subotina" userId="582d08feedd9ffe4" providerId="LiveId" clId="{7C593706-327A-4D81-B230-D1A9C5766250}" dt="2026-08-02T09:18:04.967" v="257" actId="20577"/>
+          <ac:spMkLst>
+            <pc:docMk/>
+            <pc:sldMk cId="3569127481" sldId="266"/>
+            <ac:spMk id="6" creationId="{4CEC1EE2-B945-02E8-E35B-70A63B775493}"/>
+          </ac:spMkLst>
+        </pc:spChg>
+        <pc:spChg chg="mod">
+          <ac:chgData name="Yana Subotina" userId="582d08feedd9ffe4" providerId="LiveId" clId="{7C593706-327A-4D81-B230-D1A9C5766250}" dt="2026-08-02T09:17:57.684" v="256" actId="20577"/>
+          <ac:spMkLst>
+            <pc:docMk/>
+            <pc:sldMk cId="3569127481" sldId="266"/>
+            <ac:spMk id="7" creationId="{FA9586F8-50FD-DC95-7F80-EBE31040BA87}"/>
+          </ac:spMkLst>
+        </pc:spChg>
+        <pc:spChg chg="add mod">
+          <ac:chgData name="Yana Subotina" userId="582d08feedd9ffe4" providerId="LiveId" clId="{7C593706-327A-4D81-B230-D1A9C5766250}" dt="2026-08-02T09:23:22.601" v="288"/>
+          <ac:spMkLst>
+            <pc:docMk/>
+            <pc:sldMk cId="3569127481" sldId="266"/>
+            <ac:spMk id="9" creationId="{C944E48B-A9BB-8B88-8A93-2E2F5519D715}"/>
+          </ac:spMkLst>
+        </pc:spChg>
+        <pc:spChg chg="add mod">
+          <ac:chgData name="Yana Subotina" userId="582d08feedd9ffe4" providerId="LiveId" clId="{7C593706-327A-4D81-B230-D1A9C5766250}" dt="2026-08-02T09:21:14.669" v="278" actId="1076"/>
+          <ac:spMkLst>
+            <pc:docMk/>
+            <pc:sldMk cId="3569127481" sldId="266"/>
+            <ac:spMk id="11" creationId="{8B520B7A-00A5-04D2-C5FA-B085A3F5BF30}"/>
+          </ac:spMkLst>
+        </pc:spChg>
+        <pc:spChg chg="mod">
+          <ac:chgData name="Yana Subotina" userId="582d08feedd9ffe4" providerId="LiveId" clId="{7C593706-327A-4D81-B230-D1A9C5766250}" dt="2026-08-02T09:18:48.280" v="263" actId="1076"/>
+          <ac:spMkLst>
+            <pc:docMk/>
+            <pc:sldMk cId="3569127481" sldId="266"/>
+            <ac:spMk id="12" creationId="{07C2DE46-2D38-D083-3787-EE886602DE9A}"/>
+          </ac:spMkLst>
+        </pc:spChg>
+        <pc:spChg chg="mod">
+          <ac:chgData name="Yana Subotina" userId="582d08feedd9ffe4" providerId="LiveId" clId="{7C593706-327A-4D81-B230-D1A9C5766250}" dt="2026-08-02T09:19:42.535" v="270" actId="20577"/>
+          <ac:spMkLst>
+            <pc:docMk/>
+            <pc:sldMk cId="3569127481" sldId="266"/>
+            <ac:spMk id="14" creationId="{B4E82BBB-94FD-C20F-137F-77746AF34BB5}"/>
+          </ac:spMkLst>
+        </pc:spChg>
+        <pc:spChg chg="mod">
+          <ac:chgData name="Yana Subotina" userId="582d08feedd9ffe4" providerId="LiveId" clId="{7C593706-327A-4D81-B230-D1A9C5766250}" dt="2026-08-02T09:18:11.356" v="258" actId="20577"/>
+          <ac:spMkLst>
+            <pc:docMk/>
+            <pc:sldMk cId="3569127481" sldId="266"/>
+            <ac:spMk id="15" creationId="{ABCEFA3B-6065-6287-6128-44534DA931C5}"/>
+          </ac:spMkLst>
+        </pc:spChg>
+        <pc:spChg chg="mod">
+          <ac:chgData name="Yana Subotina" userId="582d08feedd9ffe4" providerId="LiveId" clId="{7C593706-327A-4D81-B230-D1A9C5766250}" dt="2026-08-02T10:22:32.585" v="792" actId="1076"/>
+          <ac:spMkLst>
+            <pc:docMk/>
+            <pc:sldMk cId="3569127481" sldId="266"/>
+            <ac:spMk id="19" creationId="{71A911AF-4C7B-A22A-8394-7A4BE8A5E853}"/>
+          </ac:spMkLst>
+        </pc:spChg>
+        <pc:spChg chg="mod">
+          <ac:chgData name="Yana Subotina" userId="582d08feedd9ffe4" providerId="LiveId" clId="{7C593706-327A-4D81-B230-D1A9C5766250}" dt="2026-08-02T09:18:59.289" v="264" actId="1076"/>
+          <ac:spMkLst>
+            <pc:docMk/>
+            <pc:sldMk cId="3569127481" sldId="266"/>
+            <ac:spMk id="20" creationId="{4B06B907-A0D7-0EF5-B097-F059785F431D}"/>
+          </ac:spMkLst>
+        </pc:spChg>
+        <pc:spChg chg="mod">
+          <ac:chgData name="Yana Subotina" userId="582d08feedd9ffe4" providerId="LiveId" clId="{7C593706-327A-4D81-B230-D1A9C5766250}" dt="2026-08-02T09:30:33.952" v="516" actId="20577"/>
+          <ac:spMkLst>
+            <pc:docMk/>
+            <pc:sldMk cId="3569127481" sldId="266"/>
+            <ac:spMk id="22" creationId="{605ACFA1-8BC4-9C16-0646-E0AFAFA5F193}"/>
+          </ac:spMkLst>
+        </pc:spChg>
+        <pc:spChg chg="mod">
+          <ac:chgData name="Yana Subotina" userId="582d08feedd9ffe4" providerId="LiveId" clId="{7C593706-327A-4D81-B230-D1A9C5766250}" dt="2026-08-02T09:26:48.306" v="359" actId="20577"/>
+          <ac:spMkLst>
+            <pc:docMk/>
+            <pc:sldMk cId="3569127481" sldId="266"/>
+            <ac:spMk id="23" creationId="{FAB2B4A7-A745-6B58-D32E-54B24B97B8BF}"/>
+          </ac:spMkLst>
+        </pc:spChg>
+        <pc:spChg chg="add mod">
+          <ac:chgData name="Yana Subotina" userId="582d08feedd9ffe4" providerId="LiveId" clId="{7C593706-327A-4D81-B230-D1A9C5766250}" dt="2026-08-02T10:22:15.103" v="790" actId="20577"/>
+          <ac:spMkLst>
+            <pc:docMk/>
+            <pc:sldMk cId="3569127481" sldId="266"/>
+            <ac:spMk id="29" creationId="{AF77833F-7EE6-DB29-5E57-154EE754F8E1}"/>
+          </ac:spMkLst>
+        </pc:spChg>
+        <pc:spChg chg="add mod">
+          <ac:chgData name="Yana Subotina" userId="582d08feedd9ffe4" providerId="LiveId" clId="{7C593706-327A-4D81-B230-D1A9C5766250}" dt="2026-08-02T10:22:23.024" v="791" actId="20577"/>
+          <ac:spMkLst>
+            <pc:docMk/>
+            <pc:sldMk cId="3569127481" sldId="266"/>
+            <ac:spMk id="31" creationId="{D7BD9676-DA5F-8531-2304-A3D617E27FEA}"/>
+          </ac:spMkLst>
+        </pc:spChg>
+        <pc:picChg chg="mod">
+          <ac:chgData name="Yana Subotina" userId="582d08feedd9ffe4" providerId="LiveId" clId="{7C593706-327A-4D81-B230-D1A9C5766250}" dt="2026-08-02T09:19:27.278" v="268" actId="1076"/>
+          <ac:picMkLst>
+            <pc:docMk/>
+            <pc:sldMk cId="3569127481" sldId="266"/>
+            <ac:picMk id="13" creationId="{7B0C996F-29A9-6F73-246B-B1F588A55060}"/>
+          </ac:picMkLst>
+        </pc:picChg>
+        <pc:picChg chg="add mod">
+          <ac:chgData name="Yana Subotina" userId="582d08feedd9ffe4" providerId="LiveId" clId="{7C593706-327A-4D81-B230-D1A9C5766250}" dt="2026-08-02T09:21:36.735" v="281" actId="1076"/>
+          <ac:picMkLst>
+            <pc:docMk/>
+            <pc:sldMk cId="3569127481" sldId="266"/>
+            <ac:picMk id="17" creationId="{18B18154-4302-6BAA-5EA0-6EA1B179E2C2}"/>
+          </ac:picMkLst>
+        </pc:picChg>
+        <pc:picChg chg="mod">
+          <ac:chgData name="Yana Subotina" userId="582d08feedd9ffe4" providerId="LiveId" clId="{7C593706-327A-4D81-B230-D1A9C5766250}" dt="2026-08-02T09:19:20.806" v="267" actId="1076"/>
+          <ac:picMkLst>
+            <pc:docMk/>
+            <pc:sldMk cId="3569127481" sldId="266"/>
+            <ac:picMk id="21" creationId="{031CA508-288A-F941-55A6-632060F2FDF0}"/>
+          </ac:picMkLst>
+        </pc:picChg>
+      </pc:sldChg>
+      <pc:sldChg chg="modSp add mod">
+        <pc:chgData name="Yana Subotina" userId="582d08feedd9ffe4" providerId="LiveId" clId="{7C593706-327A-4D81-B230-D1A9C5766250}" dt="2026-08-02T10:43:13.542" v="1379" actId="20577"/>
+        <pc:sldMkLst>
+          <pc:docMk/>
+          <pc:sldMk cId="314148423" sldId="267"/>
+        </pc:sldMkLst>
+        <pc:spChg chg="mod">
+          <ac:chgData name="Yana Subotina" userId="582d08feedd9ffe4" providerId="LiveId" clId="{7C593706-327A-4D81-B230-D1A9C5766250}" dt="2026-08-02T10:34:25.743" v="1092" actId="20577"/>
+          <ac:spMkLst>
+            <pc:docMk/>
+            <pc:sldMk cId="314148423" sldId="267"/>
+            <ac:spMk id="2" creationId="{CFE9D344-0D84-520F-AAD9-14770DDE68CF}"/>
+          </ac:spMkLst>
+        </pc:spChg>
+        <pc:spChg chg="mod">
+          <ac:chgData name="Yana Subotina" userId="582d08feedd9ffe4" providerId="LiveId" clId="{7C593706-327A-4D81-B230-D1A9C5766250}" dt="2026-08-02T10:26:15.308" v="888" actId="20577"/>
+          <ac:spMkLst>
+            <pc:docMk/>
+            <pc:sldMk cId="314148423" sldId="267"/>
+            <ac:spMk id="6" creationId="{6968275B-3D00-068C-F540-B1EF38533543}"/>
+          </ac:spMkLst>
+        </pc:spChg>
+        <pc:spChg chg="mod">
+          <ac:chgData name="Yana Subotina" userId="582d08feedd9ffe4" providerId="LiveId" clId="{7C593706-327A-4D81-B230-D1A9C5766250}" dt="2026-08-02T10:33:30.139" v="1044" actId="113"/>
+          <ac:spMkLst>
+            <pc:docMk/>
+            <pc:sldMk cId="314148423" sldId="267"/>
+            <ac:spMk id="9" creationId="{2B66C9DC-72E7-87DB-03E5-03AB3702F04B}"/>
+          </ac:spMkLst>
+        </pc:spChg>
+        <pc:spChg chg="mod">
+          <ac:chgData name="Yana Subotina" userId="582d08feedd9ffe4" providerId="LiveId" clId="{7C593706-327A-4D81-B230-D1A9C5766250}" dt="2026-08-02T10:36:49.073" v="1158" actId="20577"/>
+          <ac:spMkLst>
+            <pc:docMk/>
+            <pc:sldMk cId="314148423" sldId="267"/>
+            <ac:spMk id="14" creationId="{16577381-FAF6-3404-12DF-7741DD40D915}"/>
+          </ac:spMkLst>
+        </pc:spChg>
+        <pc:spChg chg="mod">
+          <ac:chgData name="Yana Subotina" userId="582d08feedd9ffe4" providerId="LiveId" clId="{7C593706-327A-4D81-B230-D1A9C5766250}" dt="2026-08-02T10:41:57.109" v="1362" actId="20577"/>
+          <ac:spMkLst>
+            <pc:docMk/>
+            <pc:sldMk cId="314148423" sldId="267"/>
+            <ac:spMk id="19" creationId="{95F40B20-BF24-52F2-D1F1-3733DA170B84}"/>
+          </ac:spMkLst>
+        </pc:spChg>
+        <pc:spChg chg="mod">
+          <ac:chgData name="Yana Subotina" userId="582d08feedd9ffe4" providerId="LiveId" clId="{7C593706-327A-4D81-B230-D1A9C5766250}" dt="2026-08-02T10:42:28.877" v="1372" actId="20577"/>
+          <ac:spMkLst>
+            <pc:docMk/>
+            <pc:sldMk cId="314148423" sldId="267"/>
+            <ac:spMk id="22" creationId="{A497BB17-7246-BF3D-60BF-DC9C0DA889C0}"/>
+          </ac:spMkLst>
+        </pc:spChg>
+        <pc:spChg chg="mod">
+          <ac:chgData name="Yana Subotina" userId="582d08feedd9ffe4" providerId="LiveId" clId="{7C593706-327A-4D81-B230-D1A9C5766250}" dt="2026-08-02T10:38:21.506" v="1243" actId="20577"/>
+          <ac:spMkLst>
+            <pc:docMk/>
+            <pc:sldMk cId="314148423" sldId="267"/>
+            <ac:spMk id="23" creationId="{249B7A28-1152-E1B8-CC12-5C83D9F04553}"/>
+          </ac:spMkLst>
+        </pc:spChg>
+        <pc:spChg chg="mod">
+          <ac:chgData name="Yana Subotina" userId="582d08feedd9ffe4" providerId="LiveId" clId="{7C593706-327A-4D81-B230-D1A9C5766250}" dt="2026-08-02T10:43:13.542" v="1379" actId="20577"/>
+          <ac:spMkLst>
+            <pc:docMk/>
+            <pc:sldMk cId="314148423" sldId="267"/>
+            <ac:spMk id="29" creationId="{687F6CDC-FA57-1824-F892-18E712A6BA05}"/>
+          </ac:spMkLst>
+        </pc:spChg>
+        <pc:spChg chg="mod">
+          <ac:chgData name="Yana Subotina" userId="582d08feedd9ffe4" providerId="LiveId" clId="{7C593706-327A-4D81-B230-D1A9C5766250}" dt="2026-08-02T10:42:33.645" v="1374" actId="20577"/>
+          <ac:spMkLst>
+            <pc:docMk/>
+            <pc:sldMk cId="314148423" sldId="267"/>
+            <ac:spMk id="31" creationId="{B0685C52-C099-6DEE-693C-5489B7EE921B}"/>
+          </ac:spMkLst>
+        </pc:spChg>
+      </pc:sldChg>
+      <pc:sldChg chg="add del">
+        <pc:chgData name="Yana Subotina" userId="582d08feedd9ffe4" providerId="LiveId" clId="{7C593706-327A-4D81-B230-D1A9C5766250}" dt="2026-08-02T10:43:45.125" v="1381" actId="47"/>
+        <pc:sldMkLst>
+          <pc:docMk/>
+          <pc:sldMk cId="2678256202" sldId="268"/>
+        </pc:sldMkLst>
+      </pc:sldChg>
+      <pc:sldChg chg="delSp modSp add mod">
+        <pc:chgData name="Yana Subotina" userId="582d08feedd9ffe4" providerId="LiveId" clId="{7C593706-327A-4D81-B230-D1A9C5766250}" dt="2026-08-02T11:17:04.195" v="1538" actId="20577"/>
+        <pc:sldMkLst>
+          <pc:docMk/>
+          <pc:sldMk cId="4073091238" sldId="268"/>
+        </pc:sldMkLst>
+        <pc:spChg chg="mod">
+          <ac:chgData name="Yana Subotina" userId="582d08feedd9ffe4" providerId="LiveId" clId="{7C593706-327A-4D81-B230-D1A9C5766250}" dt="2026-08-02T10:44:39.238" v="1418" actId="20577"/>
+          <ac:spMkLst>
+            <pc:docMk/>
+            <pc:sldMk cId="4073091238" sldId="268"/>
+            <ac:spMk id="2" creationId="{F34ABDF9-948C-A4DF-E5A9-51D2D9924323}"/>
+          </ac:spMkLst>
+        </pc:spChg>
+        <pc:spChg chg="mod">
+          <ac:chgData name="Yana Subotina" userId="582d08feedd9ffe4" providerId="LiveId" clId="{7C593706-327A-4D81-B230-D1A9C5766250}" dt="2026-08-02T10:44:45.975" v="1420" actId="20577"/>
+          <ac:spMkLst>
+            <pc:docMk/>
+            <pc:sldMk cId="4073091238" sldId="268"/>
+            <ac:spMk id="6" creationId="{DF8E28F4-FD1C-90F6-EE2B-77FB36263369}"/>
+          </ac:spMkLst>
+        </pc:spChg>
+        <pc:spChg chg="mod">
+          <ac:chgData name="Yana Subotina" userId="582d08feedd9ffe4" providerId="LiveId" clId="{7C593706-327A-4D81-B230-D1A9C5766250}" dt="2026-08-02T11:12:46.770" v="1516" actId="113"/>
+          <ac:spMkLst>
+            <pc:docMk/>
+            <pc:sldMk cId="4073091238" sldId="268"/>
+            <ac:spMk id="9" creationId="{4135C884-1094-1E67-D06E-2E7E21336ECC}"/>
+          </ac:spMkLst>
+        </pc:spChg>
+        <pc:spChg chg="del">
+          <ac:chgData name="Yana Subotina" userId="582d08feedd9ffe4" providerId="LiveId" clId="{7C593706-327A-4D81-B230-D1A9C5766250}" dt="2026-08-02T10:44:52.280" v="1422" actId="478"/>
+          <ac:spMkLst>
+            <pc:docMk/>
+            <pc:sldMk cId="4073091238" sldId="268"/>
+            <ac:spMk id="11" creationId="{D32BAA03-4E28-3A9D-3E4A-EA3B3628DEA1}"/>
+          </ac:spMkLst>
+        </pc:spChg>
+        <pc:spChg chg="mod">
+          <ac:chgData name="Yana Subotina" userId="582d08feedd9ffe4" providerId="LiveId" clId="{7C593706-327A-4D81-B230-D1A9C5766250}" dt="2026-08-02T11:13:36.927" v="1517" actId="1076"/>
+          <ac:spMkLst>
+            <pc:docMk/>
+            <pc:sldMk cId="4073091238" sldId="268"/>
+            <ac:spMk id="12" creationId="{597565D4-DE52-B050-3F70-ABE9536B6FC4}"/>
+          </ac:spMkLst>
+        </pc:spChg>
+        <pc:spChg chg="mod">
+          <ac:chgData name="Yana Subotina" userId="582d08feedd9ffe4" providerId="LiveId" clId="{7C593706-327A-4D81-B230-D1A9C5766250}" dt="2026-08-02T11:13:58.295" v="1522" actId="1076"/>
+          <ac:spMkLst>
+            <pc:docMk/>
+            <pc:sldMk cId="4073091238" sldId="268"/>
+            <ac:spMk id="14" creationId="{9275135B-0EDD-9DE8-1AA5-2638191540C5}"/>
+          </ac:spMkLst>
+        </pc:spChg>
+        <pc:spChg chg="del">
+          <ac:chgData name="Yana Subotina" userId="582d08feedd9ffe4" providerId="LiveId" clId="{7C593706-327A-4D81-B230-D1A9C5766250}" dt="2026-08-02T10:45:28.866" v="1435" actId="478"/>
+          <ac:spMkLst>
+            <pc:docMk/>
+            <pc:sldMk cId="4073091238" sldId="268"/>
+            <ac:spMk id="19" creationId="{B9123F15-5BA1-2AFF-6D3B-0A271CE8E4A5}"/>
+          </ac:spMkLst>
+        </pc:spChg>
+        <pc:spChg chg="del">
+          <ac:chgData name="Yana Subotina" userId="582d08feedd9ffe4" providerId="LiveId" clId="{7C593706-327A-4D81-B230-D1A9C5766250}" dt="2026-08-02T10:45:19.063" v="1433" actId="478"/>
+          <ac:spMkLst>
+            <pc:docMk/>
+            <pc:sldMk cId="4073091238" sldId="268"/>
+            <ac:spMk id="20" creationId="{0D40F4F8-AAD7-ED01-FDF2-D9DB09D9774F}"/>
+          </ac:spMkLst>
+        </pc:spChg>
+        <pc:spChg chg="del">
+          <ac:chgData name="Yana Subotina" userId="582d08feedd9ffe4" providerId="LiveId" clId="{7C593706-327A-4D81-B230-D1A9C5766250}" dt="2026-08-02T10:45:24.887" v="1434" actId="478"/>
+          <ac:spMkLst>
+            <pc:docMk/>
+            <pc:sldMk cId="4073091238" sldId="268"/>
+            <ac:spMk id="22" creationId="{55F15D08-729B-4E56-5FF0-3475F975CEA5}"/>
+          </ac:spMkLst>
+        </pc:spChg>
+        <pc:spChg chg="mod">
+          <ac:chgData name="Yana Subotina" userId="582d08feedd9ffe4" providerId="LiveId" clId="{7C593706-327A-4D81-B230-D1A9C5766250}" dt="2026-08-02T11:17:04.195" v="1538" actId="20577"/>
+          <ac:spMkLst>
+            <pc:docMk/>
+            <pc:sldMk cId="4073091238" sldId="268"/>
+            <ac:spMk id="23" creationId="{63EA90BC-1F6A-D9EB-09BE-36F5FCF6C261}"/>
+          </ac:spMkLst>
+        </pc:spChg>
+        <pc:spChg chg="del">
+          <ac:chgData name="Yana Subotina" userId="582d08feedd9ffe4" providerId="LiveId" clId="{7C593706-327A-4D81-B230-D1A9C5766250}" dt="2026-08-02T10:45:07.823" v="1425" actId="478"/>
+          <ac:spMkLst>
+            <pc:docMk/>
+            <pc:sldMk cId="4073091238" sldId="268"/>
+            <ac:spMk id="29" creationId="{7BED3967-8B36-86F4-803F-5CDA0CF9C033}"/>
+          </ac:spMkLst>
+        </pc:spChg>
+        <pc:spChg chg="del mod">
+          <ac:chgData name="Yana Subotina" userId="582d08feedd9ffe4" providerId="LiveId" clId="{7C593706-327A-4D81-B230-D1A9C5766250}" dt="2026-08-02T10:44:59.885" v="1424" actId="478"/>
+          <ac:spMkLst>
+            <pc:docMk/>
+            <pc:sldMk cId="4073091238" sldId="268"/>
+            <ac:spMk id="31" creationId="{01F9ACF0-6B7D-2E42-7D4B-095242EFAC90}"/>
+          </ac:spMkLst>
+        </pc:spChg>
+        <pc:picChg chg="del mod">
+          <ac:chgData name="Yana Subotina" userId="582d08feedd9ffe4" providerId="LiveId" clId="{7C593706-327A-4D81-B230-D1A9C5766250}" dt="2026-08-02T11:13:53.271" v="1521" actId="478"/>
+          <ac:picMkLst>
+            <pc:docMk/>
+            <pc:sldMk cId="4073091238" sldId="268"/>
+            <ac:picMk id="13" creationId="{4554BC79-6F94-72C8-C634-9F1598120424}"/>
+          </ac:picMkLst>
+        </pc:picChg>
+        <pc:picChg chg="del">
+          <ac:chgData name="Yana Subotina" userId="582d08feedd9ffe4" providerId="LiveId" clId="{7C593706-327A-4D81-B230-D1A9C5766250}" dt="2026-08-02T10:44:50.940" v="1421" actId="478"/>
+          <ac:picMkLst>
+            <pc:docMk/>
+            <pc:sldMk cId="4073091238" sldId="268"/>
+            <ac:picMk id="17" creationId="{F6417E7D-7F66-A486-26CA-4DE8CA615982}"/>
+          </ac:picMkLst>
+        </pc:picChg>
+        <pc:picChg chg="mod">
+          <ac:chgData name="Yana Subotina" userId="582d08feedd9ffe4" providerId="LiveId" clId="{7C593706-327A-4D81-B230-D1A9C5766250}" dt="2026-08-02T11:13:49.725" v="1520" actId="1076"/>
+          <ac:picMkLst>
+            <pc:docMk/>
+            <pc:sldMk cId="4073091238" sldId="268"/>
+            <ac:picMk id="21" creationId="{12E1D8B2-981B-64FB-413C-D79C878A9143}"/>
+          </ac:picMkLst>
+        </pc:picChg>
+      </pc:sldChg>
+    </pc:docChg>
+  </pc:docChgLst>
+</pc:chgInfo>
+</file>
+
+<file path=ppt/charts/chart1.xml><?xml version="1.0" encoding="utf-8"?>
 <c:chartSpace xmlns:c="http://schemas.openxmlformats.org/drawingml/2006/chart" xmlns:a="http://schemas.openxmlformats.org/drawingml/2006/main" xmlns:r="http://schemas.openxmlformats.org/officeDocument/2006/relationships" xmlns:c16r2="http://schemas.microsoft.com/office/drawing/2015/06/chart">
   <c:date1904 val="0"/>
   <c:lang val="it-IT"/>
@@ -647,7 +1045,7 @@
 </c:chartSpace>
 </file>
 
-<file path=ppt/charts/chart3.xml><?xml version="1.0" encoding="utf-8"?>
+<file path=ppt/charts/chart2.xml><?xml version="1.0" encoding="utf-8"?>
 <c:chartSpace xmlns:c="http://schemas.openxmlformats.org/drawingml/2006/chart" xmlns:a="http://schemas.openxmlformats.org/drawingml/2006/main" xmlns:r="http://schemas.openxmlformats.org/officeDocument/2006/relationships" xmlns:c16r2="http://schemas.microsoft.com/office/drawing/2015/06/chart">
   <c:date1904 val="0"/>
   <c:lang val="it-IT"/>
@@ -704,7 +1102,7 @@
                   </a:defRPr>
                 </a:pPr>
                 <a:r>
-                  <a:rPr sz="1000" b="0" i="0" u="none" strike="noStrike">
+                  <a:rPr lang="it-IT" sz="1000" b="0" i="0" u="none" strike="noStrike">
                     <a:solidFill>
                       <a:srgbClr val="000000"/>
                     </a:solidFill>
@@ -782,7 +1180,7 @@
                   </a:defRPr>
                 </a:pPr>
                 <a:r>
-                  <a:rPr sz="1000" b="0" i="0" u="none" strike="noStrike">
+                  <a:rPr lang="it-IT" sz="1000" b="0" i="0" u="none" strike="noStrike">
                     <a:solidFill>
                       <a:srgbClr val="000000"/>
                     </a:solidFill>
@@ -1145,6 +1543,90 @@
 </p:notes>
 </file>
 
+<file path=ppt/notesSlides/notesSlide11.xml><?xml version="1.0" encoding="utf-8"?>
+<p:notes xmlns:a="http://schemas.openxmlformats.org/drawingml/2006/main" xmlns:r="http://schemas.openxmlformats.org/officeDocument/2006/relationships" xmlns:p="http://schemas.openxmlformats.org/presentationml/2006/main">
+  <p:cSld>
+    <p:spTree>
+      <p:nvGrpSpPr>
+        <p:cNvPr id="1" name=""/>
+        <p:cNvGrpSpPr/>
+        <p:nvPr/>
+      </p:nvGrpSpPr>
+      <p:grpSpPr>
+        <a:xfrm>
+          <a:off x="0" y="0"/>
+          <a:ext cx="0" cy="0"/>
+          <a:chOff x="0" y="0"/>
+          <a:chExt cx="0" cy="0"/>
+        </a:xfrm>
+      </p:grpSpPr>
+      <p:sp>
+        <p:nvSpPr>
+          <p:cNvPr id="2" name="Slide Image Placeholder 1"/>
+          <p:cNvSpPr>
+            <a:spLocks noGrp="1" noRot="1" noChangeAspect="1"/>
+          </p:cNvSpPr>
+          <p:nvPr>
+            <p:ph type="sldImg"/>
+          </p:nvPr>
+        </p:nvSpPr>
+        <p:spPr/>
+      </p:sp>
+      <p:sp>
+        <p:nvSpPr>
+          <p:cNvPr id="3" name="Notes Placeholder 2"/>
+          <p:cNvSpPr>
+            <a:spLocks noGrp="1"/>
+          </p:cNvSpPr>
+          <p:nvPr>
+            <p:ph type="body" idx="1"/>
+          </p:nvPr>
+        </p:nvSpPr>
+        <p:spPr/>
+        <p:txBody>
+          <a:bodyPr/>
+          <a:lstStyle/>
+          <a:p>
+            <a:endParaRPr lang="en-US" dirty="0"/>
+          </a:p>
+        </p:txBody>
+      </p:sp>
+      <p:sp>
+        <p:nvSpPr>
+          <p:cNvPr id="4" name="Slide Number Placeholder 3"/>
+          <p:cNvSpPr>
+            <a:spLocks noGrp="1"/>
+          </p:cNvSpPr>
+          <p:nvPr>
+            <p:ph type="sldNum" sz="quarter" idx="10"/>
+          </p:nvPr>
+        </p:nvSpPr>
+        <p:spPr/>
+        <p:txBody>
+          <a:bodyPr/>
+          <a:lstStyle/>
+          <a:p>
+            <a:fld id="{F7021451-1387-4CA6-816F-3879F97B5CBC}" type="slidenum">
+              <a:rPr lang="en-US"/>
+              <a:t>11</a:t>
+            </a:fld>
+            <a:endParaRPr lang="en-US"/>
+          </a:p>
+        </p:txBody>
+      </p:sp>
+    </p:spTree>
+    <p:extLst>
+      <p:ext uri="{BB962C8B-B14F-4D97-AF65-F5344CB8AC3E}">
+        <p14:creationId xmlns:p14="http://schemas.microsoft.com/office/powerpoint/2010/main" val="1024086991"/>
+      </p:ext>
+    </p:extLst>
+  </p:cSld>
+  <p:clrMapOvr>
+    <a:masterClrMapping/>
+  </p:clrMapOvr>
+</p:notes>
+</file>
+
 <file path=ppt/notesSlides/notesSlide2.xml><?xml version="1.0" encoding="utf-8"?>
 <p:notes xmlns:a="http://schemas.openxmlformats.org/drawingml/2006/main" xmlns:r="http://schemas.openxmlformats.org/officeDocument/2006/relationships" xmlns:p="http://schemas.openxmlformats.org/presentationml/2006/main">
   <p:cSld>
@@ -1318,7 +1800,13 @@
   <p:cSld>
     <p:spTree>
       <p:nvGrpSpPr>
-        <p:cNvPr id="1" name=""/>
+        <p:cNvPr id="1" name="">
+          <a:extLst>
+            <a:ext uri="{FF2B5EF4-FFF2-40B4-BE49-F238E27FC236}">
+              <a16:creationId xmlns:a16="http://schemas.microsoft.com/office/drawing/2014/main" id="{2F57C6C7-AA30-D0BC-9622-F4EBA7C3AE6B}"/>
+            </a:ext>
+          </a:extLst>
+        </p:cNvPr>
         <p:cNvGrpSpPr/>
         <p:nvPr/>
       </p:nvGrpSpPr>
@@ -1332,7 +1820,13 @@
       </p:grpSpPr>
       <p:sp>
         <p:nvSpPr>
-          <p:cNvPr id="2" name="Slide Image Placeholder 1"/>
+          <p:cNvPr id="2" name="Slide Image Placeholder 1">
+            <a:extLst>
+              <a:ext uri="{FF2B5EF4-FFF2-40B4-BE49-F238E27FC236}">
+                <a16:creationId xmlns:a16="http://schemas.microsoft.com/office/drawing/2014/main" id="{3D3388C4-EB15-5AF5-410D-0616B363AD8E}"/>
+              </a:ext>
+            </a:extLst>
+          </p:cNvPr>
           <p:cNvSpPr>
             <a:spLocks noGrp="1" noRot="1" noChangeAspect="1"/>
           </p:cNvSpPr>
@@ -1344,7 +1838,13 @@
       </p:sp>
       <p:sp>
         <p:nvSpPr>
-          <p:cNvPr id="3" name="Notes Placeholder 2"/>
+          <p:cNvPr id="3" name="Notes Placeholder 2">
+            <a:extLst>
+              <a:ext uri="{FF2B5EF4-FFF2-40B4-BE49-F238E27FC236}">
+                <a16:creationId xmlns:a16="http://schemas.microsoft.com/office/drawing/2014/main" id="{820970E9-D34B-70A4-D516-F5DA7056954B}"/>
+              </a:ext>
+            </a:extLst>
+          </p:cNvPr>
           <p:cNvSpPr>
             <a:spLocks noGrp="1"/>
           </p:cNvSpPr>
@@ -1363,7 +1863,13 @@
       </p:sp>
       <p:sp>
         <p:nvSpPr>
-          <p:cNvPr id="4" name="Slide Number Placeholder 3"/>
+          <p:cNvPr id="4" name="Slide Number Placeholder 3">
+            <a:extLst>
+              <a:ext uri="{FF2B5EF4-FFF2-40B4-BE49-F238E27FC236}">
+                <a16:creationId xmlns:a16="http://schemas.microsoft.com/office/drawing/2014/main" id="{282E3B5B-1185-8810-C20E-C19A7C094A2C}"/>
+              </a:ext>
+            </a:extLst>
+          </p:cNvPr>
           <p:cNvSpPr>
             <a:spLocks noGrp="1"/>
           </p:cNvSpPr>
@@ -1387,7 +1893,7 @@
     </p:spTree>
     <p:extLst>
       <p:ext uri="{BB962C8B-B14F-4D97-AF65-F5344CB8AC3E}">
-        <p14:creationId xmlns:p14="http://schemas.microsoft.com/office/powerpoint/2010/main" val="1024086991"/>
+        <p14:creationId xmlns:p14="http://schemas.microsoft.com/office/powerpoint/2010/main" val="1084888130"/>
       </p:ext>
     </p:extLst>
   </p:cSld>
@@ -1402,7 +1908,13 @@
   <p:cSld>
     <p:spTree>
       <p:nvGrpSpPr>
-        <p:cNvPr id="1" name=""/>
+        <p:cNvPr id="1" name="">
+          <a:extLst>
+            <a:ext uri="{FF2B5EF4-FFF2-40B4-BE49-F238E27FC236}">
+              <a16:creationId xmlns:a16="http://schemas.microsoft.com/office/drawing/2014/main" id="{3524C05D-0BBF-6818-E855-D5FBC33B0070}"/>
+            </a:ext>
+          </a:extLst>
+        </p:cNvPr>
         <p:cNvGrpSpPr/>
         <p:nvPr/>
       </p:nvGrpSpPr>
@@ -1416,7 +1928,13 @@
       </p:grpSpPr>
       <p:sp>
         <p:nvSpPr>
-          <p:cNvPr id="2" name="Slide Image Placeholder 1"/>
+          <p:cNvPr id="2" name="Slide Image Placeholder 1">
+            <a:extLst>
+              <a:ext uri="{FF2B5EF4-FFF2-40B4-BE49-F238E27FC236}">
+                <a16:creationId xmlns:a16="http://schemas.microsoft.com/office/drawing/2014/main" id="{599CDFBA-CB2D-EB7F-6827-6B2275C260B3}"/>
+              </a:ext>
+            </a:extLst>
+          </p:cNvPr>
           <p:cNvSpPr>
             <a:spLocks noGrp="1" noRot="1" noChangeAspect="1"/>
           </p:cNvSpPr>
@@ -1428,7 +1946,13 @@
       </p:sp>
       <p:sp>
         <p:nvSpPr>
-          <p:cNvPr id="3" name="Notes Placeholder 2"/>
+          <p:cNvPr id="3" name="Notes Placeholder 2">
+            <a:extLst>
+              <a:ext uri="{FF2B5EF4-FFF2-40B4-BE49-F238E27FC236}">
+                <a16:creationId xmlns:a16="http://schemas.microsoft.com/office/drawing/2014/main" id="{715E22C6-7E24-B555-C97E-FD0340E375B8}"/>
+              </a:ext>
+            </a:extLst>
+          </p:cNvPr>
           <p:cNvSpPr>
             <a:spLocks noGrp="1"/>
           </p:cNvSpPr>
@@ -1447,7 +1971,13 @@
       </p:sp>
       <p:sp>
         <p:nvSpPr>
-          <p:cNvPr id="4" name="Slide Number Placeholder 3"/>
+          <p:cNvPr id="4" name="Slide Number Placeholder 3">
+            <a:extLst>
+              <a:ext uri="{FF2B5EF4-FFF2-40B4-BE49-F238E27FC236}">
+                <a16:creationId xmlns:a16="http://schemas.microsoft.com/office/drawing/2014/main" id="{F4894715-E8B4-9F08-805E-AA92C64A1425}"/>
+              </a:ext>
+            </a:extLst>
+          </p:cNvPr>
           <p:cNvSpPr>
             <a:spLocks noGrp="1"/>
           </p:cNvSpPr>
@@ -1471,7 +2001,7 @@
     </p:spTree>
     <p:extLst>
       <p:ext uri="{BB962C8B-B14F-4D97-AF65-F5344CB8AC3E}">
-        <p14:creationId xmlns:p14="http://schemas.microsoft.com/office/powerpoint/2010/main" val="1024086991"/>
+        <p14:creationId xmlns:p14="http://schemas.microsoft.com/office/powerpoint/2010/main" val="2401012919"/>
       </p:ext>
     </p:extLst>
   </p:cSld>
@@ -1486,7 +2016,13 @@
   <p:cSld>
     <p:spTree>
       <p:nvGrpSpPr>
-        <p:cNvPr id="1" name=""/>
+        <p:cNvPr id="1" name="">
+          <a:extLst>
+            <a:ext uri="{FF2B5EF4-FFF2-40B4-BE49-F238E27FC236}">
+              <a16:creationId xmlns:a16="http://schemas.microsoft.com/office/drawing/2014/main" id="{6798DE95-D807-22B8-F888-4DE63F260035}"/>
+            </a:ext>
+          </a:extLst>
+        </p:cNvPr>
         <p:cNvGrpSpPr/>
         <p:nvPr/>
       </p:nvGrpSpPr>
@@ -1500,7 +2036,13 @@
       </p:grpSpPr>
       <p:sp>
         <p:nvSpPr>
-          <p:cNvPr id="2" name="Slide Image Placeholder 1"/>
+          <p:cNvPr id="2" name="Slide Image Placeholder 1">
+            <a:extLst>
+              <a:ext uri="{FF2B5EF4-FFF2-40B4-BE49-F238E27FC236}">
+                <a16:creationId xmlns:a16="http://schemas.microsoft.com/office/drawing/2014/main" id="{453B5318-ED12-1D38-FD06-8AE9CB7529FF}"/>
+              </a:ext>
+            </a:extLst>
+          </p:cNvPr>
           <p:cNvSpPr>
             <a:spLocks noGrp="1" noRot="1" noChangeAspect="1"/>
           </p:cNvSpPr>
@@ -1512,7 +2054,13 @@
       </p:sp>
       <p:sp>
         <p:nvSpPr>
-          <p:cNvPr id="3" name="Notes Placeholder 2"/>
+          <p:cNvPr id="3" name="Notes Placeholder 2">
+            <a:extLst>
+              <a:ext uri="{FF2B5EF4-FFF2-40B4-BE49-F238E27FC236}">
+                <a16:creationId xmlns:a16="http://schemas.microsoft.com/office/drawing/2014/main" id="{16D612C6-7E50-EA48-5CFE-83AE46514DA2}"/>
+              </a:ext>
+            </a:extLst>
+          </p:cNvPr>
           <p:cNvSpPr>
             <a:spLocks noGrp="1"/>
           </p:cNvSpPr>
@@ -1531,7 +2079,13 @@
       </p:sp>
       <p:sp>
         <p:nvSpPr>
-          <p:cNvPr id="4" name="Slide Number Placeholder 3"/>
+          <p:cNvPr id="4" name="Slide Number Placeholder 3">
+            <a:extLst>
+              <a:ext uri="{FF2B5EF4-FFF2-40B4-BE49-F238E27FC236}">
+                <a16:creationId xmlns:a16="http://schemas.microsoft.com/office/drawing/2014/main" id="{2232DAD1-AA16-B269-03FF-18C5102C8671}"/>
+              </a:ext>
+            </a:extLst>
+          </p:cNvPr>
           <p:cNvSpPr>
             <a:spLocks noGrp="1"/>
           </p:cNvSpPr>
@@ -1555,7 +2109,7 @@
     </p:spTree>
     <p:extLst>
       <p:ext uri="{BB962C8B-B14F-4D97-AF65-F5344CB8AC3E}">
-        <p14:creationId xmlns:p14="http://schemas.microsoft.com/office/powerpoint/2010/main" val="1024086991"/>
+        <p14:creationId xmlns:p14="http://schemas.microsoft.com/office/powerpoint/2010/main" val="3430235175"/>
       </p:ext>
     </p:extLst>
   </p:cSld>
@@ -2593,6 +3147,1168 @@
 
 <file path=ppt/slides/slide10.xml><?xml version="1.0" encoding="utf-8"?>
 <p:sld xmlns:a="http://schemas.openxmlformats.org/drawingml/2006/main" xmlns:r="http://schemas.openxmlformats.org/officeDocument/2006/relationships" xmlns:p="http://schemas.openxmlformats.org/presentationml/2006/main">
+  <p:cSld name="Slide 9">
+    <p:bg>
+      <p:bgPr>
+        <a:solidFill>
+          <a:srgbClr val="F7F9FB"/>
+        </a:solidFill>
+        <a:effectLst/>
+      </p:bgPr>
+    </p:bg>
+    <p:spTree>
+      <p:nvGrpSpPr>
+        <p:cNvPr id="1" name=""/>
+        <p:cNvGrpSpPr/>
+        <p:nvPr/>
+      </p:nvGrpSpPr>
+      <p:grpSpPr>
+        <a:xfrm>
+          <a:off x="0" y="0"/>
+          <a:ext cx="0" cy="0"/>
+          <a:chOff x="0" y="0"/>
+          <a:chExt cx="0" cy="0"/>
+        </a:xfrm>
+      </p:grpSpPr>
+      <p:sp>
+        <p:nvSpPr>
+          <p:cNvPr id="2" name="Text 0"/>
+          <p:cNvSpPr/>
+          <p:nvPr/>
+        </p:nvSpPr>
+        <p:spPr>
+          <a:xfrm>
+            <a:off x="640080" y="457200"/>
+            <a:ext cx="10058400" cy="548640"/>
+          </a:xfrm>
+          <a:prstGeom prst="rect">
+            <a:avLst/>
+          </a:prstGeom>
+          <a:noFill/>
+          <a:ln/>
+        </p:spPr>
+        <p:txBody>
+          <a:bodyPr wrap="square" rtlCol="0" anchor="ctr"/>
+          <a:lstStyle/>
+          <a:p>
+            <a:pPr marL="0" indent="0">
+              <a:buNone/>
+            </a:pPr>
+            <a:r>
+              <a:rPr lang="en-US" sz="3000" b="1" dirty="0">
+                <a:solidFill>
+                  <a:srgbClr val="1A2733"/>
+                </a:solidFill>
+                <a:latin typeface="Cambria" pitchFamily="34" charset="0"/>
+                <a:ea typeface="Cambria" pitchFamily="34" charset="-122"/>
+                <a:cs typeface="Cambria" pitchFamily="34" charset="-120"/>
+              </a:rPr>
+              <a:t>Struttura del file finale</a:t>
+            </a:r>
+            <a:endParaRPr lang="en-US" sz="3000" dirty="0"/>
+          </a:p>
+        </p:txBody>
+      </p:sp>
+      <p:sp>
+        <p:nvSpPr>
+          <p:cNvPr id="3" name="Text 1"/>
+          <p:cNvSpPr/>
+          <p:nvPr/>
+        </p:nvSpPr>
+        <p:spPr>
+          <a:xfrm>
+            <a:off x="640080" y="987552"/>
+            <a:ext cx="9144000" cy="365760"/>
+          </a:xfrm>
+          <a:prstGeom prst="rect">
+            <a:avLst/>
+          </a:prstGeom>
+          <a:noFill/>
+          <a:ln/>
+        </p:spPr>
+        <p:txBody>
+          <a:bodyPr wrap="square" rtlCol="0" anchor="ctr"/>
+          <a:lstStyle/>
+          <a:p>
+            <a:pPr marL="0" indent="0">
+              <a:buNone/>
+            </a:pPr>
+            <a:r>
+              <a:rPr lang="en-US" sz="1400" dirty="0">
+                <a:solidFill>
+                  <a:srgbClr val="5B6B75"/>
+                </a:solidFill>
+                <a:latin typeface="Calibri" pitchFamily="34" charset="0"/>
+                <a:ea typeface="Calibri" pitchFamily="34" charset="-122"/>
+                <a:cs typeface="Calibri" pitchFamily="34" charset="-120"/>
+              </a:rPr>
+              <a:t>Sette fogli, ciascuno con uno scopo preciso nel flusso dati → analisi</a:t>
+            </a:r>
+            <a:endParaRPr lang="en-US" sz="1400" dirty="0"/>
+          </a:p>
+        </p:txBody>
+      </p:sp>
+      <p:sp>
+        <p:nvSpPr>
+          <p:cNvPr id="4" name="Shape 2"/>
+          <p:cNvSpPr/>
+          <p:nvPr/>
+        </p:nvSpPr>
+        <p:spPr>
+          <a:xfrm>
+            <a:off x="640080" y="1691640"/>
+            <a:ext cx="5257800" cy="914400"/>
+          </a:xfrm>
+          <a:prstGeom prst="roundRect">
+            <a:avLst>
+              <a:gd name="adj" fmla="val 6000"/>
+            </a:avLst>
+          </a:prstGeom>
+          <a:solidFill>
+            <a:srgbClr val="FFFFFF"/>
+          </a:solidFill>
+          <a:ln w="12700">
+            <a:solidFill>
+              <a:srgbClr val="E3E9ED"/>
+            </a:solidFill>
+            <a:prstDash val="solid"/>
+          </a:ln>
+        </p:spPr>
+        <p:txBody>
+          <a:bodyPr/>
+          <a:lstStyle/>
+          <a:p>
+            <a:endParaRPr lang="it-IT"/>
+          </a:p>
+        </p:txBody>
+      </p:sp>
+      <p:sp>
+        <p:nvSpPr>
+          <p:cNvPr id="5" name="Shape 3"/>
+          <p:cNvSpPr/>
+          <p:nvPr/>
+        </p:nvSpPr>
+        <p:spPr>
+          <a:xfrm>
+            <a:off x="640080" y="1691640"/>
+            <a:ext cx="82296" cy="914400"/>
+          </a:xfrm>
+          <a:prstGeom prst="rect">
+            <a:avLst/>
+          </a:prstGeom>
+          <a:solidFill>
+            <a:srgbClr val="1C7293"/>
+          </a:solidFill>
+          <a:ln/>
+        </p:spPr>
+        <p:txBody>
+          <a:bodyPr/>
+          <a:lstStyle/>
+          <a:p>
+            <a:endParaRPr lang="it-IT"/>
+          </a:p>
+        </p:txBody>
+      </p:sp>
+      <p:sp>
+        <p:nvSpPr>
+          <p:cNvPr id="6" name="Text 4"/>
+          <p:cNvSpPr/>
+          <p:nvPr/>
+        </p:nvSpPr>
+        <p:spPr>
+          <a:xfrm>
+            <a:off x="868680" y="1764792"/>
+            <a:ext cx="4892040" cy="320040"/>
+          </a:xfrm>
+          <a:prstGeom prst="rect">
+            <a:avLst/>
+          </a:prstGeom>
+          <a:noFill/>
+          <a:ln/>
+        </p:spPr>
+        <p:txBody>
+          <a:bodyPr wrap="square" rtlCol="0" anchor="ctr"/>
+          <a:lstStyle/>
+          <a:p>
+            <a:pPr marL="0" indent="0">
+              <a:buNone/>
+            </a:pPr>
+            <a:r>
+              <a:rPr lang="en-US" sz="1350" b="1" dirty="0">
+                <a:solidFill>
+                  <a:srgbClr val="1A2733"/>
+                </a:solidFill>
+                <a:latin typeface="Cambria" pitchFamily="34" charset="0"/>
+                <a:ea typeface="Cambria" pitchFamily="34" charset="-122"/>
+                <a:cs typeface="Cambria" pitchFamily="34" charset="-120"/>
+              </a:rPr>
+              <a:t>Strutture ricettive</a:t>
+            </a:r>
+            <a:endParaRPr lang="en-US" sz="1350" dirty="0"/>
+          </a:p>
+        </p:txBody>
+      </p:sp>
+      <p:sp>
+        <p:nvSpPr>
+          <p:cNvPr id="7" name="Text 5"/>
+          <p:cNvSpPr/>
+          <p:nvPr/>
+        </p:nvSpPr>
+        <p:spPr>
+          <a:xfrm>
+            <a:off x="868680" y="2075688"/>
+            <a:ext cx="4892040" cy="502920"/>
+          </a:xfrm>
+          <a:prstGeom prst="rect">
+            <a:avLst/>
+          </a:prstGeom>
+          <a:noFill/>
+          <a:ln/>
+        </p:spPr>
+        <p:txBody>
+          <a:bodyPr wrap="square" rtlCol="0" anchor="t"/>
+          <a:lstStyle/>
+          <a:p>
+            <a:pPr marL="0" indent="0">
+              <a:buNone/>
+            </a:pPr>
+            <a:r>
+              <a:rPr lang="en-US" sz="1050" dirty="0">
+                <a:solidFill>
+                  <a:srgbClr val="5B6B75"/>
+                </a:solidFill>
+                <a:latin typeface="Calibri" pitchFamily="34" charset="0"/>
+                <a:ea typeface="Calibri" pitchFamily="34" charset="-122"/>
+                <a:cs typeface="Calibri" pitchFamily="34" charset="-120"/>
+              </a:rPr>
+              <a:t>Tabella sorgente pulita, 6.250 righe, con colonne di qualità (Sito_valido, Email_multiple) e prezzo collegato</a:t>
+            </a:r>
+            <a:endParaRPr lang="en-US" sz="1050" dirty="0"/>
+          </a:p>
+        </p:txBody>
+      </p:sp>
+      <p:sp>
+        <p:nvSpPr>
+          <p:cNvPr id="8" name="Shape 6"/>
+          <p:cNvSpPr/>
+          <p:nvPr/>
+        </p:nvSpPr>
+        <p:spPr>
+          <a:xfrm>
+            <a:off x="640080" y="2743200"/>
+            <a:ext cx="5257800" cy="914400"/>
+          </a:xfrm>
+          <a:prstGeom prst="roundRect">
+            <a:avLst>
+              <a:gd name="adj" fmla="val 6000"/>
+            </a:avLst>
+          </a:prstGeom>
+          <a:solidFill>
+            <a:srgbClr val="FFFFFF"/>
+          </a:solidFill>
+          <a:ln w="12700">
+            <a:solidFill>
+              <a:srgbClr val="E3E9ED"/>
+            </a:solidFill>
+            <a:prstDash val="solid"/>
+          </a:ln>
+        </p:spPr>
+        <p:txBody>
+          <a:bodyPr/>
+          <a:lstStyle/>
+          <a:p>
+            <a:endParaRPr lang="it-IT"/>
+          </a:p>
+        </p:txBody>
+      </p:sp>
+      <p:sp>
+        <p:nvSpPr>
+          <p:cNvPr id="9" name="Shape 7"/>
+          <p:cNvSpPr/>
+          <p:nvPr/>
+        </p:nvSpPr>
+        <p:spPr>
+          <a:xfrm>
+            <a:off x="640080" y="2743200"/>
+            <a:ext cx="82296" cy="914400"/>
+          </a:xfrm>
+          <a:prstGeom prst="rect">
+            <a:avLst/>
+          </a:prstGeom>
+          <a:solidFill>
+            <a:srgbClr val="E8871E"/>
+          </a:solidFill>
+          <a:ln/>
+        </p:spPr>
+        <p:txBody>
+          <a:bodyPr/>
+          <a:lstStyle/>
+          <a:p>
+            <a:endParaRPr lang="it-IT"/>
+          </a:p>
+        </p:txBody>
+      </p:sp>
+      <p:sp>
+        <p:nvSpPr>
+          <p:cNvPr id="10" name="Text 8"/>
+          <p:cNvSpPr/>
+          <p:nvPr/>
+        </p:nvSpPr>
+        <p:spPr>
+          <a:xfrm>
+            <a:off x="868680" y="2816352"/>
+            <a:ext cx="4892040" cy="320040"/>
+          </a:xfrm>
+          <a:prstGeom prst="rect">
+            <a:avLst/>
+          </a:prstGeom>
+          <a:noFill/>
+          <a:ln/>
+        </p:spPr>
+        <p:txBody>
+          <a:bodyPr wrap="square" rtlCol="0" anchor="ctr"/>
+          <a:lstStyle/>
+          <a:p>
+            <a:pPr marL="0" indent="0">
+              <a:buNone/>
+            </a:pPr>
+            <a:r>
+              <a:rPr lang="en-US" sz="1350" b="1" dirty="0">
+                <a:solidFill>
+                  <a:srgbClr val="1A2733"/>
+                </a:solidFill>
+                <a:latin typeface="Cambria" pitchFamily="34" charset="0"/>
+                <a:ea typeface="Cambria" pitchFamily="34" charset="-122"/>
+                <a:cs typeface="Cambria" pitchFamily="34" charset="-120"/>
+              </a:rPr>
+              <a:t>prezzi</a:t>
+            </a:r>
+            <a:endParaRPr lang="en-US" sz="1350" dirty="0"/>
+          </a:p>
+        </p:txBody>
+      </p:sp>
+      <p:sp>
+        <p:nvSpPr>
+          <p:cNvPr id="11" name="Text 9"/>
+          <p:cNvSpPr/>
+          <p:nvPr/>
+        </p:nvSpPr>
+        <p:spPr>
+          <a:xfrm>
+            <a:off x="868680" y="3127248"/>
+            <a:ext cx="4892040" cy="502920"/>
+          </a:xfrm>
+          <a:prstGeom prst="rect">
+            <a:avLst/>
+          </a:prstGeom>
+          <a:noFill/>
+          <a:ln/>
+        </p:spPr>
+        <p:txBody>
+          <a:bodyPr wrap="square" rtlCol="0" anchor="t"/>
+          <a:lstStyle/>
+          <a:p>
+            <a:pPr marL="0" indent="0">
+              <a:buNone/>
+            </a:pPr>
+            <a:r>
+              <a:rPr lang="en-US" sz="1050" dirty="0">
+                <a:solidFill>
+                  <a:srgbClr val="5B6B75"/>
+                </a:solidFill>
+                <a:latin typeface="Calibri" pitchFamily="34" charset="0"/>
+                <a:ea typeface="Calibri" pitchFamily="34" charset="-122"/>
+                <a:cs typeface="Calibri" pitchFamily="34" charset="-120"/>
+              </a:rPr>
+              <a:t>234 città con prezzo medio, intestazione ricostruita, tipizzata</a:t>
+            </a:r>
+            <a:endParaRPr lang="en-US" sz="1050" dirty="0"/>
+          </a:p>
+        </p:txBody>
+      </p:sp>
+      <p:sp>
+        <p:nvSpPr>
+          <p:cNvPr id="12" name="Shape 10"/>
+          <p:cNvSpPr/>
+          <p:nvPr/>
+        </p:nvSpPr>
+        <p:spPr>
+          <a:xfrm>
+            <a:off x="640080" y="3794760"/>
+            <a:ext cx="5257800" cy="914400"/>
+          </a:xfrm>
+          <a:prstGeom prst="roundRect">
+            <a:avLst>
+              <a:gd name="adj" fmla="val 6000"/>
+            </a:avLst>
+          </a:prstGeom>
+          <a:solidFill>
+            <a:srgbClr val="FFFFFF"/>
+          </a:solidFill>
+          <a:ln w="12700">
+            <a:solidFill>
+              <a:srgbClr val="E3E9ED"/>
+            </a:solidFill>
+            <a:prstDash val="solid"/>
+          </a:ln>
+        </p:spPr>
+        <p:txBody>
+          <a:bodyPr/>
+          <a:lstStyle/>
+          <a:p>
+            <a:endParaRPr lang="it-IT"/>
+          </a:p>
+        </p:txBody>
+      </p:sp>
+      <p:sp>
+        <p:nvSpPr>
+          <p:cNvPr id="13" name="Shape 11"/>
+          <p:cNvSpPr/>
+          <p:nvPr/>
+        </p:nvSpPr>
+        <p:spPr>
+          <a:xfrm>
+            <a:off x="640080" y="3794760"/>
+            <a:ext cx="82296" cy="914400"/>
+          </a:xfrm>
+          <a:prstGeom prst="rect">
+            <a:avLst/>
+          </a:prstGeom>
+          <a:solidFill>
+            <a:srgbClr val="1C7293"/>
+          </a:solidFill>
+          <a:ln/>
+        </p:spPr>
+        <p:txBody>
+          <a:bodyPr/>
+          <a:lstStyle/>
+          <a:p>
+            <a:endParaRPr lang="it-IT"/>
+          </a:p>
+        </p:txBody>
+      </p:sp>
+      <p:sp>
+        <p:nvSpPr>
+          <p:cNvPr id="14" name="Text 12"/>
+          <p:cNvSpPr/>
+          <p:nvPr/>
+        </p:nvSpPr>
+        <p:spPr>
+          <a:xfrm>
+            <a:off x="868680" y="3867912"/>
+            <a:ext cx="4892040" cy="320040"/>
+          </a:xfrm>
+          <a:prstGeom prst="rect">
+            <a:avLst/>
+          </a:prstGeom>
+          <a:noFill/>
+          <a:ln/>
+        </p:spPr>
+        <p:txBody>
+          <a:bodyPr wrap="square" rtlCol="0" anchor="ctr"/>
+          <a:lstStyle/>
+          <a:p>
+            <a:pPr marL="0" indent="0">
+              <a:buNone/>
+            </a:pPr>
+            <a:r>
+              <a:rPr lang="en-US" sz="1350" b="1" dirty="0">
+                <a:solidFill>
+                  <a:srgbClr val="1A2733"/>
+                </a:solidFill>
+                <a:latin typeface="Cambria" pitchFamily="34" charset="0"/>
+                <a:ea typeface="Cambria" pitchFamily="34" charset="-122"/>
+                <a:cs typeface="Cambria" pitchFamily="34" charset="-120"/>
+              </a:rPr>
+              <a:t>RICERCA</a:t>
+            </a:r>
+            <a:endParaRPr lang="en-US" sz="1350" dirty="0"/>
+          </a:p>
+        </p:txBody>
+      </p:sp>
+      <p:sp>
+        <p:nvSpPr>
+          <p:cNvPr id="15" name="Text 13"/>
+          <p:cNvSpPr/>
+          <p:nvPr/>
+        </p:nvSpPr>
+        <p:spPr>
+          <a:xfrm>
+            <a:off x="868680" y="4178808"/>
+            <a:ext cx="4892040" cy="502920"/>
+          </a:xfrm>
+          <a:prstGeom prst="rect">
+            <a:avLst/>
+          </a:prstGeom>
+          <a:noFill/>
+          <a:ln/>
+        </p:spPr>
+        <p:txBody>
+          <a:bodyPr wrap="square" rtlCol="0" anchor="t"/>
+          <a:lstStyle/>
+          <a:p>
+            <a:pPr marL="0" indent="0">
+              <a:buNone/>
+            </a:pPr>
+            <a:r>
+              <a:rPr lang="en-US" sz="1050" dirty="0">
+                <a:solidFill>
+                  <a:srgbClr val="5B6B75"/>
+                </a:solidFill>
+                <a:latin typeface="Calibri" pitchFamily="34" charset="0"/>
+                <a:ea typeface="Calibri" pitchFamily="34" charset="-122"/>
+                <a:cs typeface="Calibri" pitchFamily="34" charset="-120"/>
+              </a:rPr>
+              <a:t>Ricerca interattiva per struttura: menu a tendina + recupero automatico</a:t>
+            </a:r>
+            <a:endParaRPr lang="en-US" sz="1050" dirty="0"/>
+          </a:p>
+        </p:txBody>
+      </p:sp>
+      <p:sp>
+        <p:nvSpPr>
+          <p:cNvPr id="16" name="Shape 14"/>
+          <p:cNvSpPr/>
+          <p:nvPr/>
+        </p:nvSpPr>
+        <p:spPr>
+          <a:xfrm>
+            <a:off x="640080" y="4846320"/>
+            <a:ext cx="5257800" cy="914400"/>
+          </a:xfrm>
+          <a:prstGeom prst="roundRect">
+            <a:avLst>
+              <a:gd name="adj" fmla="val 6000"/>
+            </a:avLst>
+          </a:prstGeom>
+          <a:solidFill>
+            <a:srgbClr val="FFFFFF"/>
+          </a:solidFill>
+          <a:ln w="12700">
+            <a:solidFill>
+              <a:srgbClr val="E3E9ED"/>
+            </a:solidFill>
+            <a:prstDash val="solid"/>
+          </a:ln>
+        </p:spPr>
+        <p:txBody>
+          <a:bodyPr/>
+          <a:lstStyle/>
+          <a:p>
+            <a:endParaRPr lang="it-IT"/>
+          </a:p>
+        </p:txBody>
+      </p:sp>
+      <p:sp>
+        <p:nvSpPr>
+          <p:cNvPr id="17" name="Shape 15"/>
+          <p:cNvSpPr/>
+          <p:nvPr/>
+        </p:nvSpPr>
+        <p:spPr>
+          <a:xfrm>
+            <a:off x="640080" y="4846320"/>
+            <a:ext cx="82296" cy="914400"/>
+          </a:xfrm>
+          <a:prstGeom prst="rect">
+            <a:avLst/>
+          </a:prstGeom>
+          <a:solidFill>
+            <a:srgbClr val="E8871E"/>
+          </a:solidFill>
+          <a:ln/>
+        </p:spPr>
+        <p:txBody>
+          <a:bodyPr/>
+          <a:lstStyle/>
+          <a:p>
+            <a:endParaRPr lang="it-IT"/>
+          </a:p>
+        </p:txBody>
+      </p:sp>
+      <p:sp>
+        <p:nvSpPr>
+          <p:cNvPr id="18" name="Text 16"/>
+          <p:cNvSpPr/>
+          <p:nvPr/>
+        </p:nvSpPr>
+        <p:spPr>
+          <a:xfrm>
+            <a:off x="868680" y="4919472"/>
+            <a:ext cx="4892040" cy="320040"/>
+          </a:xfrm>
+          <a:prstGeom prst="rect">
+            <a:avLst/>
+          </a:prstGeom>
+          <a:noFill/>
+          <a:ln/>
+        </p:spPr>
+        <p:txBody>
+          <a:bodyPr wrap="square" rtlCol="0" anchor="ctr"/>
+          <a:lstStyle/>
+          <a:p>
+            <a:pPr marL="0" indent="0">
+              <a:buNone/>
+            </a:pPr>
+            <a:r>
+              <a:rPr lang="en-US" sz="1350" b="1" dirty="0">
+                <a:solidFill>
+                  <a:srgbClr val="1A2733"/>
+                </a:solidFill>
+                <a:latin typeface="Cambria" pitchFamily="34" charset="0"/>
+                <a:ea typeface="Cambria" pitchFamily="34" charset="-122"/>
+                <a:cs typeface="Cambria" pitchFamily="34" charset="-120"/>
+              </a:rPr>
+              <a:t>Sintesi_Categorie</a:t>
+            </a:r>
+            <a:endParaRPr lang="en-US" sz="1350" dirty="0"/>
+          </a:p>
+        </p:txBody>
+      </p:sp>
+      <p:sp>
+        <p:nvSpPr>
+          <p:cNvPr id="19" name="Text 17"/>
+          <p:cNvSpPr/>
+          <p:nvPr/>
+        </p:nvSpPr>
+        <p:spPr>
+          <a:xfrm>
+            <a:off x="868680" y="5230368"/>
+            <a:ext cx="4892040" cy="502920"/>
+          </a:xfrm>
+          <a:prstGeom prst="rect">
+            <a:avLst/>
+          </a:prstGeom>
+          <a:noFill/>
+          <a:ln/>
+        </p:spPr>
+        <p:txBody>
+          <a:bodyPr wrap="square" rtlCol="0" anchor="t"/>
+          <a:lstStyle/>
+          <a:p>
+            <a:pPr marL="0" indent="0">
+              <a:buNone/>
+            </a:pPr>
+            <a:r>
+              <a:rPr lang="en-US" sz="1050" dirty="0">
+                <a:solidFill>
+                  <a:srgbClr val="5B6B75"/>
+                </a:solidFill>
+                <a:latin typeface="Calibri" pitchFamily="34" charset="0"/>
+                <a:ea typeface="Calibri" pitchFamily="34" charset="-122"/>
+                <a:cs typeface="Calibri" pitchFamily="34" charset="-120"/>
+              </a:rPr>
+              <a:t>Le 15 categorie ordinate per numero di strutture (pivot sul Modello dati)</a:t>
+            </a:r>
+            <a:endParaRPr lang="en-US" sz="1050" dirty="0"/>
+          </a:p>
+        </p:txBody>
+      </p:sp>
+      <p:sp>
+        <p:nvSpPr>
+          <p:cNvPr id="20" name="Shape 18"/>
+          <p:cNvSpPr/>
+          <p:nvPr/>
+        </p:nvSpPr>
+        <p:spPr>
+          <a:xfrm>
+            <a:off x="6263640" y="1691640"/>
+            <a:ext cx="5257800" cy="914400"/>
+          </a:xfrm>
+          <a:prstGeom prst="roundRect">
+            <a:avLst>
+              <a:gd name="adj" fmla="val 6000"/>
+            </a:avLst>
+          </a:prstGeom>
+          <a:solidFill>
+            <a:srgbClr val="FFFFFF"/>
+          </a:solidFill>
+          <a:ln w="12700">
+            <a:solidFill>
+              <a:srgbClr val="E3E9ED"/>
+            </a:solidFill>
+            <a:prstDash val="solid"/>
+          </a:ln>
+        </p:spPr>
+        <p:txBody>
+          <a:bodyPr/>
+          <a:lstStyle/>
+          <a:p>
+            <a:endParaRPr lang="it-IT"/>
+          </a:p>
+        </p:txBody>
+      </p:sp>
+      <p:sp>
+        <p:nvSpPr>
+          <p:cNvPr id="21" name="Shape 19"/>
+          <p:cNvSpPr/>
+          <p:nvPr/>
+        </p:nvSpPr>
+        <p:spPr>
+          <a:xfrm>
+            <a:off x="6263640" y="1691640"/>
+            <a:ext cx="82296" cy="914400"/>
+          </a:xfrm>
+          <a:prstGeom prst="rect">
+            <a:avLst/>
+          </a:prstGeom>
+          <a:solidFill>
+            <a:srgbClr val="1C7293"/>
+          </a:solidFill>
+          <a:ln/>
+        </p:spPr>
+        <p:txBody>
+          <a:bodyPr/>
+          <a:lstStyle/>
+          <a:p>
+            <a:endParaRPr lang="it-IT"/>
+          </a:p>
+        </p:txBody>
+      </p:sp>
+      <p:sp>
+        <p:nvSpPr>
+          <p:cNvPr id="22" name="Text 20"/>
+          <p:cNvSpPr/>
+          <p:nvPr/>
+        </p:nvSpPr>
+        <p:spPr>
+          <a:xfrm>
+            <a:off x="6492240" y="1764792"/>
+            <a:ext cx="4892040" cy="320040"/>
+          </a:xfrm>
+          <a:prstGeom prst="rect">
+            <a:avLst/>
+          </a:prstGeom>
+          <a:noFill/>
+          <a:ln/>
+        </p:spPr>
+        <p:txBody>
+          <a:bodyPr wrap="square" rtlCol="0" anchor="ctr"/>
+          <a:lstStyle/>
+          <a:p>
+            <a:pPr marL="0" indent="0">
+              <a:buNone/>
+            </a:pPr>
+            <a:r>
+              <a:rPr lang="en-US" sz="1350" b="1" dirty="0">
+                <a:solidFill>
+                  <a:srgbClr val="1A2733"/>
+                </a:solidFill>
+                <a:latin typeface="Cambria" pitchFamily="34" charset="0"/>
+                <a:ea typeface="Cambria" pitchFamily="34" charset="-122"/>
+                <a:cs typeface="Cambria" pitchFamily="34" charset="-120"/>
+              </a:rPr>
+              <a:t>Estrazione_Città</a:t>
+            </a:r>
+            <a:endParaRPr lang="en-US" sz="1350" dirty="0"/>
+          </a:p>
+        </p:txBody>
+      </p:sp>
+      <p:sp>
+        <p:nvSpPr>
+          <p:cNvPr id="23" name="Text 21"/>
+          <p:cNvSpPr/>
+          <p:nvPr/>
+        </p:nvSpPr>
+        <p:spPr>
+          <a:xfrm>
+            <a:off x="6492240" y="2075688"/>
+            <a:ext cx="4892040" cy="502920"/>
+          </a:xfrm>
+          <a:prstGeom prst="rect">
+            <a:avLst/>
+          </a:prstGeom>
+          <a:noFill/>
+          <a:ln/>
+        </p:spPr>
+        <p:txBody>
+          <a:bodyPr wrap="square" rtlCol="0" anchor="t"/>
+          <a:lstStyle/>
+          <a:p>
+            <a:pPr marL="0" indent="0">
+              <a:buNone/>
+            </a:pPr>
+            <a:r>
+              <a:rPr lang="en-US" sz="1050" dirty="0">
+                <a:solidFill>
+                  <a:srgbClr val="5B6B75"/>
+                </a:solidFill>
+                <a:latin typeface="Calibri" pitchFamily="34" charset="0"/>
+                <a:ea typeface="Calibri" pitchFamily="34" charset="-122"/>
+                <a:cs typeface="Calibri" pitchFamily="34" charset="-120"/>
+              </a:rPr>
+              <a:t>Esempio di tabella strutturata: strutture di una città, ordinate per categoria</a:t>
+            </a:r>
+            <a:endParaRPr lang="en-US" sz="1050" dirty="0"/>
+          </a:p>
+        </p:txBody>
+      </p:sp>
+      <p:sp>
+        <p:nvSpPr>
+          <p:cNvPr id="24" name="Shape 22"/>
+          <p:cNvSpPr/>
+          <p:nvPr/>
+        </p:nvSpPr>
+        <p:spPr>
+          <a:xfrm>
+            <a:off x="6263640" y="2743200"/>
+            <a:ext cx="5257800" cy="914400"/>
+          </a:xfrm>
+          <a:prstGeom prst="roundRect">
+            <a:avLst>
+              <a:gd name="adj" fmla="val 6000"/>
+            </a:avLst>
+          </a:prstGeom>
+          <a:solidFill>
+            <a:srgbClr val="FFFFFF"/>
+          </a:solidFill>
+          <a:ln w="12700">
+            <a:solidFill>
+              <a:srgbClr val="E3E9ED"/>
+            </a:solidFill>
+            <a:prstDash val="solid"/>
+          </a:ln>
+        </p:spPr>
+        <p:txBody>
+          <a:bodyPr/>
+          <a:lstStyle/>
+          <a:p>
+            <a:endParaRPr lang="it-IT"/>
+          </a:p>
+        </p:txBody>
+      </p:sp>
+      <p:sp>
+        <p:nvSpPr>
+          <p:cNvPr id="25" name="Shape 23"/>
+          <p:cNvSpPr/>
+          <p:nvPr/>
+        </p:nvSpPr>
+        <p:spPr>
+          <a:xfrm>
+            <a:off x="6263640" y="2743200"/>
+            <a:ext cx="82296" cy="914400"/>
+          </a:xfrm>
+          <a:prstGeom prst="rect">
+            <a:avLst/>
+          </a:prstGeom>
+          <a:solidFill>
+            <a:srgbClr val="E8871E"/>
+          </a:solidFill>
+          <a:ln/>
+        </p:spPr>
+        <p:txBody>
+          <a:bodyPr/>
+          <a:lstStyle/>
+          <a:p>
+            <a:endParaRPr lang="it-IT"/>
+          </a:p>
+        </p:txBody>
+      </p:sp>
+      <p:sp>
+        <p:nvSpPr>
+          <p:cNvPr id="26" name="Text 24"/>
+          <p:cNvSpPr/>
+          <p:nvPr/>
+        </p:nvSpPr>
+        <p:spPr>
+          <a:xfrm>
+            <a:off x="6492240" y="2816352"/>
+            <a:ext cx="4892040" cy="320040"/>
+          </a:xfrm>
+          <a:prstGeom prst="rect">
+            <a:avLst/>
+          </a:prstGeom>
+          <a:noFill/>
+          <a:ln/>
+        </p:spPr>
+        <p:txBody>
+          <a:bodyPr wrap="square" rtlCol="0" anchor="ctr"/>
+          <a:lstStyle/>
+          <a:p>
+            <a:pPr marL="0" indent="0">
+              <a:buNone/>
+            </a:pPr>
+            <a:r>
+              <a:rPr lang="en-US" sz="1350" b="1" dirty="0">
+                <a:solidFill>
+                  <a:srgbClr val="1A2733"/>
+                </a:solidFill>
+                <a:latin typeface="Cambria" pitchFamily="34" charset="0"/>
+                <a:ea typeface="Cambria" pitchFamily="34" charset="-122"/>
+                <a:cs typeface="Cambria" pitchFamily="34" charset="-120"/>
+              </a:rPr>
+              <a:t>tabelle di controllo</a:t>
+            </a:r>
+            <a:endParaRPr lang="en-US" sz="1350" dirty="0"/>
+          </a:p>
+        </p:txBody>
+      </p:sp>
+      <p:sp>
+        <p:nvSpPr>
+          <p:cNvPr id="27" name="Text 25"/>
+          <p:cNvSpPr/>
+          <p:nvPr/>
+        </p:nvSpPr>
+        <p:spPr>
+          <a:xfrm>
+            <a:off x="6492240" y="3127248"/>
+            <a:ext cx="4892040" cy="502920"/>
+          </a:xfrm>
+          <a:prstGeom prst="rect">
+            <a:avLst/>
+          </a:prstGeom>
+          <a:noFill/>
+          <a:ln/>
+        </p:spPr>
+        <p:txBody>
+          <a:bodyPr wrap="square" rtlCol="0" anchor="t"/>
+          <a:lstStyle/>
+          <a:p>
+            <a:pPr marL="0" indent="0">
+              <a:buNone/>
+            </a:pPr>
+            <a:r>
+              <a:rPr lang="en-US" sz="1050" dirty="0">
+                <a:solidFill>
+                  <a:srgbClr val="5B6B75"/>
+                </a:solidFill>
+                <a:latin typeface="Calibri" pitchFamily="34" charset="0"/>
+                <a:ea typeface="Calibri" pitchFamily="34" charset="-122"/>
+                <a:cs typeface="Calibri" pitchFamily="34" charset="-120"/>
+              </a:rPr>
+              <a:t>Pivot di verifica del raggruppamento per città</a:t>
+            </a:r>
+            <a:endParaRPr lang="en-US" sz="1050" dirty="0"/>
+          </a:p>
+        </p:txBody>
+      </p:sp>
+      <p:sp>
+        <p:nvSpPr>
+          <p:cNvPr id="28" name="Shape 26"/>
+          <p:cNvSpPr/>
+          <p:nvPr/>
+        </p:nvSpPr>
+        <p:spPr>
+          <a:xfrm>
+            <a:off x="6263640" y="3794760"/>
+            <a:ext cx="5257800" cy="914400"/>
+          </a:xfrm>
+          <a:prstGeom prst="roundRect">
+            <a:avLst>
+              <a:gd name="adj" fmla="val 6000"/>
+            </a:avLst>
+          </a:prstGeom>
+          <a:solidFill>
+            <a:srgbClr val="FFFFFF"/>
+          </a:solidFill>
+          <a:ln w="12700">
+            <a:solidFill>
+              <a:srgbClr val="E3E9ED"/>
+            </a:solidFill>
+            <a:prstDash val="solid"/>
+          </a:ln>
+        </p:spPr>
+        <p:txBody>
+          <a:bodyPr/>
+          <a:lstStyle/>
+          <a:p>
+            <a:endParaRPr lang="it-IT"/>
+          </a:p>
+        </p:txBody>
+      </p:sp>
+      <p:sp>
+        <p:nvSpPr>
+          <p:cNvPr id="29" name="Shape 27"/>
+          <p:cNvSpPr/>
+          <p:nvPr/>
+        </p:nvSpPr>
+        <p:spPr>
+          <a:xfrm>
+            <a:off x="6263640" y="3794760"/>
+            <a:ext cx="82296" cy="914400"/>
+          </a:xfrm>
+          <a:prstGeom prst="rect">
+            <a:avLst/>
+          </a:prstGeom>
+          <a:solidFill>
+            <a:srgbClr val="1C7293"/>
+          </a:solidFill>
+          <a:ln/>
+        </p:spPr>
+        <p:txBody>
+          <a:bodyPr/>
+          <a:lstStyle/>
+          <a:p>
+            <a:endParaRPr lang="it-IT"/>
+          </a:p>
+        </p:txBody>
+      </p:sp>
+      <p:sp>
+        <p:nvSpPr>
+          <p:cNvPr id="30" name="Text 28"/>
+          <p:cNvSpPr/>
+          <p:nvPr/>
+        </p:nvSpPr>
+        <p:spPr>
+          <a:xfrm>
+            <a:off x="6492240" y="3867912"/>
+            <a:ext cx="4892040" cy="320040"/>
+          </a:xfrm>
+          <a:prstGeom prst="rect">
+            <a:avLst/>
+          </a:prstGeom>
+          <a:noFill/>
+          <a:ln/>
+        </p:spPr>
+        <p:txBody>
+          <a:bodyPr wrap="square" rtlCol="0" anchor="ctr"/>
+          <a:lstStyle/>
+          <a:p>
+            <a:pPr marL="0" indent="0">
+              <a:buNone/>
+            </a:pPr>
+            <a:r>
+              <a:rPr lang="en-US" sz="1350" b="1" dirty="0">
+                <a:solidFill>
+                  <a:srgbClr val="1A2733"/>
+                </a:solidFill>
+                <a:latin typeface="Cambria" pitchFamily="34" charset="0"/>
+                <a:ea typeface="Cambria" pitchFamily="34" charset="-122"/>
+                <a:cs typeface="Cambria" pitchFamily="34" charset="-120"/>
+              </a:rPr>
+              <a:t>Analisi_Prezzi</a:t>
+            </a:r>
+            <a:endParaRPr lang="en-US" sz="1350" dirty="0"/>
+          </a:p>
+        </p:txBody>
+      </p:sp>
+      <p:sp>
+        <p:nvSpPr>
+          <p:cNvPr id="31" name="Text 29"/>
+          <p:cNvSpPr/>
+          <p:nvPr/>
+        </p:nvSpPr>
+        <p:spPr>
+          <a:xfrm>
+            <a:off x="6492240" y="4178808"/>
+            <a:ext cx="4892040" cy="502920"/>
+          </a:xfrm>
+          <a:prstGeom prst="rect">
+            <a:avLst/>
+          </a:prstGeom>
+          <a:noFill/>
+          <a:ln/>
+        </p:spPr>
+        <p:txBody>
+          <a:bodyPr wrap="square" rtlCol="0" anchor="t"/>
+          <a:lstStyle/>
+          <a:p>
+            <a:pPr marL="0" indent="0">
+              <a:buNone/>
+            </a:pPr>
+            <a:r>
+              <a:rPr lang="en-US" sz="1050" dirty="0">
+                <a:solidFill>
+                  <a:srgbClr val="5B6B75"/>
+                </a:solidFill>
+                <a:latin typeface="Calibri" pitchFamily="34" charset="0"/>
+                <a:ea typeface="Calibri" pitchFamily="34" charset="-122"/>
+                <a:cs typeface="Calibri" pitchFamily="34" charset="-120"/>
+              </a:rPr>
+              <a:t>L'intera analisi statistica: descrittiva, probabilità, IC, regressione</a:t>
+            </a:r>
+            <a:endParaRPr lang="en-US" sz="1050" dirty="0"/>
+          </a:p>
+        </p:txBody>
+      </p:sp>
+      <p:sp>
+        <p:nvSpPr>
+          <p:cNvPr id="32" name="Text 30"/>
+          <p:cNvSpPr/>
+          <p:nvPr/>
+        </p:nvSpPr>
+        <p:spPr>
+          <a:xfrm>
+            <a:off x="457200" y="6473952"/>
+            <a:ext cx="5486400" cy="274320"/>
+          </a:xfrm>
+          <a:prstGeom prst="rect">
+            <a:avLst/>
+          </a:prstGeom>
+          <a:noFill/>
+          <a:ln/>
+        </p:spPr>
+        <p:txBody>
+          <a:bodyPr wrap="square" rtlCol="0" anchor="ctr"/>
+          <a:lstStyle/>
+          <a:p>
+            <a:pPr marL="0" indent="0" algn="l">
+              <a:buNone/>
+            </a:pPr>
+            <a:r>
+              <a:rPr lang="en-US" sz="900" dirty="0">
+                <a:solidFill>
+                  <a:srgbClr val="5B6B75"/>
+                </a:solidFill>
+                <a:latin typeface="Calibri" pitchFamily="34" charset="0"/>
+                <a:ea typeface="Calibri" pitchFamily="34" charset="-122"/>
+                <a:cs typeface="Calibri" pitchFamily="34" charset="-120"/>
+              </a:rPr>
+              <a:t>Regione Marche — Patrimonio Ricettivo</a:t>
+            </a:r>
+            <a:endParaRPr lang="en-US" sz="900" dirty="0"/>
+          </a:p>
+        </p:txBody>
+      </p:sp>
+      <p:sp>
+        <p:nvSpPr>
+          <p:cNvPr id="33" name="Text 31"/>
+          <p:cNvSpPr/>
+          <p:nvPr/>
+        </p:nvSpPr>
+        <p:spPr>
+          <a:xfrm>
+            <a:off x="11274552" y="6473952"/>
+            <a:ext cx="457200" cy="274320"/>
+          </a:xfrm>
+          <a:prstGeom prst="rect">
+            <a:avLst/>
+          </a:prstGeom>
+          <a:noFill/>
+          <a:ln/>
+        </p:spPr>
+        <p:txBody>
+          <a:bodyPr wrap="square" rtlCol="0" anchor="ctr"/>
+          <a:lstStyle/>
+          <a:p>
+            <a:pPr marL="0" indent="0" algn="r">
+              <a:buNone/>
+            </a:pPr>
+            <a:r>
+              <a:rPr lang="en-US" sz="900" dirty="0">
+                <a:solidFill>
+                  <a:srgbClr val="5B6B75"/>
+                </a:solidFill>
+                <a:latin typeface="Calibri" pitchFamily="34" charset="0"/>
+                <a:ea typeface="Calibri" pitchFamily="34" charset="-122"/>
+                <a:cs typeface="Calibri" pitchFamily="34" charset="-120"/>
+              </a:rPr>
+              <a:t>9</a:t>
+            </a:r>
+            <a:endParaRPr lang="en-US" sz="900" dirty="0"/>
+          </a:p>
+        </p:txBody>
+      </p:sp>
+    </p:spTree>
+  </p:cSld>
+  <p:clrMapOvr>
+    <a:masterClrMapping/>
+  </p:clrMapOvr>
+</p:sld>
+</file>
+
+<file path=ppt/slides/slide11.xml><?xml version="1.0" encoding="utf-8"?>
+<p:sld xmlns:a="http://schemas.openxmlformats.org/drawingml/2006/main" xmlns:r="http://schemas.openxmlformats.org/officeDocument/2006/relationships" xmlns:p="http://schemas.openxmlformats.org/presentationml/2006/main">
   <p:cSld name="Slide 10">
     <p:bg>
       <p:bgPr>
@@ -2657,45 +4373,6 @@
       </p:sp>
       <p:sp>
         <p:nvSpPr>
-          <p:cNvPr id="3" name="Text 1"/>
-          <p:cNvSpPr/>
-          <p:nvPr/>
-        </p:nvSpPr>
-        <p:spPr>
-          <a:xfrm>
-            <a:off x="822960" y="1234440"/>
-            <a:ext cx="9601200" cy="457200"/>
-          </a:xfrm>
-          <a:prstGeom prst="rect">
-            <a:avLst/>
-          </a:prstGeom>
-          <a:noFill/>
-          <a:ln/>
-        </p:spPr>
-        <p:txBody>
-          <a:bodyPr wrap="square" rtlCol="0" anchor="ctr"/>
-          <a:lstStyle/>
-          <a:p>
-            <a:pPr marL="0" indent="0">
-              <a:buNone/>
-            </a:pPr>
-            <a:r>
-              <a:rPr lang="en-US" sz="1400" i="1" dirty="0">
-                <a:solidFill>
-                  <a:srgbClr val="CADCE8"/>
-                </a:solidFill>
-                <a:latin typeface="Calibri" pitchFamily="34" charset="0"/>
-                <a:ea typeface="Calibri" pitchFamily="34" charset="-122"/>
-                <a:cs typeface="Calibri" pitchFamily="34" charset="-120"/>
-              </a:rPr>
-              <a:t>Un modello dati pulito, e un'analisi statistica onesta anche quando il risultato non è quello "atteso"</a:t>
-            </a:r>
-            <a:endParaRPr lang="en-US" sz="1400" dirty="0"/>
-          </a:p>
-        </p:txBody>
-      </p:sp>
-      <p:sp>
-        <p:nvSpPr>
           <p:cNvPr id="4" name="Shape 2"/>
           <p:cNvSpPr/>
           <p:nvPr/>
@@ -3108,45 +4785,6 @@
           <a:lstStyle/>
           <a:p>
             <a:endParaRPr lang="it-IT"/>
-          </a:p>
-        </p:txBody>
-      </p:sp>
-      <p:sp>
-        <p:nvSpPr>
-          <p:cNvPr id="17" name="Text 12"/>
-          <p:cNvSpPr/>
-          <p:nvPr/>
-        </p:nvSpPr>
-        <p:spPr>
-          <a:xfrm>
-            <a:off x="822960" y="5394960"/>
-            <a:ext cx="10515600" cy="731520"/>
-          </a:xfrm>
-          <a:prstGeom prst="rect">
-            <a:avLst/>
-          </a:prstGeom>
-          <a:noFill/>
-          <a:ln/>
-        </p:spPr>
-        <p:txBody>
-          <a:bodyPr wrap="square" rtlCol="0" anchor="t"/>
-          <a:lstStyle/>
-          <a:p>
-            <a:pPr marL="0" indent="0">
-              <a:buNone/>
-            </a:pPr>
-            <a:r>
-              <a:rPr lang="en-US" sz="1300" i="1" dirty="0">
-                <a:solidFill>
-                  <a:srgbClr val="9FB2C2"/>
-                </a:solidFill>
-                <a:latin typeface="Calibri" pitchFamily="34" charset="0"/>
-                <a:ea typeface="Calibri" pitchFamily="34" charset="-122"/>
-                <a:cs typeface="Calibri" pitchFamily="34" charset="-120"/>
-              </a:rPr>
-              <a:t>Nel complesso, i dati suggeriscono un dataset costruito per l'esercizio più che un mercato reale — un'osservazione statistica legittima quanto qualunque altra, ed è giusto riportarla così com'è.</a:t>
-            </a:r>
-            <a:endParaRPr lang="en-US" sz="1300" dirty="0"/>
           </a:p>
         </p:txBody>
       </p:sp>
@@ -3325,15 +4963,24 @@
               <a:buNone/>
             </a:pPr>
             <a:r>
-              <a:rPr lang="en-US" sz="1400" dirty="0">
-                <a:solidFill>
-                  <a:srgbClr val="5B6B75"/>
-                </a:solidFill>
-                <a:latin typeface="Calibri" pitchFamily="34" charset="0"/>
-                <a:ea typeface="Calibri" pitchFamily="34" charset="-122"/>
-                <a:cs typeface="Calibri" pitchFamily="34" charset="-120"/>
-              </a:rPr>
-              <a:t>Due file grezzi, con problemi tipici di dati amministrativi non curati</a:t>
+              <a:rPr lang="en-US" sz="1400" dirty="0" err="1"/>
+              <a:t>Osservazione</a:t>
+            </a:r>
+            <a:r>
+              <a:rPr lang="en-US" sz="1400" dirty="0"/>
+              <a:t> degli </a:t>
+            </a:r>
+            <a:r>
+              <a:rPr lang="en-US" sz="1400" dirty="0" err="1"/>
+              <a:t>errori</a:t>
+            </a:r>
+            <a:r>
+              <a:rPr lang="en-US" sz="1400" dirty="0"/>
+              <a:t> </a:t>
+            </a:r>
+            <a:r>
+              <a:rPr lang="en-US" sz="1400" dirty="0" err="1"/>
+              <a:t>trovati</a:t>
             </a:r>
             <a:endParaRPr lang="en-US" sz="1400" dirty="0"/>
           </a:p>
@@ -3701,7 +5348,40 @@
                 <a:ea typeface="Calibri" pitchFamily="34" charset="-122"/>
                 <a:cs typeface="Calibri" pitchFamily="34" charset="-120"/>
               </a:rPr>
-              <a:t>Email multiple nella stessa cella ("a@x.it ; b@y.it")</a:t>
+              <a:t>Email multiple nella </a:t>
+            </a:r>
+            <a:r>
+              <a:rPr lang="en-US" sz="1250" dirty="0" err="1">
+                <a:solidFill>
+                  <a:srgbClr val="1A2733"/>
+                </a:solidFill>
+                <a:latin typeface="Calibri" pitchFamily="34" charset="0"/>
+                <a:ea typeface="Calibri" pitchFamily="34" charset="-122"/>
+                <a:cs typeface="Calibri" pitchFamily="34" charset="-120"/>
+              </a:rPr>
+              <a:t>stessa</a:t>
+            </a:r>
+            <a:r>
+              <a:rPr lang="en-US" sz="1250" dirty="0">
+                <a:solidFill>
+                  <a:srgbClr val="1A2733"/>
+                </a:solidFill>
+                <a:latin typeface="Calibri" pitchFamily="34" charset="0"/>
+                <a:ea typeface="Calibri" pitchFamily="34" charset="-122"/>
+                <a:cs typeface="Calibri" pitchFamily="34" charset="-120"/>
+              </a:rPr>
+              <a:t> </a:t>
+            </a:r>
+            <a:r>
+              <a:rPr lang="en-US" sz="1250" dirty="0" err="1">
+                <a:solidFill>
+                  <a:srgbClr val="1A2733"/>
+                </a:solidFill>
+                <a:latin typeface="Calibri" pitchFamily="34" charset="0"/>
+                <a:ea typeface="Calibri" pitchFamily="34" charset="-122"/>
+                <a:cs typeface="Calibri" pitchFamily="34" charset="-120"/>
+              </a:rPr>
+              <a:t>cella</a:t>
             </a:r>
             <a:endParaRPr lang="en-US" sz="1250" dirty="0"/>
           </a:p>
@@ -3767,7 +5447,51 @@
                 <a:ea typeface="Calibri" pitchFamily="34" charset="-122"/>
                 <a:cs typeface="Calibri" pitchFamily="34" charset="-120"/>
               </a:rPr>
-              <a:t>Siti web ed email finiti per errore nella colonna sbagliata (es. un sito dentro "Località")</a:t>
+              <a:t>Siti web ed email finiti per errore nella colonna sbagliata (es. un sito dentro "</a:t>
+            </a:r>
+            <a:r>
+              <a:rPr lang="en-US" sz="1250" dirty="0" err="1">
+                <a:solidFill>
+                  <a:srgbClr val="1A2733"/>
+                </a:solidFill>
+                <a:latin typeface="Calibri" pitchFamily="34" charset="0"/>
+                <a:ea typeface="Calibri" pitchFamily="34" charset="-122"/>
+                <a:cs typeface="Calibri" pitchFamily="34" charset="-120"/>
+              </a:rPr>
+              <a:t>Località</a:t>
+            </a:r>
+            <a:r>
+              <a:rPr lang="en-US" sz="1250" dirty="0">
+                <a:solidFill>
+                  <a:srgbClr val="1A2733"/>
+                </a:solidFill>
+                <a:latin typeface="Calibri" pitchFamily="34" charset="0"/>
+                <a:ea typeface="Calibri" pitchFamily="34" charset="-122"/>
+                <a:cs typeface="Calibri" pitchFamily="34" charset="-120"/>
+              </a:rPr>
+              <a:t>” e </a:t>
+            </a:r>
+            <a:r>
+              <a:rPr lang="en-US" sz="1250" dirty="0" err="1">
+                <a:solidFill>
+                  <a:srgbClr val="1A2733"/>
+                </a:solidFill>
+                <a:latin typeface="Calibri" pitchFamily="34" charset="0"/>
+                <a:ea typeface="Calibri" pitchFamily="34" charset="-122"/>
+                <a:cs typeface="Calibri" pitchFamily="34" charset="-120"/>
+              </a:rPr>
+              <a:t>diversi</a:t>
+            </a:r>
+            <a:r>
+              <a:rPr lang="en-US" sz="1250" dirty="0">
+                <a:solidFill>
+                  <a:srgbClr val="1A2733"/>
+                </a:solidFill>
+                <a:latin typeface="Calibri" pitchFamily="34" charset="0"/>
+                <a:ea typeface="Calibri" pitchFamily="34" charset="-122"/>
+                <a:cs typeface="Calibri" pitchFamily="34" charset="-120"/>
+              </a:rPr>
+              <a:t> in email)</a:t>
             </a:r>
             <a:endParaRPr lang="en-US" sz="1250" dirty="0"/>
           </a:p>
@@ -4483,11 +6207,8 @@
           <a:bodyPr wrap="square" rtlCol="0" anchor="ctr"/>
           <a:lstStyle/>
           <a:p>
-            <a:pPr marL="0" indent="0">
-              <a:buNone/>
-            </a:pPr>
-            <a:r>
-              <a:rPr lang="en-US" sz="1400" dirty="0">
+            <a:r>
+              <a:rPr lang="it-IT" sz="1400" dirty="0">
                 <a:solidFill>
                   <a:srgbClr val="5B6B75"/>
                 </a:solidFill>
@@ -4495,7 +6216,7 @@
                 <a:ea typeface="Calibri" pitchFamily="34" charset="-122"/>
                 <a:cs typeface="Calibri" pitchFamily="34" charset="-120"/>
               </a:rPr>
-              <a:t>Ogni trasformazione risolve un problema specifico individuato nei dati grezzi</a:t>
+              <a:t>caricati entrambi i file in Power Query, individuate le colonne e i problemi di qualità nei dati grezzi (spazi, duplicati, righe di scarto, dati fuori posto)</a:t>
             </a:r>
             <a:endParaRPr lang="en-US" sz="1400" dirty="0"/>
           </a:p>
@@ -4528,9 +6249,334 @@
           </a:p>
         </p:txBody>
       </p:sp>
+      <p:sp>
+        <p:nvSpPr>
+          <p:cNvPr id="6" name="Text 3"/>
+          <p:cNvSpPr/>
+          <p:nvPr/>
+        </p:nvSpPr>
+        <p:spPr>
+          <a:xfrm>
+            <a:off x="1371600" y="1664208"/>
+            <a:ext cx="9692640" cy="329184"/>
+          </a:xfrm>
+          <a:prstGeom prst="rect">
+            <a:avLst/>
+          </a:prstGeom>
+          <a:noFill/>
+          <a:ln/>
+        </p:spPr>
+        <p:txBody>
+          <a:bodyPr wrap="square" rtlCol="0" anchor="ctr"/>
+          <a:lstStyle/>
+          <a:p>
+            <a:pPr marL="0" indent="0">
+              <a:buNone/>
+            </a:pPr>
+            <a:r>
+              <a:rPr lang="en-US" sz="1500" b="1" dirty="0">
+                <a:solidFill>
+                  <a:srgbClr val="1A2733"/>
+                </a:solidFill>
+                <a:latin typeface="Cambria" pitchFamily="34" charset="0"/>
+                <a:ea typeface="Cambria" pitchFamily="34" charset="-122"/>
+                <a:cs typeface="Cambria" pitchFamily="34" charset="-120"/>
+              </a:rPr>
+              <a:t>Es.1 </a:t>
+            </a:r>
+            <a:endParaRPr lang="en-US" sz="1500" dirty="0"/>
+          </a:p>
+        </p:txBody>
+      </p:sp>
+      <p:sp>
+        <p:nvSpPr>
+          <p:cNvPr id="7" name="Text 4"/>
+          <p:cNvSpPr/>
+          <p:nvPr/>
+        </p:nvSpPr>
+        <p:spPr>
+          <a:xfrm>
+            <a:off x="1371600" y="1993392"/>
+            <a:ext cx="9966960" cy="960120"/>
+          </a:xfrm>
+          <a:prstGeom prst="rect">
+            <a:avLst/>
+          </a:prstGeom>
+          <a:noFill/>
+          <a:ln/>
+        </p:spPr>
+        <p:txBody>
+          <a:bodyPr wrap="square" rtlCol="0" anchor="t"/>
+          <a:lstStyle/>
+          <a:p>
+            <a:r>
+              <a:rPr lang="it-IT" sz="1200" dirty="0">
+                <a:solidFill>
+                  <a:srgbClr val="5B6B75"/>
+                </a:solidFill>
+                <a:latin typeface="Calibri" pitchFamily="34" charset="0"/>
+                <a:ea typeface="Calibri" pitchFamily="34" charset="-122"/>
+                <a:cs typeface="Calibri" pitchFamily="34" charset="-120"/>
+              </a:rPr>
+              <a:t>Pulizia foglio "prezzi": rimosse le 4 righe di intestazione grezza iniziali, promossa la vera intestazione, eliminata la colonna vuota, tolte le righe vuote residue, tipizzate CITTA' come testo e PREZZO MEDIO come numero. Risultato: da 238 a 234 righe pulite. Pulizia foglio "Strutture": trim degli spazi superflui, rimozione degli 8 duplicati (stessa </a:t>
+            </a:r>
+            <a:r>
+              <a:rPr lang="it-IT" sz="1200" dirty="0" err="1">
+                <a:solidFill>
+                  <a:srgbClr val="5B6B75"/>
+                </a:solidFill>
+                <a:latin typeface="Calibri" pitchFamily="34" charset="0"/>
+                <a:ea typeface="Calibri" pitchFamily="34" charset="-122"/>
+                <a:cs typeface="Calibri" pitchFamily="34" charset="-120"/>
+              </a:rPr>
+              <a:t>Denominazione+Indirizzo+Città</a:t>
+            </a:r>
+            <a:r>
+              <a:rPr lang="it-IT" sz="1200" dirty="0">
+                <a:solidFill>
+                  <a:srgbClr val="5B6B75"/>
+                </a:solidFill>
+                <a:latin typeface="Calibri" pitchFamily="34" charset="0"/>
+                <a:ea typeface="Calibri" pitchFamily="34" charset="-122"/>
+                <a:cs typeface="Calibri" pitchFamily="34" charset="-120"/>
+              </a:rPr>
+              <a:t>), correzione dei dati "fuori posto" (siti web ed email finiti per errore nelle colonne Località e Indirizzo internet, spostati con colonne personalizzate usando </a:t>
+            </a:r>
+            <a:r>
+              <a:rPr lang="it-IT" sz="1200" dirty="0" err="1">
+                <a:solidFill>
+                  <a:srgbClr val="5B6B75"/>
+                </a:solidFill>
+                <a:latin typeface="Calibri" pitchFamily="34" charset="0"/>
+                <a:ea typeface="Calibri" pitchFamily="34" charset="-122"/>
+                <a:cs typeface="Calibri" pitchFamily="34" charset="-120"/>
+              </a:rPr>
+              <a:t>if</a:t>
+            </a:r>
+            <a:r>
+              <a:rPr lang="it-IT" sz="1200" dirty="0">
+                <a:solidFill>
+                  <a:srgbClr val="5B6B75"/>
+                </a:solidFill>
+                <a:latin typeface="Calibri" pitchFamily="34" charset="0"/>
+                <a:ea typeface="Calibri" pitchFamily="34" charset="-122"/>
+                <a:cs typeface="Calibri" pitchFamily="34" charset="-120"/>
+              </a:rPr>
+              <a:t>), </a:t>
+            </a:r>
+            <a:r>
+              <a:rPr lang="en-US" sz="1200" dirty="0" err="1">
+                <a:solidFill>
+                  <a:srgbClr val="5B6B75"/>
+                </a:solidFill>
+                <a:latin typeface="Calibri" pitchFamily="34" charset="0"/>
+                <a:ea typeface="Calibri" pitchFamily="34" charset="-122"/>
+                <a:cs typeface="Calibri" pitchFamily="34" charset="-120"/>
+              </a:rPr>
+              <a:t>celle</a:t>
+            </a:r>
+            <a:r>
+              <a:rPr lang="en-US" sz="1200" dirty="0">
+                <a:solidFill>
+                  <a:srgbClr val="5B6B75"/>
+                </a:solidFill>
+                <a:latin typeface="Calibri" pitchFamily="34" charset="0"/>
+                <a:ea typeface="Calibri" pitchFamily="34" charset="-122"/>
+                <a:cs typeface="Calibri" pitchFamily="34" charset="-120"/>
+              </a:rPr>
+              <a:t> con </a:t>
+            </a:r>
+            <a:r>
+              <a:rPr lang="en-US" sz="1200" dirty="0" err="1">
+                <a:solidFill>
+                  <a:srgbClr val="5B6B75"/>
+                </a:solidFill>
+                <a:latin typeface="Calibri" pitchFamily="34" charset="0"/>
+                <a:ea typeface="Calibri" pitchFamily="34" charset="-122"/>
+                <a:cs typeface="Calibri" pitchFamily="34" charset="-120"/>
+              </a:rPr>
+              <a:t>più</a:t>
+            </a:r>
+            <a:r>
+              <a:rPr lang="en-US" sz="1200" dirty="0">
+                <a:solidFill>
+                  <a:srgbClr val="5B6B75"/>
+                </a:solidFill>
+                <a:latin typeface="Calibri" pitchFamily="34" charset="0"/>
+                <a:ea typeface="Calibri" pitchFamily="34" charset="-122"/>
+                <a:cs typeface="Calibri" pitchFamily="34" charset="-120"/>
+              </a:rPr>
+              <a:t> </a:t>
+            </a:r>
+            <a:r>
+              <a:rPr lang="en-US" sz="1200" dirty="0" err="1">
+                <a:solidFill>
+                  <a:srgbClr val="5B6B75"/>
+                </a:solidFill>
+                <a:latin typeface="Calibri" pitchFamily="34" charset="0"/>
+                <a:ea typeface="Calibri" pitchFamily="34" charset="-122"/>
+                <a:cs typeface="Calibri" pitchFamily="34" charset="-120"/>
+              </a:rPr>
+              <a:t>indirizzi</a:t>
+            </a:r>
+            <a:r>
+              <a:rPr lang="en-US" sz="1200" dirty="0">
+                <a:solidFill>
+                  <a:srgbClr val="5B6B75"/>
+                </a:solidFill>
+                <a:latin typeface="Calibri" pitchFamily="34" charset="0"/>
+                <a:ea typeface="Calibri" pitchFamily="34" charset="-122"/>
+                <a:cs typeface="Calibri" pitchFamily="34" charset="-120"/>
+              </a:rPr>
+              <a:t> </a:t>
+            </a:r>
+            <a:r>
+              <a:rPr lang="en-US" sz="1200" dirty="0" err="1">
+                <a:solidFill>
+                  <a:srgbClr val="5B6B75"/>
+                </a:solidFill>
+                <a:latin typeface="Calibri" pitchFamily="34" charset="0"/>
+                <a:ea typeface="Calibri" pitchFamily="34" charset="-122"/>
+                <a:cs typeface="Calibri" pitchFamily="34" charset="-120"/>
+              </a:rPr>
+              <a:t>separati</a:t>
+            </a:r>
+            <a:r>
+              <a:rPr lang="en-US" sz="1200" dirty="0">
+                <a:solidFill>
+                  <a:srgbClr val="5B6B75"/>
+                </a:solidFill>
+                <a:latin typeface="Calibri" pitchFamily="34" charset="0"/>
+                <a:ea typeface="Calibri" pitchFamily="34" charset="-122"/>
+                <a:cs typeface="Calibri" pitchFamily="34" charset="-120"/>
+              </a:rPr>
+              <a:t> da ; o , </a:t>
+            </a:r>
+            <a:r>
+              <a:rPr lang="en-US" sz="1200" dirty="0" err="1">
+                <a:solidFill>
+                  <a:srgbClr val="5B6B75"/>
+                </a:solidFill>
+                <a:latin typeface="Calibri" pitchFamily="34" charset="0"/>
+                <a:ea typeface="Calibri" pitchFamily="34" charset="-122"/>
+                <a:cs typeface="Calibri" pitchFamily="34" charset="-120"/>
+              </a:rPr>
+              <a:t>divise</a:t>
+            </a:r>
+            <a:r>
+              <a:rPr lang="en-US" sz="1200" dirty="0">
+                <a:solidFill>
+                  <a:srgbClr val="5B6B75"/>
+                </a:solidFill>
+                <a:latin typeface="Calibri" pitchFamily="34" charset="0"/>
+                <a:ea typeface="Calibri" pitchFamily="34" charset="-122"/>
+                <a:cs typeface="Calibri" pitchFamily="34" charset="-120"/>
+              </a:rPr>
+              <a:t>: </a:t>
+            </a:r>
+            <a:r>
+              <a:rPr lang="en-US" sz="1200" dirty="0" err="1">
+                <a:solidFill>
+                  <a:srgbClr val="5B6B75"/>
+                </a:solidFill>
+                <a:latin typeface="Calibri" pitchFamily="34" charset="0"/>
+                <a:ea typeface="Calibri" pitchFamily="34" charset="-122"/>
+                <a:cs typeface="Calibri" pitchFamily="34" charset="-120"/>
+              </a:rPr>
+              <a:t>tenuta</a:t>
+            </a:r>
+            <a:r>
+              <a:rPr lang="en-US" sz="1200" dirty="0">
+                <a:solidFill>
+                  <a:srgbClr val="5B6B75"/>
+                </a:solidFill>
+                <a:latin typeface="Calibri" pitchFamily="34" charset="0"/>
+                <a:ea typeface="Calibri" pitchFamily="34" charset="-122"/>
+                <a:cs typeface="Calibri" pitchFamily="34" charset="-120"/>
+              </a:rPr>
+              <a:t> la prima email, flag "</a:t>
+            </a:r>
+            <a:r>
+              <a:rPr lang="en-US" sz="1200" dirty="0" err="1">
+                <a:solidFill>
+                  <a:srgbClr val="5B6B75"/>
+                </a:solidFill>
+                <a:latin typeface="Calibri" pitchFamily="34" charset="0"/>
+                <a:ea typeface="Calibri" pitchFamily="34" charset="-122"/>
+                <a:cs typeface="Calibri" pitchFamily="34" charset="-120"/>
+              </a:rPr>
+              <a:t>Email_multiple</a:t>
+            </a:r>
+            <a:r>
+              <a:rPr lang="en-US" sz="1200" dirty="0">
+                <a:solidFill>
+                  <a:srgbClr val="5B6B75"/>
+                </a:solidFill>
+                <a:latin typeface="Calibri" pitchFamily="34" charset="0"/>
+                <a:ea typeface="Calibri" pitchFamily="34" charset="-122"/>
+                <a:cs typeface="Calibri" pitchFamily="34" charset="-120"/>
+              </a:rPr>
+              <a:t>" per le </a:t>
+            </a:r>
+            <a:r>
+              <a:rPr lang="en-US" sz="1200" dirty="0" err="1">
+                <a:solidFill>
+                  <a:srgbClr val="5B6B75"/>
+                </a:solidFill>
+                <a:latin typeface="Calibri" pitchFamily="34" charset="0"/>
+                <a:ea typeface="Calibri" pitchFamily="34" charset="-122"/>
+                <a:cs typeface="Calibri" pitchFamily="34" charset="-120"/>
+              </a:rPr>
+              <a:t>altre</a:t>
+            </a:r>
+            <a:endParaRPr lang="en-US" sz="1200" dirty="0"/>
+          </a:p>
+          <a:p>
+            <a:r>
+              <a:rPr lang="it-IT" sz="1200" dirty="0">
+                <a:solidFill>
+                  <a:srgbClr val="5B6B75"/>
+                </a:solidFill>
+                <a:latin typeface="Calibri" pitchFamily="34" charset="0"/>
+                <a:ea typeface="Calibri" pitchFamily="34" charset="-122"/>
+                <a:cs typeface="Calibri" pitchFamily="34" charset="-120"/>
+              </a:rPr>
+              <a:t>, validazione dei siti web. Risultato: da 6.258 a 6.250 righe pulite.</a:t>
+            </a:r>
+            <a:endParaRPr lang="en-US" sz="1200" dirty="0"/>
+          </a:p>
+        </p:txBody>
+      </p:sp>
+      <p:sp>
+        <p:nvSpPr>
+          <p:cNvPr id="12" name="Shape 8"/>
+          <p:cNvSpPr/>
+          <p:nvPr/>
+        </p:nvSpPr>
+        <p:spPr>
+          <a:xfrm>
+            <a:off x="640080" y="3055925"/>
+            <a:ext cx="502920" cy="502920"/>
+          </a:xfrm>
+          <a:prstGeom prst="ellipse">
+            <a:avLst/>
+          </a:prstGeom>
+          <a:solidFill>
+            <a:srgbClr val="1C7293"/>
+          </a:solidFill>
+          <a:ln/>
+        </p:spPr>
+        <p:txBody>
+          <a:bodyPr/>
+          <a:lstStyle/>
+          <a:p>
+            <a:endParaRPr lang="it-IT"/>
+          </a:p>
+        </p:txBody>
+      </p:sp>
       <p:pic>
         <p:nvPicPr>
-          <p:cNvPr id="5" name="Image 0" descr="/home/claude/deck/icon_filter.png"/>
+          <p:cNvPr id="13" name="Image 2" descr="/home/claude/deck/icon_filter.png"/>
           <p:cNvPicPr>
             <a:picLocks noChangeAspect="1"/>
           </p:cNvPicPr>
@@ -4544,7 +6590,7 @@
         </p:blipFill>
         <p:spPr>
           <a:xfrm>
-            <a:off x="770839" y="1822399"/>
+            <a:off x="770839" y="3186684"/>
             <a:ext cx="241402" cy="241402"/>
           </a:xfrm>
           <a:prstGeom prst="rect">
@@ -4554,13 +6600,13 @@
       </p:pic>
       <p:sp>
         <p:nvSpPr>
-          <p:cNvPr id="6" name="Text 3"/>
-          <p:cNvSpPr/>
-          <p:nvPr/>
-        </p:nvSpPr>
-        <p:spPr>
-          <a:xfrm>
-            <a:off x="1371600" y="1664208"/>
+          <p:cNvPr id="14" name="Text 9"/>
+          <p:cNvSpPr/>
+          <p:nvPr/>
+        </p:nvSpPr>
+        <p:spPr>
+          <a:xfrm>
+            <a:off x="1371600" y="3108960"/>
             <a:ext cx="9692640" cy="329184"/>
           </a:xfrm>
           <a:prstGeom prst="rect">
@@ -4583,9 +6629,8 @@
                 </a:solidFill>
                 <a:latin typeface="Cambria" pitchFamily="34" charset="0"/>
                 <a:ea typeface="Cambria" pitchFamily="34" charset="-122"/>
-                <a:cs typeface="Cambria" pitchFamily="34" charset="-120"/>
-              </a:rPr>
-              <a:t>Trim + normalizzazione spazi</a:t>
+              </a:rPr>
+              <a:t>Es.2</a:t>
             </a:r>
             <a:endParaRPr lang="en-US" sz="1500" dirty="0"/>
           </a:p>
@@ -4593,13 +6638,13 @@
       </p:sp>
       <p:sp>
         <p:nvSpPr>
-          <p:cNvPr id="7" name="Text 4"/>
-          <p:cNvSpPr/>
-          <p:nvPr/>
-        </p:nvSpPr>
-        <p:spPr>
-          <a:xfrm>
-            <a:off x="1371600" y="1993392"/>
+          <p:cNvPr id="15" name="Text 10"/>
+          <p:cNvSpPr/>
+          <p:nvPr/>
+        </p:nvSpPr>
+        <p:spPr>
+          <a:xfrm>
+            <a:off x="1371600" y="3383280"/>
             <a:ext cx="9966960" cy="502920"/>
           </a:xfrm>
           <a:prstGeom prst="rect">
@@ -4612,40 +6657,63 @@
           <a:bodyPr wrap="square" rtlCol="0" anchor="t"/>
           <a:lstStyle/>
           <a:p>
+            <a:r>
+              <a:rPr lang="it-IT" sz="1200" dirty="0"/>
+              <a:t>Merge — unite le due tabelle con un Left Outer Join sulla città ( tiene tutte le strutture anche se una città restasse senza prezzo, a differenza di un Inner Join che le farebbe sparire in silenzio). Risultato: 234/234 città, zero valori nulli.</a:t>
+            </a:r>
+          </a:p>
+          <a:p>
             <a:pPr marL="0" indent="0">
               <a:buNone/>
             </a:pPr>
-            <a:r>
-              <a:rPr lang="en-US" sz="1200" dirty="0">
-                <a:solidFill>
-                  <a:srgbClr val="5B6B75"/>
-                </a:solidFill>
-                <a:latin typeface="Calibri" pitchFamily="34" charset="0"/>
-                <a:ea typeface="Calibri" pitchFamily="34" charset="-122"/>
-                <a:cs typeface="Calibri" pitchFamily="34" charset="-120"/>
-              </a:rPr>
-              <a:t>Rimossi spazi doppi e superflui in denominazioni, indirizzi e località</a:t>
-            </a:r>
             <a:endParaRPr lang="en-US" sz="1200" dirty="0"/>
           </a:p>
         </p:txBody>
       </p:sp>
       <p:sp>
         <p:nvSpPr>
-          <p:cNvPr id="8" name="Shape 5"/>
-          <p:cNvSpPr/>
-          <p:nvPr/>
-        </p:nvSpPr>
-        <p:spPr>
-          <a:xfrm>
-            <a:off x="640080" y="2587752"/>
+          <p:cNvPr id="19" name="Text 13"/>
+          <p:cNvSpPr/>
+          <p:nvPr/>
+        </p:nvSpPr>
+        <p:spPr>
+          <a:xfrm>
+            <a:off x="1371600" y="4681728"/>
+            <a:ext cx="9966960" cy="502920"/>
+          </a:xfrm>
+          <a:prstGeom prst="rect">
+            <a:avLst/>
+          </a:prstGeom>
+          <a:noFill/>
+          <a:ln/>
+        </p:spPr>
+        <p:txBody>
+          <a:bodyPr wrap="square" rtlCol="0" anchor="t"/>
+          <a:lstStyle/>
+          <a:p>
+            <a:pPr marL="0" indent="0">
+              <a:buNone/>
+            </a:pPr>
+            <a:endParaRPr lang="en-US" sz="1200" dirty="0"/>
+          </a:p>
+        </p:txBody>
+      </p:sp>
+      <p:sp>
+        <p:nvSpPr>
+          <p:cNvPr id="20" name="Shape 14"/>
+          <p:cNvSpPr/>
+          <p:nvPr/>
+        </p:nvSpPr>
+        <p:spPr>
+          <a:xfrm>
+            <a:off x="647853" y="4078224"/>
             <a:ext cx="502920" cy="502920"/>
           </a:xfrm>
           <a:prstGeom prst="ellipse">
             <a:avLst/>
           </a:prstGeom>
           <a:solidFill>
-            <a:srgbClr val="0F3057"/>
+            <a:srgbClr val="1C7293"/>
           </a:solidFill>
           <a:ln/>
         </p:spPr>
@@ -4659,7 +6727,7 @@
       </p:sp>
       <p:pic>
         <p:nvPicPr>
-          <p:cNvPr id="9" name="Image 1" descr="/home/claude/deck/icon_filter.png"/>
+          <p:cNvPr id="21" name="Image 4" descr="/home/claude/deck/icon_filter.png"/>
           <p:cNvPicPr>
             <a:picLocks noChangeAspect="1"/>
           </p:cNvPicPr>
@@ -4673,7 +6741,7 @@
         </p:blipFill>
         <p:spPr>
           <a:xfrm>
-            <a:off x="770839" y="2718511"/>
+            <a:off x="770839" y="4253789"/>
             <a:ext cx="241402" cy="241402"/>
           </a:xfrm>
           <a:prstGeom prst="rect">
@@ -4683,14 +6751,14 @@
       </p:pic>
       <p:sp>
         <p:nvSpPr>
-          <p:cNvPr id="10" name="Text 6"/>
-          <p:cNvSpPr/>
-          <p:nvPr/>
-        </p:nvSpPr>
-        <p:spPr>
-          <a:xfrm>
-            <a:off x="1371600" y="2560320"/>
-            <a:ext cx="9692640" cy="329184"/>
+          <p:cNvPr id="22" name="Text 15"/>
+          <p:cNvSpPr/>
+          <p:nvPr/>
+        </p:nvSpPr>
+        <p:spPr>
+          <a:xfrm>
+            <a:off x="1379373" y="3849624"/>
+            <a:ext cx="9741560" cy="649224"/>
           </a:xfrm>
           <a:prstGeom prst="rect">
             <a:avLst/>
@@ -4714,7 +6782,7 @@
                 <a:ea typeface="Cambria" pitchFamily="34" charset="-122"/>
                 <a:cs typeface="Cambria" pitchFamily="34" charset="-120"/>
               </a:rPr>
-              <a:t>Rimozione duplicati</a:t>
+              <a:t>Es.3</a:t>
             </a:r>
             <a:endParaRPr lang="en-US" sz="1500" dirty="0"/>
           </a:p>
@@ -4722,13 +6790,13 @@
       </p:sp>
       <p:sp>
         <p:nvSpPr>
-          <p:cNvPr id="11" name="Text 7"/>
-          <p:cNvSpPr/>
-          <p:nvPr/>
-        </p:nvSpPr>
-        <p:spPr>
-          <a:xfrm>
-            <a:off x="1371600" y="2889504"/>
+          <p:cNvPr id="23" name="Text 16"/>
+          <p:cNvSpPr/>
+          <p:nvPr/>
+        </p:nvSpPr>
+        <p:spPr>
+          <a:xfrm>
+            <a:off x="1371600" y="4462272"/>
             <a:ext cx="9966960" cy="502920"/>
           </a:xfrm>
           <a:prstGeom prst="rect">
@@ -4741,54 +6809,229 @@
           <a:bodyPr wrap="square" rtlCol="0" anchor="t"/>
           <a:lstStyle/>
           <a:p>
+            <a:r>
+              <a:rPr lang="it-IT" sz="1200" dirty="0"/>
+              <a:t>Raggruppamenti (Group By) — create due query di riepilogo (</a:t>
+            </a:r>
+            <a:r>
+              <a:rPr lang="it-IT" sz="1200" dirty="0" err="1"/>
+              <a:t>Conteggio_per_Città</a:t>
+            </a:r>
+            <a:r>
+              <a:rPr lang="it-IT" sz="1200" dirty="0"/>
+              <a:t> e </a:t>
+            </a:r>
+            <a:r>
+              <a:rPr lang="it-IT" sz="1200" dirty="0" err="1"/>
+              <a:t>Conteggio_per_Categoria</a:t>
+            </a:r>
+            <a:r>
+              <a:rPr lang="it-IT" sz="1200" dirty="0"/>
+              <a:t>) tramite Riferimento + Raggruppa per, caricate come "solo connessione" nel Modello dati di Excel.</a:t>
+            </a:r>
+          </a:p>
+          <a:p>
             <a:pPr marL="0" indent="0">
               <a:buNone/>
             </a:pPr>
-            <a:r>
-              <a:rPr lang="en-US" sz="1200" dirty="0">
-                <a:solidFill>
-                  <a:srgbClr val="5B6B75"/>
+            <a:endParaRPr lang="en-US" sz="1200" dirty="0"/>
+          </a:p>
+        </p:txBody>
+      </p:sp>
+      <p:sp>
+        <p:nvSpPr>
+          <p:cNvPr id="24" name="Shape 17"/>
+          <p:cNvSpPr/>
+          <p:nvPr/>
+        </p:nvSpPr>
+        <p:spPr>
+          <a:xfrm>
+            <a:off x="9070848" y="91440"/>
+            <a:ext cx="2834640" cy="777240"/>
+          </a:xfrm>
+          <a:prstGeom prst="roundRect">
+            <a:avLst>
+              <a:gd name="adj" fmla="val 7059"/>
+            </a:avLst>
+          </a:prstGeom>
+          <a:solidFill>
+            <a:srgbClr val="0F3057"/>
+          </a:solidFill>
+          <a:ln/>
+        </p:spPr>
+        <p:txBody>
+          <a:bodyPr/>
+          <a:lstStyle/>
+          <a:p>
+            <a:endParaRPr lang="it-IT"/>
+          </a:p>
+        </p:txBody>
+      </p:sp>
+      <p:sp>
+        <p:nvSpPr>
+          <p:cNvPr id="25" name="Text 18"/>
+          <p:cNvSpPr/>
+          <p:nvPr/>
+        </p:nvSpPr>
+        <p:spPr>
+          <a:xfrm>
+            <a:off x="9070848" y="73152"/>
+            <a:ext cx="2834640" cy="365760"/>
+          </a:xfrm>
+          <a:prstGeom prst="rect">
+            <a:avLst/>
+          </a:prstGeom>
+          <a:noFill/>
+          <a:ln/>
+        </p:spPr>
+        <p:txBody>
+          <a:bodyPr wrap="square" rtlCol="0" anchor="ctr"/>
+          <a:lstStyle/>
+          <a:p>
+            <a:pPr marL="0" indent="0" algn="ctr">
+              <a:buNone/>
+            </a:pPr>
+            <a:r>
+              <a:rPr lang="en-US" sz="1600" b="1" dirty="0">
+                <a:solidFill>
+                  <a:srgbClr val="FFFFFF"/>
+                </a:solidFill>
+                <a:latin typeface="Cambria" pitchFamily="34" charset="0"/>
+                <a:ea typeface="Cambria" pitchFamily="34" charset="-122"/>
+                <a:cs typeface="Cambria" pitchFamily="34" charset="-120"/>
+              </a:rPr>
+              <a:t>6.258 → 6.250</a:t>
+            </a:r>
+            <a:endParaRPr lang="en-US" sz="1600" dirty="0"/>
+          </a:p>
+        </p:txBody>
+      </p:sp>
+      <p:sp>
+        <p:nvSpPr>
+          <p:cNvPr id="26" name="Text 19"/>
+          <p:cNvSpPr/>
+          <p:nvPr/>
+        </p:nvSpPr>
+        <p:spPr>
+          <a:xfrm>
+            <a:off x="9171432" y="402336"/>
+            <a:ext cx="2834640" cy="274320"/>
+          </a:xfrm>
+          <a:prstGeom prst="rect">
+            <a:avLst/>
+          </a:prstGeom>
+          <a:noFill/>
+          <a:ln/>
+        </p:spPr>
+        <p:txBody>
+          <a:bodyPr wrap="square" rtlCol="0" anchor="ctr"/>
+          <a:lstStyle/>
+          <a:p>
+            <a:pPr marL="0" indent="0" algn="ctr">
+              <a:buNone/>
+            </a:pPr>
+            <a:r>
+              <a:rPr lang="en-US" sz="1050" dirty="0">
+                <a:solidFill>
+                  <a:srgbClr val="CADCE8"/>
                 </a:solidFill>
                 <a:latin typeface="Calibri" pitchFamily="34" charset="0"/>
                 <a:ea typeface="Calibri" pitchFamily="34" charset="-122"/>
                 <a:cs typeface="Calibri" pitchFamily="34" charset="-120"/>
               </a:rPr>
-              <a:t>Eliminate le righe con stessa Denominazione + Indirizzo + Città</a:t>
-            </a:r>
-            <a:endParaRPr lang="en-US" sz="1200" dirty="0"/>
-          </a:p>
-        </p:txBody>
-      </p:sp>
-      <p:sp>
-        <p:nvSpPr>
-          <p:cNvPr id="12" name="Shape 8"/>
-          <p:cNvSpPr/>
-          <p:nvPr/>
-        </p:nvSpPr>
-        <p:spPr>
-          <a:xfrm>
-            <a:off x="640080" y="3483864"/>
-            <a:ext cx="502920" cy="502920"/>
-          </a:xfrm>
-          <a:prstGeom prst="ellipse">
-            <a:avLst/>
-          </a:prstGeom>
-          <a:solidFill>
-            <a:srgbClr val="1C7293"/>
-          </a:solidFill>
-          <a:ln/>
-        </p:spPr>
-        <p:txBody>
-          <a:bodyPr/>
-          <a:lstStyle/>
-          <a:p>
-            <a:endParaRPr lang="it-IT"/>
+              <a:t>righe pulite</a:t>
+            </a:r>
+            <a:endParaRPr lang="en-US" sz="1050" dirty="0"/>
+          </a:p>
+        </p:txBody>
+      </p:sp>
+      <p:sp>
+        <p:nvSpPr>
+          <p:cNvPr id="27" name="Text 20"/>
+          <p:cNvSpPr/>
+          <p:nvPr/>
+        </p:nvSpPr>
+        <p:spPr>
+          <a:xfrm>
+            <a:off x="457200" y="6473952"/>
+            <a:ext cx="5486400" cy="274320"/>
+          </a:xfrm>
+          <a:prstGeom prst="rect">
+            <a:avLst/>
+          </a:prstGeom>
+          <a:noFill/>
+          <a:ln/>
+        </p:spPr>
+        <p:txBody>
+          <a:bodyPr wrap="square" rtlCol="0" anchor="ctr"/>
+          <a:lstStyle/>
+          <a:p>
+            <a:pPr marL="0" indent="0" algn="l">
+              <a:buNone/>
+            </a:pPr>
+            <a:r>
+              <a:rPr lang="en-US" sz="900" dirty="0">
+                <a:solidFill>
+                  <a:srgbClr val="5B6B75"/>
+                </a:solidFill>
+                <a:latin typeface="Calibri" pitchFamily="34" charset="0"/>
+                <a:ea typeface="Calibri" pitchFamily="34" charset="-122"/>
+                <a:cs typeface="Calibri" pitchFamily="34" charset="-120"/>
+              </a:rPr>
+              <a:t>Regione Marche — Patrimonio Ricettivo</a:t>
+            </a:r>
+            <a:endParaRPr lang="en-US" sz="900" dirty="0"/>
+          </a:p>
+        </p:txBody>
+      </p:sp>
+      <p:sp>
+        <p:nvSpPr>
+          <p:cNvPr id="28" name="Text 21"/>
+          <p:cNvSpPr/>
+          <p:nvPr/>
+        </p:nvSpPr>
+        <p:spPr>
+          <a:xfrm>
+            <a:off x="11274552" y="6473952"/>
+            <a:ext cx="457200" cy="274320"/>
+          </a:xfrm>
+          <a:prstGeom prst="rect">
+            <a:avLst/>
+          </a:prstGeom>
+          <a:noFill/>
+          <a:ln/>
+        </p:spPr>
+        <p:txBody>
+          <a:bodyPr wrap="square" rtlCol="0" anchor="ctr"/>
+          <a:lstStyle/>
+          <a:p>
+            <a:pPr marL="0" indent="0" algn="r">
+              <a:buNone/>
+            </a:pPr>
+            <a:r>
+              <a:rPr lang="en-US" sz="900" dirty="0">
+                <a:solidFill>
+                  <a:srgbClr val="5B6B75"/>
+                </a:solidFill>
+                <a:latin typeface="Calibri" pitchFamily="34" charset="0"/>
+                <a:ea typeface="Calibri" pitchFamily="34" charset="-122"/>
+                <a:cs typeface="Calibri" pitchFamily="34" charset="-120"/>
+              </a:rPr>
+              <a:t>3</a:t>
+            </a:r>
+            <a:endParaRPr lang="en-US" sz="900" dirty="0"/>
           </a:p>
         </p:txBody>
       </p:sp>
       <p:pic>
         <p:nvPicPr>
-          <p:cNvPr id="13" name="Image 2" descr="/home/claude/deck/icon_filter.png"/>
+          <p:cNvPr id="30" name="Image 0" descr="/home/claude/deck/icon_filter.png">
+            <a:extLst>
+              <a:ext uri="{FF2B5EF4-FFF2-40B4-BE49-F238E27FC236}">
+                <a16:creationId xmlns:a16="http://schemas.microsoft.com/office/drawing/2014/main" id="{C667B73C-267D-98C9-F764-855765DC8648}"/>
+              </a:ext>
+            </a:extLst>
+          </p:cNvPr>
           <p:cNvPicPr>
             <a:picLocks noChangeAspect="1"/>
           </p:cNvPicPr>
@@ -4802,7 +7045,7 @@
         </p:blipFill>
         <p:spPr>
           <a:xfrm>
-            <a:off x="770839" y="3614623"/>
+            <a:off x="760781" y="1854098"/>
             <a:ext cx="241402" cy="241402"/>
           </a:xfrm>
           <a:prstGeom prst="rect">
@@ -4812,98 +7055,26 @@
       </p:pic>
       <p:sp>
         <p:nvSpPr>
-          <p:cNvPr id="14" name="Text 9"/>
-          <p:cNvSpPr/>
-          <p:nvPr/>
-        </p:nvSpPr>
-        <p:spPr>
-          <a:xfrm>
-            <a:off x="1371600" y="3456432"/>
-            <a:ext cx="9692640" cy="329184"/>
-          </a:xfrm>
-          <a:prstGeom prst="rect">
-            <a:avLst/>
-          </a:prstGeom>
-          <a:noFill/>
-          <a:ln/>
-        </p:spPr>
-        <p:txBody>
-          <a:bodyPr wrap="square" rtlCol="0" anchor="ctr"/>
-          <a:lstStyle/>
-          <a:p>
-            <a:pPr marL="0" indent="0">
-              <a:buNone/>
-            </a:pPr>
-            <a:r>
-              <a:rPr lang="en-US" sz="1500" b="1" dirty="0">
-                <a:solidFill>
-                  <a:srgbClr val="1A2733"/>
-                </a:solidFill>
-                <a:latin typeface="Cambria" pitchFamily="34" charset="0"/>
-                <a:ea typeface="Cambria" pitchFamily="34" charset="-122"/>
-                <a:cs typeface="Cambria" pitchFamily="34" charset="-120"/>
-              </a:rPr>
-              <a:t>Correzione dati fuori posto</a:t>
-            </a:r>
-            <a:endParaRPr lang="en-US" sz="1500" dirty="0"/>
-          </a:p>
-        </p:txBody>
-      </p:sp>
-      <p:sp>
-        <p:nvSpPr>
-          <p:cNvPr id="15" name="Text 10"/>
-          <p:cNvSpPr/>
-          <p:nvPr/>
-        </p:nvSpPr>
-        <p:spPr>
-          <a:xfrm>
-            <a:off x="1371600" y="3785616"/>
-            <a:ext cx="9966960" cy="502920"/>
-          </a:xfrm>
-          <a:prstGeom prst="rect">
-            <a:avLst/>
-          </a:prstGeom>
-          <a:noFill/>
-          <a:ln/>
-        </p:spPr>
-        <p:txBody>
-          <a:bodyPr wrap="square" rtlCol="0" anchor="t"/>
-          <a:lstStyle/>
-          <a:p>
-            <a:pPr marL="0" indent="0">
-              <a:buNone/>
-            </a:pPr>
-            <a:r>
-              <a:rPr lang="en-US" sz="1200" dirty="0">
-                <a:solidFill>
-                  <a:srgbClr val="5B6B75"/>
-                </a:solidFill>
-                <a:latin typeface="Calibri" pitchFamily="34" charset="0"/>
-                <a:ea typeface="Calibri" pitchFamily="34" charset="-122"/>
-                <a:cs typeface="Calibri" pitchFamily="34" charset="-120"/>
-              </a:rPr>
-              <a:t>Siti web ed email finiti nella colonna sbagliata (Località, Indirizzo internet) spostati nella colonna corretta con colonne personalizzate in linguaggio M</a:t>
-            </a:r>
-            <a:endParaRPr lang="en-US" sz="1200" dirty="0"/>
-          </a:p>
-        </p:txBody>
-      </p:sp>
-      <p:sp>
-        <p:nvSpPr>
-          <p:cNvPr id="16" name="Shape 11"/>
-          <p:cNvSpPr/>
-          <p:nvPr/>
-        </p:nvSpPr>
-        <p:spPr>
-          <a:xfrm>
-            <a:off x="640080" y="4379976"/>
+          <p:cNvPr id="32" name="Shape 8">
+            <a:extLst>
+              <a:ext uri="{FF2B5EF4-FFF2-40B4-BE49-F238E27FC236}">
+                <a16:creationId xmlns:a16="http://schemas.microsoft.com/office/drawing/2014/main" id="{2D4E18F1-3EB3-8F91-4EE3-E5B23F73B33C}"/>
+              </a:ext>
+            </a:extLst>
+          </p:cNvPr>
+          <p:cNvSpPr/>
+          <p:nvPr/>
+        </p:nvSpPr>
+        <p:spPr>
+          <a:xfrm>
+            <a:off x="647853" y="5261458"/>
             <a:ext cx="502920" cy="502920"/>
           </a:xfrm>
           <a:prstGeom prst="ellipse">
             <a:avLst/>
           </a:prstGeom>
           <a:solidFill>
-            <a:srgbClr val="0F3057"/>
+            <a:srgbClr val="1C7293"/>
           </a:solidFill>
           <a:ln/>
         </p:spPr>
@@ -4917,7 +7088,7 @@
       </p:sp>
       <p:pic>
         <p:nvPicPr>
-          <p:cNvPr id="17" name="Image 3" descr="/home/claude/deck/icon_filter.png"/>
+          <p:cNvPr id="5" name="Image 0" descr="/home/claude/deck/icon_filter.png"/>
           <p:cNvPicPr>
             <a:picLocks noChangeAspect="1"/>
           </p:cNvPicPr>
@@ -4931,7 +7102,7 @@
         </p:blipFill>
         <p:spPr>
           <a:xfrm>
-            <a:off x="770839" y="4510735"/>
+            <a:off x="760781" y="5442509"/>
             <a:ext cx="241402" cy="241402"/>
           </a:xfrm>
           <a:prstGeom prst="rect">
@@ -4941,13 +7112,19 @@
       </p:pic>
       <p:sp>
         <p:nvSpPr>
-          <p:cNvPr id="18" name="Text 12"/>
-          <p:cNvSpPr/>
-          <p:nvPr/>
-        </p:nvSpPr>
-        <p:spPr>
-          <a:xfrm>
-            <a:off x="1371600" y="4352544"/>
+          <p:cNvPr id="34" name="Text 3">
+            <a:extLst>
+              <a:ext uri="{FF2B5EF4-FFF2-40B4-BE49-F238E27FC236}">
+                <a16:creationId xmlns:a16="http://schemas.microsoft.com/office/drawing/2014/main" id="{2FC56D83-7F16-9471-0B0C-9E49DA486281}"/>
+              </a:ext>
+            </a:extLst>
+          </p:cNvPr>
+          <p:cNvSpPr/>
+          <p:nvPr/>
+        </p:nvSpPr>
+        <p:spPr>
+          <a:xfrm>
+            <a:off x="1403833" y="5172456"/>
             <a:ext cx="9692640" cy="329184"/>
           </a:xfrm>
           <a:prstGeom prst="rect">
@@ -4972,7 +7149,7 @@
                 <a:ea typeface="Cambria" pitchFamily="34" charset="-122"/>
                 <a:cs typeface="Cambria" pitchFamily="34" charset="-120"/>
               </a:rPr>
-              <a:t>Split email multiple</a:t>
+              <a:t>Es.4 </a:t>
             </a:r>
             <a:endParaRPr lang="en-US" sz="1500" dirty="0"/>
           </a:p>
@@ -4980,14 +7157,20 @@
       </p:sp>
       <p:sp>
         <p:nvSpPr>
-          <p:cNvPr id="19" name="Text 13"/>
-          <p:cNvSpPr/>
-          <p:nvPr/>
-        </p:nvSpPr>
-        <p:spPr>
-          <a:xfrm>
-            <a:off x="1371600" y="4681728"/>
-            <a:ext cx="9966960" cy="502920"/>
+          <p:cNvPr id="36" name="Text 4">
+            <a:extLst>
+              <a:ext uri="{FF2B5EF4-FFF2-40B4-BE49-F238E27FC236}">
+                <a16:creationId xmlns:a16="http://schemas.microsoft.com/office/drawing/2014/main" id="{C4B3CC28-8889-8C19-32B6-6484A2C36AA2}"/>
+              </a:ext>
+            </a:extLst>
+          </p:cNvPr>
+          <p:cNvSpPr/>
+          <p:nvPr/>
+        </p:nvSpPr>
+        <p:spPr>
+          <a:xfrm>
+            <a:off x="1403833" y="5564124"/>
+            <a:ext cx="9966960" cy="960120"/>
           </a:xfrm>
           <a:prstGeom prst="rect">
             <a:avLst/>
@@ -4999,335 +7182,13 @@
           <a:bodyPr wrap="square" rtlCol="0" anchor="t"/>
           <a:lstStyle/>
           <a:p>
-            <a:pPr marL="0" indent="0">
-              <a:buNone/>
-            </a:pPr>
-            <a:r>
-              <a:rPr lang="en-US" sz="1200" dirty="0">
-                <a:solidFill>
-                  <a:srgbClr val="5B6B75"/>
-                </a:solidFill>
-                <a:latin typeface="Calibri" pitchFamily="34" charset="0"/>
-                <a:ea typeface="Calibri" pitchFamily="34" charset="-122"/>
-                <a:cs typeface="Calibri" pitchFamily="34" charset="-120"/>
-              </a:rPr>
-              <a:t>Celle con più indirizzi separati da ; o , divise: tenuta la prima email, flag "Email_multiple" per le altre</a:t>
-            </a:r>
+            <a:r>
+              <a:rPr lang="it-IT" sz="1200" dirty="0"/>
+              <a:t>foglio RICERCA: menu a tendina in C3 (Convalida dati) sul nome struttura, formule  INDICE/CONFRONTA per recuperare Città, Indirizzo, Email, Sito web, con gestione del caso "struttura non trovata" con SE.ERRORE.</a:t>
+            </a:r>
+          </a:p>
+          <a:p>
             <a:endParaRPr lang="en-US" sz="1200" dirty="0"/>
-          </a:p>
-        </p:txBody>
-      </p:sp>
-      <p:sp>
-        <p:nvSpPr>
-          <p:cNvPr id="20" name="Shape 14"/>
-          <p:cNvSpPr/>
-          <p:nvPr/>
-        </p:nvSpPr>
-        <p:spPr>
-          <a:xfrm>
-            <a:off x="640080" y="5276088"/>
-            <a:ext cx="502920" cy="502920"/>
-          </a:xfrm>
-          <a:prstGeom prst="ellipse">
-            <a:avLst/>
-          </a:prstGeom>
-          <a:solidFill>
-            <a:srgbClr val="1C7293"/>
-          </a:solidFill>
-          <a:ln/>
-        </p:spPr>
-        <p:txBody>
-          <a:bodyPr/>
-          <a:lstStyle/>
-          <a:p>
-            <a:endParaRPr lang="it-IT"/>
-          </a:p>
-        </p:txBody>
-      </p:sp>
-      <p:pic>
-        <p:nvPicPr>
-          <p:cNvPr id="21" name="Image 4" descr="/home/claude/deck/icon_filter.png"/>
-          <p:cNvPicPr>
-            <a:picLocks noChangeAspect="1"/>
-          </p:cNvPicPr>
-          <p:nvPr/>
-        </p:nvPicPr>
-        <p:blipFill>
-          <a:blip r:embed="rId3"/>
-          <a:stretch>
-            <a:fillRect/>
-          </a:stretch>
-        </p:blipFill>
-        <p:spPr>
-          <a:xfrm>
-            <a:off x="770839" y="5406847"/>
-            <a:ext cx="241402" cy="241402"/>
-          </a:xfrm>
-          <a:prstGeom prst="rect">
-            <a:avLst/>
-          </a:prstGeom>
-        </p:spPr>
-      </p:pic>
-      <p:sp>
-        <p:nvSpPr>
-          <p:cNvPr id="22" name="Text 15"/>
-          <p:cNvSpPr/>
-          <p:nvPr/>
-        </p:nvSpPr>
-        <p:spPr>
-          <a:xfrm>
-            <a:off x="1371600" y="5248656"/>
-            <a:ext cx="9692640" cy="329184"/>
-          </a:xfrm>
-          <a:prstGeom prst="rect">
-            <a:avLst/>
-          </a:prstGeom>
-          <a:noFill/>
-          <a:ln/>
-        </p:spPr>
-        <p:txBody>
-          <a:bodyPr wrap="square" rtlCol="0" anchor="ctr"/>
-          <a:lstStyle/>
-          <a:p>
-            <a:pPr marL="0" indent="0">
-              <a:buNone/>
-            </a:pPr>
-            <a:r>
-              <a:rPr lang="en-US" sz="1500" b="1" dirty="0">
-                <a:solidFill>
-                  <a:srgbClr val="1A2733"/>
-                </a:solidFill>
-                <a:latin typeface="Cambria" pitchFamily="34" charset="0"/>
-                <a:ea typeface="Cambria" pitchFamily="34" charset="-122"/>
-                <a:cs typeface="Cambria" pitchFamily="34" charset="-120"/>
-              </a:rPr>
-              <a:t>Tipizzazione e ricostruzione header</a:t>
-            </a:r>
-            <a:endParaRPr lang="en-US" sz="1500" dirty="0"/>
-          </a:p>
-        </p:txBody>
-      </p:sp>
-      <p:sp>
-        <p:nvSpPr>
-          <p:cNvPr id="23" name="Text 16"/>
-          <p:cNvSpPr/>
-          <p:nvPr/>
-        </p:nvSpPr>
-        <p:spPr>
-          <a:xfrm>
-            <a:off x="1371600" y="5577840"/>
-            <a:ext cx="9966960" cy="502920"/>
-          </a:xfrm>
-          <a:prstGeom prst="rect">
-            <a:avLst/>
-          </a:prstGeom>
-          <a:noFill/>
-          <a:ln/>
-        </p:spPr>
-        <p:txBody>
-          <a:bodyPr wrap="square" rtlCol="0" anchor="t"/>
-          <a:lstStyle/>
-          <a:p>
-            <a:pPr marL="0" indent="0">
-              <a:buNone/>
-            </a:pPr>
-            <a:r>
-              <a:rPr lang="en-US" sz="1200" dirty="0">
-                <a:solidFill>
-                  <a:srgbClr val="5B6B75"/>
-                </a:solidFill>
-                <a:latin typeface="Calibri" pitchFamily="34" charset="0"/>
-                <a:ea typeface="Calibri" pitchFamily="34" charset="-122"/>
-                <a:cs typeface="Calibri" pitchFamily="34" charset="-120"/>
-              </a:rPr>
-              <a:t>Nel file prezzi: rimosse righe di scarto, ricostruita l'intestazione vera, tipizzati Città (testo) e Prezzo medio (numero)</a:t>
-            </a:r>
-            <a:endParaRPr lang="en-US" sz="1200" dirty="0"/>
-          </a:p>
-        </p:txBody>
-      </p:sp>
-      <p:sp>
-        <p:nvSpPr>
-          <p:cNvPr id="24" name="Shape 17"/>
-          <p:cNvSpPr/>
-          <p:nvPr/>
-        </p:nvSpPr>
-        <p:spPr>
-          <a:xfrm>
-            <a:off x="8732520" y="1691640"/>
-            <a:ext cx="2834640" cy="777240"/>
-          </a:xfrm>
-          <a:prstGeom prst="roundRect">
-            <a:avLst>
-              <a:gd name="adj" fmla="val 7059"/>
-            </a:avLst>
-          </a:prstGeom>
-          <a:solidFill>
-            <a:srgbClr val="0F3057"/>
-          </a:solidFill>
-          <a:ln/>
-        </p:spPr>
-        <p:txBody>
-          <a:bodyPr/>
-          <a:lstStyle/>
-          <a:p>
-            <a:endParaRPr lang="it-IT"/>
-          </a:p>
-        </p:txBody>
-      </p:sp>
-      <p:sp>
-        <p:nvSpPr>
-          <p:cNvPr id="25" name="Text 18"/>
-          <p:cNvSpPr/>
-          <p:nvPr/>
-        </p:nvSpPr>
-        <p:spPr>
-          <a:xfrm>
-            <a:off x="8732520" y="1755648"/>
-            <a:ext cx="2834640" cy="365760"/>
-          </a:xfrm>
-          <a:prstGeom prst="rect">
-            <a:avLst/>
-          </a:prstGeom>
-          <a:noFill/>
-          <a:ln/>
-        </p:spPr>
-        <p:txBody>
-          <a:bodyPr wrap="square" rtlCol="0" anchor="ctr"/>
-          <a:lstStyle/>
-          <a:p>
-            <a:pPr marL="0" indent="0" algn="ctr">
-              <a:buNone/>
-            </a:pPr>
-            <a:r>
-              <a:rPr lang="en-US" sz="1600" b="1" dirty="0">
-                <a:solidFill>
-                  <a:srgbClr val="FFFFFF"/>
-                </a:solidFill>
-                <a:latin typeface="Cambria" pitchFamily="34" charset="0"/>
-                <a:ea typeface="Cambria" pitchFamily="34" charset="-122"/>
-                <a:cs typeface="Cambria" pitchFamily="34" charset="-120"/>
-              </a:rPr>
-              <a:t>6.258 → 6.250</a:t>
-            </a:r>
-            <a:endParaRPr lang="en-US" sz="1600" dirty="0"/>
-          </a:p>
-        </p:txBody>
-      </p:sp>
-      <p:sp>
-        <p:nvSpPr>
-          <p:cNvPr id="26" name="Text 19"/>
-          <p:cNvSpPr/>
-          <p:nvPr/>
-        </p:nvSpPr>
-        <p:spPr>
-          <a:xfrm>
-            <a:off x="8732520" y="2121408"/>
-            <a:ext cx="2834640" cy="274320"/>
-          </a:xfrm>
-          <a:prstGeom prst="rect">
-            <a:avLst/>
-          </a:prstGeom>
-          <a:noFill/>
-          <a:ln/>
-        </p:spPr>
-        <p:txBody>
-          <a:bodyPr wrap="square" rtlCol="0" anchor="ctr"/>
-          <a:lstStyle/>
-          <a:p>
-            <a:pPr marL="0" indent="0" algn="ctr">
-              <a:buNone/>
-            </a:pPr>
-            <a:r>
-              <a:rPr lang="en-US" sz="1050" dirty="0">
-                <a:solidFill>
-                  <a:srgbClr val="CADCE8"/>
-                </a:solidFill>
-                <a:latin typeface="Calibri" pitchFamily="34" charset="0"/>
-                <a:ea typeface="Calibri" pitchFamily="34" charset="-122"/>
-                <a:cs typeface="Calibri" pitchFamily="34" charset="-120"/>
-              </a:rPr>
-              <a:t>righe pulite</a:t>
-            </a:r>
-            <a:endParaRPr lang="en-US" sz="1050" dirty="0"/>
-          </a:p>
-        </p:txBody>
-      </p:sp>
-      <p:sp>
-        <p:nvSpPr>
-          <p:cNvPr id="27" name="Text 20"/>
-          <p:cNvSpPr/>
-          <p:nvPr/>
-        </p:nvSpPr>
-        <p:spPr>
-          <a:xfrm>
-            <a:off x="457200" y="6473952"/>
-            <a:ext cx="5486400" cy="274320"/>
-          </a:xfrm>
-          <a:prstGeom prst="rect">
-            <a:avLst/>
-          </a:prstGeom>
-          <a:noFill/>
-          <a:ln/>
-        </p:spPr>
-        <p:txBody>
-          <a:bodyPr wrap="square" rtlCol="0" anchor="ctr"/>
-          <a:lstStyle/>
-          <a:p>
-            <a:pPr marL="0" indent="0" algn="l">
-              <a:buNone/>
-            </a:pPr>
-            <a:r>
-              <a:rPr lang="en-US" sz="900" dirty="0">
-                <a:solidFill>
-                  <a:srgbClr val="5B6B75"/>
-                </a:solidFill>
-                <a:latin typeface="Calibri" pitchFamily="34" charset="0"/>
-                <a:ea typeface="Calibri" pitchFamily="34" charset="-122"/>
-                <a:cs typeface="Calibri" pitchFamily="34" charset="-120"/>
-              </a:rPr>
-              <a:t>Regione Marche — Patrimonio Ricettivo</a:t>
-            </a:r>
-            <a:endParaRPr lang="en-US" sz="900" dirty="0"/>
-          </a:p>
-        </p:txBody>
-      </p:sp>
-      <p:sp>
-        <p:nvSpPr>
-          <p:cNvPr id="28" name="Text 21"/>
-          <p:cNvSpPr/>
-          <p:nvPr/>
-        </p:nvSpPr>
-        <p:spPr>
-          <a:xfrm>
-            <a:off x="11274552" y="6473952"/>
-            <a:ext cx="457200" cy="274320"/>
-          </a:xfrm>
-          <a:prstGeom prst="rect">
-            <a:avLst/>
-          </a:prstGeom>
-          <a:noFill/>
-          <a:ln/>
-        </p:spPr>
-        <p:txBody>
-          <a:bodyPr wrap="square" rtlCol="0" anchor="ctr"/>
-          <a:lstStyle/>
-          <a:p>
-            <a:pPr marL="0" indent="0" algn="r">
-              <a:buNone/>
-            </a:pPr>
-            <a:r>
-              <a:rPr lang="en-US" sz="900" dirty="0">
-                <a:solidFill>
-                  <a:srgbClr val="5B6B75"/>
-                </a:solidFill>
-                <a:latin typeface="Calibri" pitchFamily="34" charset="0"/>
-                <a:ea typeface="Calibri" pitchFamily="34" charset="-122"/>
-                <a:cs typeface="Calibri" pitchFamily="34" charset="-120"/>
-              </a:rPr>
-              <a:t>3</a:t>
-            </a:r>
-            <a:endParaRPr lang="en-US" sz="900" dirty="0"/>
           </a:p>
         </p:txBody>
       </p:sp>
@@ -5341,7 +7202,7 @@
 
 <file path=ppt/slides/slide4.xml><?xml version="1.0" encoding="utf-8"?>
 <p:sld xmlns:a="http://schemas.openxmlformats.org/drawingml/2006/main" xmlns:r="http://schemas.openxmlformats.org/officeDocument/2006/relationships" xmlns:p="http://schemas.openxmlformats.org/presentationml/2006/main">
-  <p:cSld name="Slide 4">
+  <p:cSld>
     <p:bg>
       <p:bgPr>
         <a:solidFill>
@@ -5352,7 +7213,13 @@
     </p:bg>
     <p:spTree>
       <p:nvGrpSpPr>
-        <p:cNvPr id="1" name=""/>
+        <p:cNvPr id="1" name="">
+          <a:extLst>
+            <a:ext uri="{FF2B5EF4-FFF2-40B4-BE49-F238E27FC236}">
+              <a16:creationId xmlns:a16="http://schemas.microsoft.com/office/drawing/2014/main" id="{A330A9F9-5E3B-E63D-1885-8FE273DA9C79}"/>
+            </a:ext>
+          </a:extLst>
+        </p:cNvPr>
         <p:cNvGrpSpPr/>
         <p:nvPr/>
       </p:nvGrpSpPr>
@@ -5366,14 +7233,20 @@
       </p:grpSpPr>
       <p:sp>
         <p:nvSpPr>
-          <p:cNvPr id="2" name="Text 0"/>
+          <p:cNvPr id="2" name="Text 0">
+            <a:extLst>
+              <a:ext uri="{FF2B5EF4-FFF2-40B4-BE49-F238E27FC236}">
+                <a16:creationId xmlns:a16="http://schemas.microsoft.com/office/drawing/2014/main" id="{EC6C4397-008B-0407-862E-D8C111DF1CC0}"/>
+              </a:ext>
+            </a:extLst>
+          </p:cNvPr>
           <p:cNvSpPr/>
           <p:nvPr/>
         </p:nvSpPr>
         <p:spPr>
           <a:xfrm>
             <a:off x="640080" y="457200"/>
-            <a:ext cx="10058400" cy="548640"/>
+            <a:ext cx="9144000" cy="548640"/>
           </a:xfrm>
           <a:prstGeom prst="rect">
             <a:avLst/>
@@ -5389,15 +7262,54 @@
               <a:buNone/>
             </a:pPr>
             <a:r>
-              <a:rPr lang="en-US" sz="3000" b="1" dirty="0">
+              <a:rPr lang="en-US" sz="3000" b="1" dirty="0" err="1">
                 <a:solidFill>
                   <a:srgbClr val="1A2733"/>
                 </a:solidFill>
                 <a:latin typeface="Cambria" pitchFamily="34" charset="0"/>
                 <a:ea typeface="Cambria" pitchFamily="34" charset="-122"/>
-                <a:cs typeface="Cambria" pitchFamily="34" charset="-120"/>
-              </a:rPr>
-              <a:t>Costruzione del modello dati</a:t>
+              </a:rPr>
+              <a:t>Ricerca</a:t>
+            </a:r>
+            <a:r>
+              <a:rPr lang="en-US" sz="3000" b="1" dirty="0">
+                <a:solidFill>
+                  <a:srgbClr val="1A2733"/>
+                </a:solidFill>
+                <a:latin typeface="Cambria" pitchFamily="34" charset="0"/>
+                <a:ea typeface="Cambria" pitchFamily="34" charset="-122"/>
+              </a:rPr>
+              <a:t> </a:t>
+            </a:r>
+            <a:r>
+              <a:rPr lang="en-US" sz="3000" b="1" dirty="0" err="1">
+                <a:solidFill>
+                  <a:srgbClr val="1A2733"/>
+                </a:solidFill>
+                <a:latin typeface="Cambria" pitchFamily="34" charset="0"/>
+                <a:ea typeface="Cambria" pitchFamily="34" charset="-122"/>
+              </a:rPr>
+              <a:t>logica</a:t>
+            </a:r>
+            <a:r>
+              <a:rPr lang="en-US" sz="3000" b="1" dirty="0">
+                <a:solidFill>
+                  <a:srgbClr val="1A2733"/>
+                </a:solidFill>
+                <a:latin typeface="Cambria" pitchFamily="34" charset="0"/>
+                <a:ea typeface="Cambria" pitchFamily="34" charset="-122"/>
+              </a:rPr>
+              <a:t> e array </a:t>
+            </a:r>
+            <a:r>
+              <a:rPr lang="en-US" sz="3000" b="1" dirty="0" err="1">
+                <a:solidFill>
+                  <a:srgbClr val="1A2733"/>
+                </a:solidFill>
+                <a:latin typeface="Cambria" pitchFamily="34" charset="0"/>
+                <a:ea typeface="Cambria" pitchFamily="34" charset="-122"/>
+              </a:rPr>
+              <a:t>dinamici</a:t>
             </a:r>
             <a:endParaRPr lang="en-US" sz="3000" dirty="0"/>
           </a:p>
@@ -5405,7 +7317,13 @@
       </p:sp>
       <p:sp>
         <p:nvSpPr>
-          <p:cNvPr id="3" name="Text 1"/>
+          <p:cNvPr id="3" name="Text 1">
+            <a:extLst>
+              <a:ext uri="{FF2B5EF4-FFF2-40B4-BE49-F238E27FC236}">
+                <a16:creationId xmlns:a16="http://schemas.microsoft.com/office/drawing/2014/main" id="{90022200-9708-2EFA-C2E4-ACEF09AAA4A1}"/>
+              </a:ext>
+            </a:extLst>
+          </p:cNvPr>
           <p:cNvSpPr/>
           <p:nvPr/>
         </p:nvSpPr>
@@ -5424,11 +7342,8 @@
           <a:bodyPr wrap="square" rtlCol="0" anchor="ctr"/>
           <a:lstStyle/>
           <a:p>
-            <a:pPr marL="0" indent="0">
-              <a:buNone/>
-            </a:pPr>
-            <a:r>
-              <a:rPr lang="en-US" sz="1400" dirty="0">
+            <a:r>
+              <a:rPr lang="it-IT" sz="1400" dirty="0">
                 <a:solidFill>
                   <a:srgbClr val="5B6B75"/>
                 </a:solidFill>
@@ -5436,7 +7351,7 @@
                 <a:ea typeface="Calibri" pitchFamily="34" charset="-122"/>
                 <a:cs typeface="Calibri" pitchFamily="34" charset="-120"/>
               </a:rPr>
-              <a:t>Merge Strutture ↔ Prezzi e raggruppamenti caricati nel Modello dati di Excel</a:t>
+              <a:t>caricati entrambi i file in Power Query, individuate le colonne e i problemi di qualità nei dati grezzi (spazi, duplicati, righe di scarto, dati fuori posto)</a:t>
             </a:r>
             <a:endParaRPr lang="en-US" sz="1400" dirty="0"/>
           </a:p>
@@ -5444,19 +7359,23 @@
       </p:sp>
       <p:sp>
         <p:nvSpPr>
-          <p:cNvPr id="4" name="Shape 2"/>
-          <p:cNvSpPr/>
-          <p:nvPr/>
-        </p:nvSpPr>
-        <p:spPr>
-          <a:xfrm>
-            <a:off x="731520" y="1920240"/>
-            <a:ext cx="2743200" cy="1005840"/>
-          </a:xfrm>
-          <a:prstGeom prst="roundRect">
-            <a:avLst>
-              <a:gd name="adj" fmla="val 6364"/>
-            </a:avLst>
+          <p:cNvPr id="4" name="Shape 2">
+            <a:extLst>
+              <a:ext uri="{FF2B5EF4-FFF2-40B4-BE49-F238E27FC236}">
+                <a16:creationId xmlns:a16="http://schemas.microsoft.com/office/drawing/2014/main" id="{F2582D51-D02A-4664-5F01-AB466525DEB7}"/>
+              </a:ext>
+            </a:extLst>
+          </p:cNvPr>
+          <p:cNvSpPr/>
+          <p:nvPr/>
+        </p:nvSpPr>
+        <p:spPr>
+          <a:xfrm>
+            <a:off x="640080" y="1691640"/>
+            <a:ext cx="502920" cy="502920"/>
+          </a:xfrm>
+          <a:prstGeom prst="ellipse">
+            <a:avLst/>
           </a:prstGeom>
           <a:solidFill>
             <a:srgbClr val="1C7293"/>
@@ -5471,177 +7390,15 @@
           </a:p>
         </p:txBody>
       </p:sp>
-      <p:sp>
-        <p:nvSpPr>
-          <p:cNvPr id="5" name="Text 3"/>
-          <p:cNvSpPr/>
-          <p:nvPr/>
-        </p:nvSpPr>
-        <p:spPr>
-          <a:xfrm>
-            <a:off x="731520" y="1920240"/>
-            <a:ext cx="2743200" cy="1005840"/>
-          </a:xfrm>
-          <a:prstGeom prst="rect">
-            <a:avLst/>
-          </a:prstGeom>
-          <a:noFill/>
-          <a:ln/>
-        </p:spPr>
-        <p:txBody>
-          <a:bodyPr wrap="square" rtlCol="0" anchor="ctr"/>
-          <a:lstStyle/>
-          <a:p>
-            <a:pPr marL="0" indent="0" algn="ctr">
-              <a:buNone/>
-            </a:pPr>
-            <a:r>
-              <a:rPr lang="en-US" sz="1400" b="1" dirty="0">
-                <a:solidFill>
-                  <a:srgbClr val="FFFFFF"/>
-                </a:solidFill>
-                <a:latin typeface="Cambria" pitchFamily="34" charset="0"/>
-                <a:ea typeface="Cambria" pitchFamily="34" charset="-122"/>
-                <a:cs typeface="Cambria" pitchFamily="34" charset="-120"/>
-              </a:rPr>
-              <a:t>Strutture</a:t>
-            </a:r>
-            <a:endParaRPr lang="en-US" sz="1400" dirty="0"/>
-          </a:p>
-          <a:p>
-            <a:pPr marL="0" indent="0" algn="ctr">
-              <a:buNone/>
-            </a:pPr>
-            <a:r>
-              <a:rPr lang="en-US" sz="1400" b="1" dirty="0">
-                <a:solidFill>
-                  <a:srgbClr val="FFFFFF"/>
-                </a:solidFill>
-                <a:latin typeface="Cambria" pitchFamily="34" charset="0"/>
-                <a:ea typeface="Cambria" pitchFamily="34" charset="-122"/>
-                <a:cs typeface="Cambria" pitchFamily="34" charset="-120"/>
-              </a:rPr>
-              <a:t>6.250 righe</a:t>
-            </a:r>
-            <a:endParaRPr lang="en-US" sz="1400" dirty="0"/>
-          </a:p>
-        </p:txBody>
-      </p:sp>
-      <p:sp>
-        <p:nvSpPr>
-          <p:cNvPr id="6" name="Shape 4"/>
-          <p:cNvSpPr/>
-          <p:nvPr/>
-        </p:nvSpPr>
-        <p:spPr>
-          <a:xfrm>
-            <a:off x="731520" y="3291840"/>
-            <a:ext cx="2743200" cy="1005840"/>
-          </a:xfrm>
-          <a:prstGeom prst="roundRect">
-            <a:avLst>
-              <a:gd name="adj" fmla="val 6364"/>
-            </a:avLst>
-          </a:prstGeom>
-          <a:solidFill>
-            <a:srgbClr val="E8871E"/>
-          </a:solidFill>
-          <a:ln/>
-        </p:spPr>
-        <p:txBody>
-          <a:bodyPr/>
-          <a:lstStyle/>
-          <a:p>
-            <a:endParaRPr lang="it-IT"/>
-          </a:p>
-        </p:txBody>
-      </p:sp>
-      <p:sp>
-        <p:nvSpPr>
-          <p:cNvPr id="7" name="Text 5"/>
-          <p:cNvSpPr/>
-          <p:nvPr/>
-        </p:nvSpPr>
-        <p:spPr>
-          <a:xfrm>
-            <a:off x="731520" y="3291840"/>
-            <a:ext cx="2743200" cy="1005840"/>
-          </a:xfrm>
-          <a:prstGeom prst="rect">
-            <a:avLst/>
-          </a:prstGeom>
-          <a:noFill/>
-          <a:ln/>
-        </p:spPr>
-        <p:txBody>
-          <a:bodyPr wrap="square" rtlCol="0" anchor="ctr"/>
-          <a:lstStyle/>
-          <a:p>
-            <a:pPr marL="0" indent="0" algn="ctr">
-              <a:buNone/>
-            </a:pPr>
-            <a:r>
-              <a:rPr lang="en-US" sz="1400" b="1" dirty="0">
-                <a:solidFill>
-                  <a:srgbClr val="FFFFFF"/>
-                </a:solidFill>
-                <a:latin typeface="Cambria" pitchFamily="34" charset="0"/>
-                <a:ea typeface="Cambria" pitchFamily="34" charset="-122"/>
-                <a:cs typeface="Cambria" pitchFamily="34" charset="-120"/>
-              </a:rPr>
-              <a:t>Prezzi</a:t>
-            </a:r>
-            <a:endParaRPr lang="en-US" sz="1400" dirty="0"/>
-          </a:p>
-          <a:p>
-            <a:pPr marL="0" indent="0" algn="ctr">
-              <a:buNone/>
-            </a:pPr>
-            <a:r>
-              <a:rPr lang="en-US" sz="1400" b="1" dirty="0">
-                <a:solidFill>
-                  <a:srgbClr val="FFFFFF"/>
-                </a:solidFill>
-                <a:latin typeface="Cambria" pitchFamily="34" charset="0"/>
-                <a:ea typeface="Cambria" pitchFamily="34" charset="-122"/>
-                <a:cs typeface="Cambria" pitchFamily="34" charset="-120"/>
-              </a:rPr>
-              <a:t>234 città</a:t>
-            </a:r>
-            <a:endParaRPr lang="en-US" sz="1400" dirty="0"/>
-          </a:p>
-        </p:txBody>
-      </p:sp>
-      <p:sp>
-        <p:nvSpPr>
-          <p:cNvPr id="8" name="Shape 6"/>
-          <p:cNvSpPr/>
-          <p:nvPr/>
-        </p:nvSpPr>
-        <p:spPr>
-          <a:xfrm>
-            <a:off x="3794760" y="2514600"/>
-            <a:ext cx="685800" cy="685800"/>
-          </a:xfrm>
-          <a:prstGeom prst="ellipse">
-            <a:avLst/>
-          </a:prstGeom>
-          <a:solidFill>
-            <a:srgbClr val="0F3057"/>
-          </a:solidFill>
-          <a:ln/>
-        </p:spPr>
-        <p:txBody>
-          <a:bodyPr/>
-          <a:lstStyle/>
-          <a:p>
-            <a:endParaRPr lang="it-IT"/>
-          </a:p>
-        </p:txBody>
-      </p:sp>
       <p:pic>
         <p:nvPicPr>
-          <p:cNvPr id="9" name="Image 0" descr="/home/claude/deck/icon_link.png"/>
+          <p:cNvPr id="5" name="Image 0" descr="/home/claude/deck/icon_filter.png">
+            <a:extLst>
+              <a:ext uri="{FF2B5EF4-FFF2-40B4-BE49-F238E27FC236}">
+                <a16:creationId xmlns:a16="http://schemas.microsoft.com/office/drawing/2014/main" id="{60094A47-A8AD-3021-518D-4D35F096E1B6}"/>
+              </a:ext>
+            </a:extLst>
+          </p:cNvPr>
           <p:cNvPicPr>
             <a:picLocks noChangeAspect="1"/>
           </p:cNvPicPr>
@@ -5655,8 +7412,8 @@
         </p:blipFill>
         <p:spPr>
           <a:xfrm>
-            <a:off x="3973068" y="2692908"/>
-            <a:ext cx="329184" cy="329184"/>
+            <a:off x="770839" y="1822399"/>
+            <a:ext cx="241402" cy="241402"/>
           </a:xfrm>
           <a:prstGeom prst="rect">
             <a:avLst/>
@@ -5665,14 +7422,20 @@
       </p:pic>
       <p:sp>
         <p:nvSpPr>
-          <p:cNvPr id="10" name="Text 7"/>
-          <p:cNvSpPr/>
-          <p:nvPr/>
-        </p:nvSpPr>
-        <p:spPr>
-          <a:xfrm>
-            <a:off x="3520440" y="3291840"/>
-            <a:ext cx="1234440" cy="822960"/>
+          <p:cNvPr id="6" name="Text 3">
+            <a:extLst>
+              <a:ext uri="{FF2B5EF4-FFF2-40B4-BE49-F238E27FC236}">
+                <a16:creationId xmlns:a16="http://schemas.microsoft.com/office/drawing/2014/main" id="{4CEC1EE2-B945-02E8-E35B-70A63B775493}"/>
+              </a:ext>
+            </a:extLst>
+          </p:cNvPr>
+          <p:cNvSpPr/>
+          <p:nvPr/>
+        </p:nvSpPr>
+        <p:spPr>
+          <a:xfrm>
+            <a:off x="1371600" y="1664208"/>
+            <a:ext cx="9692640" cy="329184"/>
           </a:xfrm>
           <a:prstGeom prst="rect">
             <a:avLst/>
@@ -5684,153 +7447,40 @@
           <a:bodyPr wrap="square" rtlCol="0" anchor="ctr"/>
           <a:lstStyle/>
           <a:p>
-            <a:pPr marL="0" indent="0" algn="ctr">
-              <a:buNone/>
-            </a:pPr>
-            <a:r>
-              <a:rPr lang="en-US" sz="1050" b="1" dirty="0">
-                <a:solidFill>
-                  <a:srgbClr val="0F3057"/>
-                </a:solidFill>
-                <a:latin typeface="Calibri" pitchFamily="34" charset="0"/>
-                <a:ea typeface="Calibri" pitchFamily="34" charset="-122"/>
-                <a:cs typeface="Calibri" pitchFamily="34" charset="-120"/>
-              </a:rPr>
-              <a:t>LEFT</a:t>
-            </a:r>
-            <a:endParaRPr lang="en-US" sz="1050" dirty="0"/>
-          </a:p>
-          <a:p>
-            <a:pPr marL="0" indent="0" algn="ctr">
-              <a:buNone/>
-            </a:pPr>
-            <a:r>
-              <a:rPr lang="en-US" sz="1050" b="1" dirty="0">
-                <a:solidFill>
-                  <a:srgbClr val="0F3057"/>
-                </a:solidFill>
-                <a:latin typeface="Calibri" pitchFamily="34" charset="0"/>
-                <a:ea typeface="Calibri" pitchFamily="34" charset="-122"/>
-                <a:cs typeface="Calibri" pitchFamily="34" charset="-120"/>
-              </a:rPr>
-              <a:t>OUTER</a:t>
-            </a:r>
-            <a:endParaRPr lang="en-US" sz="1050" dirty="0"/>
-          </a:p>
-          <a:p>
-            <a:pPr marL="0" indent="0" algn="ctr">
-              <a:buNone/>
-            </a:pPr>
-            <a:r>
-              <a:rPr lang="en-US" sz="1050" b="1" dirty="0">
-                <a:solidFill>
-                  <a:srgbClr val="0F3057"/>
-                </a:solidFill>
-                <a:latin typeface="Calibri" pitchFamily="34" charset="0"/>
-                <a:ea typeface="Calibri" pitchFamily="34" charset="-122"/>
-                <a:cs typeface="Calibri" pitchFamily="34" charset="-120"/>
-              </a:rPr>
-              <a:t>JOIN</a:t>
-            </a:r>
-            <a:endParaRPr lang="en-US" sz="1050" dirty="0"/>
-          </a:p>
-        </p:txBody>
-      </p:sp>
-      <p:sp>
-        <p:nvSpPr>
-          <p:cNvPr id="11" name="Shape 8"/>
-          <p:cNvSpPr/>
-          <p:nvPr/>
-        </p:nvSpPr>
-        <p:spPr>
-          <a:xfrm>
-            <a:off x="4892040" y="2423160"/>
-            <a:ext cx="2880360" cy="1005840"/>
-          </a:xfrm>
-          <a:prstGeom prst="roundRect">
-            <a:avLst>
-              <a:gd name="adj" fmla="val 6364"/>
-            </a:avLst>
-          </a:prstGeom>
-          <a:solidFill>
-            <a:srgbClr val="0F3057"/>
-          </a:solidFill>
-          <a:ln/>
-        </p:spPr>
-        <p:txBody>
-          <a:bodyPr/>
-          <a:lstStyle/>
-          <a:p>
-            <a:endParaRPr lang="it-IT"/>
-          </a:p>
-        </p:txBody>
-      </p:sp>
-      <p:sp>
-        <p:nvSpPr>
-          <p:cNvPr id="12" name="Text 9"/>
-          <p:cNvSpPr/>
-          <p:nvPr/>
-        </p:nvSpPr>
-        <p:spPr>
-          <a:xfrm>
-            <a:off x="4892040" y="2423160"/>
-            <a:ext cx="2880360" cy="1005840"/>
-          </a:xfrm>
-          <a:prstGeom prst="rect">
-            <a:avLst/>
-          </a:prstGeom>
-          <a:noFill/>
-          <a:ln/>
-        </p:spPr>
-        <p:txBody>
-          <a:bodyPr wrap="square" rtlCol="0" anchor="ctr"/>
-          <a:lstStyle/>
-          <a:p>
-            <a:pPr marL="0" indent="0" algn="ctr">
-              <a:buNone/>
-            </a:pPr>
-            <a:r>
-              <a:rPr lang="en-US" sz="1300" b="1" dirty="0">
-                <a:solidFill>
-                  <a:srgbClr val="FFFFFF"/>
+            <a:pPr marL="0" indent="0">
+              <a:buNone/>
+            </a:pPr>
+            <a:r>
+              <a:rPr lang="en-US" sz="1500" b="1" dirty="0">
+                <a:solidFill>
+                  <a:srgbClr val="1A2733"/>
                 </a:solidFill>
                 <a:latin typeface="Cambria" pitchFamily="34" charset="0"/>
                 <a:ea typeface="Cambria" pitchFamily="34" charset="-122"/>
                 <a:cs typeface="Cambria" pitchFamily="34" charset="-120"/>
               </a:rPr>
-              <a:t>Modello unito</a:t>
-            </a:r>
-            <a:endParaRPr lang="en-US" sz="1300" dirty="0"/>
-          </a:p>
-          <a:p>
-            <a:pPr marL="0" indent="0" algn="ctr">
-              <a:buNone/>
-            </a:pPr>
-            <a:r>
-              <a:rPr lang="en-US" sz="1300" b="1" dirty="0">
-                <a:solidFill>
-                  <a:srgbClr val="FFFFFF"/>
-                </a:solidFill>
-                <a:latin typeface="Cambria" pitchFamily="34" charset="0"/>
-                <a:ea typeface="Cambria" pitchFamily="34" charset="-122"/>
-                <a:cs typeface="Cambria" pitchFamily="34" charset="-120"/>
-              </a:rPr>
-              <a:t>6.250 righe con prezzo</a:t>
-            </a:r>
-            <a:endParaRPr lang="en-US" sz="1300" dirty="0"/>
-          </a:p>
-        </p:txBody>
-      </p:sp>
-      <p:sp>
-        <p:nvSpPr>
-          <p:cNvPr id="13" name="Text 10"/>
-          <p:cNvSpPr/>
-          <p:nvPr/>
-        </p:nvSpPr>
-        <p:spPr>
-          <a:xfrm>
-            <a:off x="8092440" y="2011680"/>
-            <a:ext cx="3657600" cy="1920240"/>
+              <a:t>Es.5 </a:t>
+            </a:r>
+            <a:endParaRPr lang="en-US" sz="1500" dirty="0"/>
+          </a:p>
+        </p:txBody>
+      </p:sp>
+      <p:sp>
+        <p:nvSpPr>
+          <p:cNvPr id="7" name="Text 4">
+            <a:extLst>
+              <a:ext uri="{FF2B5EF4-FFF2-40B4-BE49-F238E27FC236}">
+                <a16:creationId xmlns:a16="http://schemas.microsoft.com/office/drawing/2014/main" id="{FA9586F8-50FD-DC95-7F80-EBE31040BA87}"/>
+              </a:ext>
+            </a:extLst>
+          </p:cNvPr>
+          <p:cNvSpPr/>
+          <p:nvPr/>
+        </p:nvSpPr>
+        <p:spPr>
+          <a:xfrm>
+            <a:off x="1371600" y="1993392"/>
+            <a:ext cx="9966960" cy="960120"/>
           </a:xfrm>
           <a:prstGeom prst="rect">
             <a:avLst/>
@@ -5842,63 +7492,25 @@
           <a:bodyPr wrap="square" rtlCol="0" anchor="t"/>
           <a:lstStyle/>
           <a:p>
-            <a:pPr marL="0" indent="0">
-              <a:buNone/>
-            </a:pPr>
-            <a:r>
-              <a:rPr lang="en-US" sz="1200" i="1" dirty="0">
-                <a:solidFill>
-                  <a:srgbClr val="1A2733"/>
-                </a:solidFill>
-                <a:latin typeface="Calibri" pitchFamily="34" charset="0"/>
-                <a:ea typeface="Calibri" pitchFamily="34" charset="-122"/>
-                <a:cs typeface="Calibri" pitchFamily="34" charset="-120"/>
-              </a:rPr>
-              <a:t>Perché Left Outer e non Inner: tiene sempre tutte le strutture, anche se una città restasse senza prezzo (qui non succede: copertura 234/234, zero valori nulli) — un Inner join avrebbe rischiato di far sparire righe in silenzio.</a:t>
-            </a:r>
             <a:endParaRPr lang="en-US" sz="1200" dirty="0"/>
           </a:p>
         </p:txBody>
       </p:sp>
       <p:sp>
         <p:nvSpPr>
-          <p:cNvPr id="14" name="Shape 11"/>
-          <p:cNvSpPr/>
-          <p:nvPr/>
-        </p:nvSpPr>
-        <p:spPr>
-          <a:xfrm>
-            <a:off x="640080" y="3977640"/>
-            <a:ext cx="10881360" cy="0"/>
-          </a:xfrm>
-          <a:prstGeom prst="line">
-            <a:avLst/>
-          </a:prstGeom>
-          <a:noFill/>
-          <a:ln w="12700">
-            <a:solidFill>
-              <a:srgbClr val="D8E0E5"/>
-            </a:solidFill>
-            <a:prstDash val="solid"/>
-          </a:ln>
-        </p:spPr>
-        <p:txBody>
-          <a:bodyPr/>
-          <a:lstStyle/>
-          <a:p>
-            <a:endParaRPr lang="it-IT"/>
-          </a:p>
-        </p:txBody>
-      </p:sp>
-      <p:sp>
-        <p:nvSpPr>
-          <p:cNvPr id="15" name="Shape 12"/>
-          <p:cNvSpPr/>
-          <p:nvPr/>
-        </p:nvSpPr>
-        <p:spPr>
-          <a:xfrm>
-            <a:off x="640080" y="4206240"/>
+          <p:cNvPr id="12" name="Shape 8">
+            <a:extLst>
+              <a:ext uri="{FF2B5EF4-FFF2-40B4-BE49-F238E27FC236}">
+                <a16:creationId xmlns:a16="http://schemas.microsoft.com/office/drawing/2014/main" id="{07C2DE46-2D38-D083-3787-EE886602DE9A}"/>
+              </a:ext>
+            </a:extLst>
+          </p:cNvPr>
+          <p:cNvSpPr/>
+          <p:nvPr/>
+        </p:nvSpPr>
+        <p:spPr>
+          <a:xfrm>
+            <a:off x="620421" y="2841041"/>
             <a:ext cx="502920" cy="502920"/>
           </a:xfrm>
           <a:prstGeom prst="ellipse">
@@ -5919,21 +7531,27 @@
       </p:sp>
       <p:pic>
         <p:nvPicPr>
-          <p:cNvPr id="16" name="Image 1" descr="/home/claude/deck/icon_layers.png"/>
+          <p:cNvPr id="13" name="Image 2" descr="/home/claude/deck/icon_filter.png">
+            <a:extLst>
+              <a:ext uri="{FF2B5EF4-FFF2-40B4-BE49-F238E27FC236}">
+                <a16:creationId xmlns:a16="http://schemas.microsoft.com/office/drawing/2014/main" id="{7B0C996F-29A9-6F73-246B-B1F588A55060}"/>
+              </a:ext>
+            </a:extLst>
+          </p:cNvPr>
           <p:cNvPicPr>
             <a:picLocks noChangeAspect="1"/>
           </p:cNvPicPr>
           <p:nvPr/>
         </p:nvPicPr>
         <p:blipFill>
-          <a:blip r:embed="rId4"/>
+          <a:blip r:embed="rId3"/>
           <a:stretch>
             <a:fillRect/>
           </a:stretch>
         </p:blipFill>
         <p:spPr>
           <a:xfrm>
-            <a:off x="770839" y="4336999"/>
+            <a:off x="770839" y="2991002"/>
             <a:ext cx="241402" cy="241402"/>
           </a:xfrm>
           <a:prstGeom prst="rect">
@@ -5943,14 +7561,20 @@
       </p:pic>
       <p:sp>
         <p:nvSpPr>
-          <p:cNvPr id="17" name="Text 13"/>
-          <p:cNvSpPr/>
-          <p:nvPr/>
-        </p:nvSpPr>
-        <p:spPr>
-          <a:xfrm>
-            <a:off x="1371600" y="4206240"/>
-            <a:ext cx="7315200" cy="365760"/>
+          <p:cNvPr id="14" name="Text 9">
+            <a:extLst>
+              <a:ext uri="{FF2B5EF4-FFF2-40B4-BE49-F238E27FC236}">
+                <a16:creationId xmlns:a16="http://schemas.microsoft.com/office/drawing/2014/main" id="{B4E82BBB-94FD-C20F-137F-77746AF34BB5}"/>
+              </a:ext>
+            </a:extLst>
+          </p:cNvPr>
+          <p:cNvSpPr/>
+          <p:nvPr/>
+        </p:nvSpPr>
+        <p:spPr>
+          <a:xfrm>
+            <a:off x="1322679" y="2697480"/>
+            <a:ext cx="9692640" cy="329184"/>
           </a:xfrm>
           <a:prstGeom prst="rect">
             <a:avLst/>
@@ -5966,7 +7590,183 @@
               <a:buNone/>
             </a:pPr>
             <a:r>
-              <a:rPr lang="en-US" sz="1600" b="1" dirty="0">
+              <a:rPr lang="en-US" sz="1500" b="1" dirty="0">
+                <a:solidFill>
+                  <a:srgbClr val="1A2733"/>
+                </a:solidFill>
+                <a:latin typeface="Cambria" pitchFamily="34" charset="0"/>
+                <a:ea typeface="Cambria" pitchFamily="34" charset="-122"/>
+              </a:rPr>
+              <a:t>Es.6</a:t>
+            </a:r>
+            <a:endParaRPr lang="en-US" sz="1500" dirty="0"/>
+          </a:p>
+        </p:txBody>
+      </p:sp>
+      <p:sp>
+        <p:nvSpPr>
+          <p:cNvPr id="15" name="Text 10">
+            <a:extLst>
+              <a:ext uri="{FF2B5EF4-FFF2-40B4-BE49-F238E27FC236}">
+                <a16:creationId xmlns:a16="http://schemas.microsoft.com/office/drawing/2014/main" id="{ABCEFA3B-6065-6287-6128-44534DA931C5}"/>
+              </a:ext>
+            </a:extLst>
+          </p:cNvPr>
+          <p:cNvSpPr/>
+          <p:nvPr/>
+        </p:nvSpPr>
+        <p:spPr>
+          <a:xfrm>
+            <a:off x="1371600" y="3785616"/>
+            <a:ext cx="9966960" cy="502920"/>
+          </a:xfrm>
+          <a:prstGeom prst="rect">
+            <a:avLst/>
+          </a:prstGeom>
+          <a:noFill/>
+          <a:ln/>
+        </p:spPr>
+        <p:txBody>
+          <a:bodyPr wrap="square" rtlCol="0" anchor="t"/>
+          <a:lstStyle/>
+          <a:p>
+            <a:pPr marL="0" indent="0">
+              <a:buNone/>
+            </a:pPr>
+            <a:endParaRPr lang="en-US" sz="1200" dirty="0"/>
+          </a:p>
+        </p:txBody>
+      </p:sp>
+      <p:sp>
+        <p:nvSpPr>
+          <p:cNvPr id="19" name="Text 13">
+            <a:extLst>
+              <a:ext uri="{FF2B5EF4-FFF2-40B4-BE49-F238E27FC236}">
+                <a16:creationId xmlns:a16="http://schemas.microsoft.com/office/drawing/2014/main" id="{71A911AF-4C7B-A22A-8394-7A4BE8A5E853}"/>
+              </a:ext>
+            </a:extLst>
+          </p:cNvPr>
+          <p:cNvSpPr/>
+          <p:nvPr/>
+        </p:nvSpPr>
+        <p:spPr>
+          <a:xfrm>
+            <a:off x="1322680" y="4233672"/>
+            <a:ext cx="9966960" cy="764885"/>
+          </a:xfrm>
+          <a:prstGeom prst="rect">
+            <a:avLst/>
+          </a:prstGeom>
+          <a:noFill/>
+          <a:ln/>
+        </p:spPr>
+        <p:txBody>
+          <a:bodyPr wrap="square" rtlCol="0" anchor="t"/>
+          <a:lstStyle/>
+          <a:p>
+            <a:r>
+              <a:rPr lang="it-IT" sz="1200" dirty="0"/>
+              <a:t>Foglio analisi prezzi: media, mediana, moda (bimodale: 75€ e 78€), varianza, deviazione standard, IQR sui prezzi medi delle 234 città. Commento: media e mediana coincidono → distribuzione simmetrica. tabella di frequenza per classi da 20€. Classe modale: 30-50€ (56 città). Limiti di Tukey (1,5×IQR): nessuna città anomala trovata, coerente con la distribuzione quasi uniforme già osservata.</a:t>
+            </a:r>
+            <a:endParaRPr lang="en-US" sz="1200" dirty="0"/>
+          </a:p>
+        </p:txBody>
+      </p:sp>
+      <p:sp>
+        <p:nvSpPr>
+          <p:cNvPr id="20" name="Shape 14">
+            <a:extLst>
+              <a:ext uri="{FF2B5EF4-FFF2-40B4-BE49-F238E27FC236}">
+                <a16:creationId xmlns:a16="http://schemas.microsoft.com/office/drawing/2014/main" id="{4B06B907-A0D7-0EF5-B097-F059785F431D}"/>
+              </a:ext>
+            </a:extLst>
+          </p:cNvPr>
+          <p:cNvSpPr/>
+          <p:nvPr/>
+        </p:nvSpPr>
+        <p:spPr>
+          <a:xfrm>
+            <a:off x="640538" y="3985870"/>
+            <a:ext cx="502920" cy="502920"/>
+          </a:xfrm>
+          <a:prstGeom prst="ellipse">
+            <a:avLst/>
+          </a:prstGeom>
+          <a:solidFill>
+            <a:srgbClr val="1C7293"/>
+          </a:solidFill>
+          <a:ln/>
+        </p:spPr>
+        <p:txBody>
+          <a:bodyPr/>
+          <a:lstStyle/>
+          <a:p>
+            <a:endParaRPr lang="it-IT" dirty="0"/>
+          </a:p>
+        </p:txBody>
+      </p:sp>
+      <p:pic>
+        <p:nvPicPr>
+          <p:cNvPr id="21" name="Image 4" descr="/home/claude/deck/icon_filter.png">
+            <a:extLst>
+              <a:ext uri="{FF2B5EF4-FFF2-40B4-BE49-F238E27FC236}">
+                <a16:creationId xmlns:a16="http://schemas.microsoft.com/office/drawing/2014/main" id="{031CA508-288A-F941-55A6-632060F2FDF0}"/>
+              </a:ext>
+            </a:extLst>
+          </p:cNvPr>
+          <p:cNvPicPr>
+            <a:picLocks noChangeAspect="1"/>
+          </p:cNvPicPr>
+          <p:nvPr/>
+        </p:nvPicPr>
+        <p:blipFill>
+          <a:blip r:embed="rId3"/>
+          <a:stretch>
+            <a:fillRect/>
+          </a:stretch>
+        </p:blipFill>
+        <p:spPr>
+          <a:xfrm>
+            <a:off x="770839" y="4112971"/>
+            <a:ext cx="241402" cy="241402"/>
+          </a:xfrm>
+          <a:prstGeom prst="rect">
+            <a:avLst/>
+          </a:prstGeom>
+        </p:spPr>
+      </p:pic>
+      <p:sp>
+        <p:nvSpPr>
+          <p:cNvPr id="22" name="Text 15">
+            <a:extLst>
+              <a:ext uri="{FF2B5EF4-FFF2-40B4-BE49-F238E27FC236}">
+                <a16:creationId xmlns:a16="http://schemas.microsoft.com/office/drawing/2014/main" id="{605ACFA1-8BC4-9C16-0646-E0AFAFA5F193}"/>
+              </a:ext>
+            </a:extLst>
+          </p:cNvPr>
+          <p:cNvSpPr/>
+          <p:nvPr/>
+        </p:nvSpPr>
+        <p:spPr>
+          <a:xfrm>
+            <a:off x="1371600" y="3741724"/>
+            <a:ext cx="9741560" cy="546811"/>
+          </a:xfrm>
+          <a:prstGeom prst="rect">
+            <a:avLst/>
+          </a:prstGeom>
+          <a:noFill/>
+          <a:ln/>
+        </p:spPr>
+        <p:txBody>
+          <a:bodyPr wrap="square" rtlCol="0" anchor="ctr"/>
+          <a:lstStyle/>
+          <a:p>
+            <a:pPr marL="0" indent="0">
+              <a:buNone/>
+            </a:pPr>
+            <a:r>
+              <a:rPr lang="en-US" sz="1500" b="1" dirty="0">
                 <a:solidFill>
                   <a:srgbClr val="1A2733"/>
                 </a:solidFill>
@@ -5974,46 +7774,50 @@
                 <a:ea typeface="Cambria" pitchFamily="34" charset="-122"/>
                 <a:cs typeface="Cambria" pitchFamily="34" charset="-120"/>
               </a:rPr>
-              <a:t>Raggruppamenti (Group By) nel Modello dati</a:t>
-            </a:r>
-            <a:endParaRPr lang="en-US" sz="1600" dirty="0"/>
-          </a:p>
-        </p:txBody>
-      </p:sp>
-      <p:sp>
-        <p:nvSpPr>
-          <p:cNvPr id="18" name="Text 14"/>
-          <p:cNvSpPr/>
-          <p:nvPr/>
-        </p:nvSpPr>
-        <p:spPr>
-          <a:xfrm>
-            <a:off x="1371600" y="4572000"/>
-            <a:ext cx="9601200" cy="365760"/>
-          </a:xfrm>
-          <a:prstGeom prst="rect">
-            <a:avLst/>
-          </a:prstGeom>
-          <a:noFill/>
-          <a:ln/>
-        </p:spPr>
-        <p:txBody>
-          <a:bodyPr wrap="square" rtlCol="0" anchor="ctr"/>
-          <a:lstStyle/>
-          <a:p>
-            <a:pPr marL="0" indent="0">
-              <a:buNone/>
-            </a:pPr>
-            <a:r>
-              <a:rPr lang="en-US" sz="1200" dirty="0">
-                <a:solidFill>
-                  <a:srgbClr val="5B6B75"/>
-                </a:solidFill>
-                <a:latin typeface="Calibri" pitchFamily="34" charset="0"/>
-                <a:ea typeface="Calibri" pitchFamily="34" charset="-122"/>
-                <a:cs typeface="Calibri" pitchFamily="34" charset="-120"/>
-              </a:rPr>
-              <a:t>Due query di riepilogo create come Riferimento alla query Strutture, poi caricate "solo connessione" nel Modello dati (Power Pivot):</a:t>
+              <a:t>Es.7 / 8 / 9</a:t>
+            </a:r>
+            <a:endParaRPr lang="en-US" sz="1500" dirty="0"/>
+          </a:p>
+        </p:txBody>
+      </p:sp>
+      <p:sp>
+        <p:nvSpPr>
+          <p:cNvPr id="23" name="Text 16">
+            <a:extLst>
+              <a:ext uri="{FF2B5EF4-FFF2-40B4-BE49-F238E27FC236}">
+                <a16:creationId xmlns:a16="http://schemas.microsoft.com/office/drawing/2014/main" id="{FAB2B4A7-A745-6B58-D32E-54B24B97B8BF}"/>
+              </a:ext>
+            </a:extLst>
+          </p:cNvPr>
+          <p:cNvSpPr/>
+          <p:nvPr/>
+        </p:nvSpPr>
+        <p:spPr>
+          <a:xfrm>
+            <a:off x="1322680" y="3063240"/>
+            <a:ext cx="9966960" cy="502920"/>
+          </a:xfrm>
+          <a:prstGeom prst="rect">
+            <a:avLst/>
+          </a:prstGeom>
+          <a:noFill/>
+          <a:ln/>
+        </p:spPr>
+        <p:txBody>
+          <a:bodyPr wrap="square" rtlCol="0" anchor="t"/>
+          <a:lstStyle/>
+          <a:p>
+            <a:r>
+              <a:rPr lang="it-IT" sz="1200" dirty="0"/>
+              <a:t>classifica delle 15 categorie ordinata dal più alto (tabella pivot sul Modello dati) + estrazione delle strutture di Bolognola in una vera Tabella strutturata (</a:t>
+            </a:r>
+            <a:r>
+              <a:rPr lang="it-IT" sz="1200" dirty="0" err="1"/>
+              <a:t>Ctrl+T</a:t>
+            </a:r>
+            <a:r>
+              <a:rPr lang="it-IT" sz="1200" dirty="0"/>
+              <a:t>), ordinate per categoria. Foglio sintesi categoria ed estrazione città.</a:t>
             </a:r>
             <a:endParaRPr lang="en-US" sz="1200" dirty="0"/>
           </a:p>
@@ -6021,14 +7825,20 @@
       </p:sp>
       <p:sp>
         <p:nvSpPr>
-          <p:cNvPr id="19" name="Shape 15"/>
-          <p:cNvSpPr/>
-          <p:nvPr/>
-        </p:nvSpPr>
-        <p:spPr>
-          <a:xfrm>
-            <a:off x="1371600" y="5029200"/>
-            <a:ext cx="4480560" cy="777240"/>
+          <p:cNvPr id="24" name="Shape 17">
+            <a:extLst>
+              <a:ext uri="{FF2B5EF4-FFF2-40B4-BE49-F238E27FC236}">
+                <a16:creationId xmlns:a16="http://schemas.microsoft.com/office/drawing/2014/main" id="{5A22DA19-C157-53B4-79C1-333C836A62F8}"/>
+              </a:ext>
+            </a:extLst>
+          </p:cNvPr>
+          <p:cNvSpPr/>
+          <p:nvPr/>
+        </p:nvSpPr>
+        <p:spPr>
+          <a:xfrm>
+            <a:off x="9070848" y="91440"/>
+            <a:ext cx="2834640" cy="777240"/>
           </a:xfrm>
           <a:prstGeom prst="roundRect">
             <a:avLst>
@@ -6036,14 +7846,9 @@
             </a:avLst>
           </a:prstGeom>
           <a:solidFill>
-            <a:srgbClr val="FFFFFF"/>
+            <a:srgbClr val="0F3057"/>
           </a:solidFill>
-          <a:ln w="12700">
-            <a:solidFill>
-              <a:srgbClr val="D8E0E5"/>
-            </a:solidFill>
-            <a:prstDash val="solid"/>
-          </a:ln>
+          <a:ln/>
         </p:spPr>
         <p:txBody>
           <a:bodyPr/>
@@ -6055,14 +7860,20 @@
       </p:sp>
       <p:sp>
         <p:nvSpPr>
-          <p:cNvPr id="20" name="Text 16"/>
-          <p:cNvSpPr/>
-          <p:nvPr/>
-        </p:nvSpPr>
-        <p:spPr>
-          <a:xfrm>
-            <a:off x="1554480" y="5102352"/>
-            <a:ext cx="4114800" cy="320040"/>
+          <p:cNvPr id="25" name="Text 18">
+            <a:extLst>
+              <a:ext uri="{FF2B5EF4-FFF2-40B4-BE49-F238E27FC236}">
+                <a16:creationId xmlns:a16="http://schemas.microsoft.com/office/drawing/2014/main" id="{E156AEAF-3C78-4096-DB98-72E5DB09C140}"/>
+              </a:ext>
+            </a:extLst>
+          </p:cNvPr>
+          <p:cNvSpPr/>
+          <p:nvPr/>
+        </p:nvSpPr>
+        <p:spPr>
+          <a:xfrm>
+            <a:off x="9070848" y="73152"/>
+            <a:ext cx="2834640" cy="365760"/>
           </a:xfrm>
           <a:prstGeom prst="rect">
             <a:avLst/>
@@ -6074,34 +7885,85 @@
           <a:bodyPr wrap="square" rtlCol="0" anchor="ctr"/>
           <a:lstStyle/>
           <a:p>
-            <a:pPr marL="0" indent="0">
-              <a:buNone/>
-            </a:pPr>
-            <a:r>
-              <a:rPr lang="en-US" sz="1300" b="1" dirty="0">
-                <a:solidFill>
-                  <a:srgbClr val="0F3057"/>
+            <a:pPr marL="0" indent="0" algn="ctr">
+              <a:buNone/>
+            </a:pPr>
+            <a:r>
+              <a:rPr lang="en-US" sz="1600" b="1" dirty="0">
+                <a:solidFill>
+                  <a:srgbClr val="FFFFFF"/>
+                </a:solidFill>
+                <a:latin typeface="Cambria" pitchFamily="34" charset="0"/>
+                <a:ea typeface="Cambria" pitchFamily="34" charset="-122"/>
+                <a:cs typeface="Cambria" pitchFamily="34" charset="-120"/>
+              </a:rPr>
+              <a:t>6.258 → 6.250</a:t>
+            </a:r>
+            <a:endParaRPr lang="en-US" sz="1600" dirty="0"/>
+          </a:p>
+        </p:txBody>
+      </p:sp>
+      <p:sp>
+        <p:nvSpPr>
+          <p:cNvPr id="26" name="Text 19">
+            <a:extLst>
+              <a:ext uri="{FF2B5EF4-FFF2-40B4-BE49-F238E27FC236}">
+                <a16:creationId xmlns:a16="http://schemas.microsoft.com/office/drawing/2014/main" id="{50CF7A94-2238-BB6D-3B15-99DFEC16AF79}"/>
+              </a:ext>
+            </a:extLst>
+          </p:cNvPr>
+          <p:cNvSpPr/>
+          <p:nvPr/>
+        </p:nvSpPr>
+        <p:spPr>
+          <a:xfrm>
+            <a:off x="9171432" y="402336"/>
+            <a:ext cx="2834640" cy="274320"/>
+          </a:xfrm>
+          <a:prstGeom prst="rect">
+            <a:avLst/>
+          </a:prstGeom>
+          <a:noFill/>
+          <a:ln/>
+        </p:spPr>
+        <p:txBody>
+          <a:bodyPr wrap="square" rtlCol="0" anchor="ctr"/>
+          <a:lstStyle/>
+          <a:p>
+            <a:pPr marL="0" indent="0" algn="ctr">
+              <a:buNone/>
+            </a:pPr>
+            <a:r>
+              <a:rPr lang="en-US" sz="1050" dirty="0">
+                <a:solidFill>
+                  <a:srgbClr val="CADCE8"/>
                 </a:solidFill>
                 <a:latin typeface="Calibri" pitchFamily="34" charset="0"/>
                 <a:ea typeface="Calibri" pitchFamily="34" charset="-122"/>
                 <a:cs typeface="Calibri" pitchFamily="34" charset="-120"/>
               </a:rPr>
-              <a:t>Conteggio_per_Città</a:t>
-            </a:r>
-            <a:endParaRPr lang="en-US" sz="1300" dirty="0"/>
-          </a:p>
-        </p:txBody>
-      </p:sp>
-      <p:sp>
-        <p:nvSpPr>
-          <p:cNvPr id="21" name="Text 17"/>
-          <p:cNvSpPr/>
-          <p:nvPr/>
-        </p:nvSpPr>
-        <p:spPr>
-          <a:xfrm>
-            <a:off x="1554480" y="5413248"/>
-            <a:ext cx="4114800" cy="292608"/>
+              <a:t>righe pulite</a:t>
+            </a:r>
+            <a:endParaRPr lang="en-US" sz="1050" dirty="0"/>
+          </a:p>
+        </p:txBody>
+      </p:sp>
+      <p:sp>
+        <p:nvSpPr>
+          <p:cNvPr id="27" name="Text 20">
+            <a:extLst>
+              <a:ext uri="{FF2B5EF4-FFF2-40B4-BE49-F238E27FC236}">
+                <a16:creationId xmlns:a16="http://schemas.microsoft.com/office/drawing/2014/main" id="{01C4D819-F75A-BB18-61D9-E6F7C31234B4}"/>
+              </a:ext>
+            </a:extLst>
+          </p:cNvPr>
+          <p:cNvSpPr/>
+          <p:nvPr/>
+        </p:nvSpPr>
+        <p:spPr>
+          <a:xfrm>
+            <a:off x="457200" y="6473952"/>
+            <a:ext cx="5486400" cy="274320"/>
           </a:xfrm>
           <a:prstGeom prst="rect">
             <a:avLst/>
@@ -6113,11 +7975,11 @@
           <a:bodyPr wrap="square" rtlCol="0" anchor="ctr"/>
           <a:lstStyle/>
           <a:p>
-            <a:pPr marL="0" indent="0">
-              <a:buNone/>
-            </a:pPr>
-            <a:r>
-              <a:rPr lang="en-US" sz="1100" dirty="0">
+            <a:pPr marL="0" indent="0" algn="l">
+              <a:buNone/>
+            </a:pPr>
+            <a:r>
+              <a:rPr lang="en-US" sz="900" dirty="0">
                 <a:solidFill>
                   <a:srgbClr val="5B6B75"/>
                 </a:solidFill>
@@ -6125,56 +7987,28 @@
                 <a:ea typeface="Calibri" pitchFamily="34" charset="-122"/>
                 <a:cs typeface="Calibri" pitchFamily="34" charset="-120"/>
               </a:rPr>
-              <a:t>234 righe · somma = 6.250</a:t>
-            </a:r>
-            <a:endParaRPr lang="en-US" sz="1100" dirty="0"/>
-          </a:p>
-        </p:txBody>
-      </p:sp>
-      <p:sp>
-        <p:nvSpPr>
-          <p:cNvPr id="22" name="Shape 18"/>
-          <p:cNvSpPr/>
-          <p:nvPr/>
-        </p:nvSpPr>
-        <p:spPr>
-          <a:xfrm>
-            <a:off x="6126480" y="5029200"/>
-            <a:ext cx="4480560" cy="777240"/>
-          </a:xfrm>
-          <a:prstGeom prst="roundRect">
-            <a:avLst>
-              <a:gd name="adj" fmla="val 7059"/>
-            </a:avLst>
-          </a:prstGeom>
-          <a:solidFill>
-            <a:srgbClr val="FFFFFF"/>
-          </a:solidFill>
-          <a:ln w="12700">
-            <a:solidFill>
-              <a:srgbClr val="D8E0E5"/>
-            </a:solidFill>
-            <a:prstDash val="solid"/>
-          </a:ln>
-        </p:spPr>
-        <p:txBody>
-          <a:bodyPr/>
-          <a:lstStyle/>
-          <a:p>
-            <a:endParaRPr lang="it-IT"/>
-          </a:p>
-        </p:txBody>
-      </p:sp>
-      <p:sp>
-        <p:nvSpPr>
-          <p:cNvPr id="23" name="Text 19"/>
-          <p:cNvSpPr/>
-          <p:nvPr/>
-        </p:nvSpPr>
-        <p:spPr>
-          <a:xfrm>
-            <a:off x="6309360" y="5102352"/>
-            <a:ext cx="4114800" cy="320040"/>
+              <a:t>Regione Marche — Patrimonio Ricettivo</a:t>
+            </a:r>
+            <a:endParaRPr lang="en-US" sz="900" dirty="0"/>
+          </a:p>
+        </p:txBody>
+      </p:sp>
+      <p:sp>
+        <p:nvSpPr>
+          <p:cNvPr id="28" name="Text 21">
+            <a:extLst>
+              <a:ext uri="{FF2B5EF4-FFF2-40B4-BE49-F238E27FC236}">
+                <a16:creationId xmlns:a16="http://schemas.microsoft.com/office/drawing/2014/main" id="{0E8E8CFA-1DB1-7EDA-2CAC-A5CBF0B41202}"/>
+              </a:ext>
+            </a:extLst>
+          </p:cNvPr>
+          <p:cNvSpPr/>
+          <p:nvPr/>
+        </p:nvSpPr>
+        <p:spPr>
+          <a:xfrm>
+            <a:off x="11274552" y="6473952"/>
+            <a:ext cx="457200" cy="274320"/>
           </a:xfrm>
           <a:prstGeom prst="rect">
             <a:avLst/>
@@ -6186,34 +8020,259 @@
           <a:bodyPr wrap="square" rtlCol="0" anchor="ctr"/>
           <a:lstStyle/>
           <a:p>
-            <a:pPr marL="0" indent="0">
-              <a:buNone/>
-            </a:pPr>
-            <a:r>
-              <a:rPr lang="en-US" sz="1300" b="1" dirty="0">
-                <a:solidFill>
-                  <a:srgbClr val="0F3057"/>
+            <a:pPr marL="0" indent="0" algn="r">
+              <a:buNone/>
+            </a:pPr>
+            <a:r>
+              <a:rPr lang="en-US" sz="900" dirty="0">
+                <a:solidFill>
+                  <a:srgbClr val="5B6B75"/>
                 </a:solidFill>
                 <a:latin typeface="Calibri" pitchFamily="34" charset="0"/>
                 <a:ea typeface="Calibri" pitchFamily="34" charset="-122"/>
                 <a:cs typeface="Calibri" pitchFamily="34" charset="-120"/>
               </a:rPr>
-              <a:t>Conteggio_per_Categoria</a:t>
-            </a:r>
-            <a:endParaRPr lang="en-US" sz="1300" dirty="0"/>
-          </a:p>
-        </p:txBody>
-      </p:sp>
-      <p:sp>
-        <p:nvSpPr>
-          <p:cNvPr id="24" name="Text 20"/>
-          <p:cNvSpPr/>
-          <p:nvPr/>
-        </p:nvSpPr>
-        <p:spPr>
-          <a:xfrm>
-            <a:off x="6309360" y="5413248"/>
-            <a:ext cx="4114800" cy="292608"/>
+              <a:t>3</a:t>
+            </a:r>
+            <a:endParaRPr lang="en-US" sz="900" dirty="0"/>
+          </a:p>
+        </p:txBody>
+      </p:sp>
+      <p:sp>
+        <p:nvSpPr>
+          <p:cNvPr id="9" name="CasellaDiTesto 8">
+            <a:extLst>
+              <a:ext uri="{FF2B5EF4-FFF2-40B4-BE49-F238E27FC236}">
+                <a16:creationId xmlns:a16="http://schemas.microsoft.com/office/drawing/2014/main" id="{C944E48B-A9BB-8B88-8A93-2E2F5519D715}"/>
+              </a:ext>
+            </a:extLst>
+          </p:cNvPr>
+          <p:cNvSpPr txBox="1"/>
+          <p:nvPr/>
+        </p:nvSpPr>
+        <p:spPr>
+          <a:xfrm>
+            <a:off x="1322679" y="2063418"/>
+            <a:ext cx="10098481" cy="276999"/>
+          </a:xfrm>
+          <a:prstGeom prst="rect">
+            <a:avLst/>
+          </a:prstGeom>
+          <a:noFill/>
+        </p:spPr>
+        <p:txBody>
+          <a:bodyPr wrap="square">
+            <a:spAutoFit/>
+          </a:bodyPr>
+          <a:lstStyle/>
+          <a:p>
+            <a:r>
+              <a:rPr lang="it-IT" sz="1200" dirty="0"/>
+              <a:t>celle grigie: numero totale strutture (CONTA.VALORI) e numero di strutture nella città della struttura cercata (CONTA.SE dinamico)</a:t>
+            </a:r>
+          </a:p>
+        </p:txBody>
+      </p:sp>
+      <p:sp>
+        <p:nvSpPr>
+          <p:cNvPr id="11" name="Shape 14">
+            <a:extLst>
+              <a:ext uri="{FF2B5EF4-FFF2-40B4-BE49-F238E27FC236}">
+                <a16:creationId xmlns:a16="http://schemas.microsoft.com/office/drawing/2014/main" id="{8B520B7A-00A5-04D2-C5FA-B085A3F5BF30}"/>
+              </a:ext>
+            </a:extLst>
+          </p:cNvPr>
+          <p:cNvSpPr/>
+          <p:nvPr/>
+        </p:nvSpPr>
+        <p:spPr>
+          <a:xfrm>
+            <a:off x="640538" y="5033772"/>
+            <a:ext cx="502920" cy="502920"/>
+          </a:xfrm>
+          <a:prstGeom prst="ellipse">
+            <a:avLst/>
+          </a:prstGeom>
+          <a:solidFill>
+            <a:srgbClr val="1C7293"/>
+          </a:solidFill>
+          <a:ln/>
+        </p:spPr>
+        <p:txBody>
+          <a:bodyPr/>
+          <a:lstStyle/>
+          <a:p>
+            <a:endParaRPr lang="it-IT" dirty="0"/>
+          </a:p>
+        </p:txBody>
+      </p:sp>
+      <p:pic>
+        <p:nvPicPr>
+          <p:cNvPr id="17" name="Image 4" descr="/home/claude/deck/icon_filter.png">
+            <a:extLst>
+              <a:ext uri="{FF2B5EF4-FFF2-40B4-BE49-F238E27FC236}">
+                <a16:creationId xmlns:a16="http://schemas.microsoft.com/office/drawing/2014/main" id="{18B18154-4302-6BAA-5EA0-6EA1B179E2C2}"/>
+              </a:ext>
+            </a:extLst>
+          </p:cNvPr>
+          <p:cNvPicPr>
+            <a:picLocks noChangeAspect="1"/>
+          </p:cNvPicPr>
+          <p:nvPr/>
+        </p:nvPicPr>
+        <p:blipFill>
+          <a:blip r:embed="rId3"/>
+          <a:stretch>
+            <a:fillRect/>
+          </a:stretch>
+        </p:blipFill>
+        <p:spPr>
+          <a:xfrm>
+            <a:off x="813129" y="5179162"/>
+            <a:ext cx="220219" cy="220219"/>
+          </a:xfrm>
+          <a:prstGeom prst="rect">
+            <a:avLst/>
+          </a:prstGeom>
+        </p:spPr>
+      </p:pic>
+      <p:sp>
+        <p:nvSpPr>
+          <p:cNvPr id="29" name="Text 13">
+            <a:extLst>
+              <a:ext uri="{FF2B5EF4-FFF2-40B4-BE49-F238E27FC236}">
+                <a16:creationId xmlns:a16="http://schemas.microsoft.com/office/drawing/2014/main" id="{AF77833F-7EE6-DB29-5E57-154EE754F8E1}"/>
+              </a:ext>
+            </a:extLst>
+          </p:cNvPr>
+          <p:cNvSpPr/>
+          <p:nvPr/>
+        </p:nvSpPr>
+        <p:spPr>
+          <a:xfrm>
+            <a:off x="1307592" y="5357937"/>
+            <a:ext cx="9966960" cy="502920"/>
+          </a:xfrm>
+          <a:prstGeom prst="rect">
+            <a:avLst/>
+          </a:prstGeom>
+          <a:noFill/>
+          <a:ln/>
+        </p:spPr>
+        <p:txBody>
+          <a:bodyPr wrap="square" rtlCol="0" anchor="t"/>
+          <a:lstStyle/>
+          <a:p>
+            <a:pPr marL="0" indent="0">
+              <a:buNone/>
+            </a:pPr>
+            <a:r>
+              <a:rPr lang="en-US" sz="1200" dirty="0" err="1"/>
+              <a:t>Calcolo</a:t>
+            </a:r>
+            <a:r>
+              <a:rPr lang="en-US" sz="1200" dirty="0"/>
+              <a:t> la </a:t>
+            </a:r>
+            <a:r>
+              <a:rPr lang="en-US" sz="1200" dirty="0" err="1"/>
+              <a:t>probabilita</a:t>
+            </a:r>
+            <a:r>
+              <a:rPr lang="en-US" sz="1200" dirty="0"/>
+              <a:t> </a:t>
+            </a:r>
+            <a:r>
+              <a:rPr lang="en-US" sz="1200" dirty="0" err="1"/>
+              <a:t>che</a:t>
+            </a:r>
+            <a:r>
+              <a:rPr lang="en-US" sz="1200" dirty="0"/>
+              <a:t> esca Albergo o B&amp;B </a:t>
+            </a:r>
+            <a:r>
+              <a:rPr lang="en-US" sz="1200" dirty="0" err="1"/>
+              <a:t>scegliendo</a:t>
+            </a:r>
+            <a:r>
+              <a:rPr lang="en-US" sz="1200" dirty="0"/>
+              <a:t> </a:t>
+            </a:r>
+            <a:r>
+              <a:rPr lang="en-US" sz="1200" dirty="0" err="1"/>
+              <a:t>una</a:t>
+            </a:r>
+            <a:r>
+              <a:rPr lang="en-US" sz="1200" dirty="0"/>
+              <a:t> </a:t>
+            </a:r>
+            <a:r>
+              <a:rPr lang="en-US" sz="1200" dirty="0" err="1"/>
+              <a:t>struttura</a:t>
+            </a:r>
+            <a:r>
+              <a:rPr lang="en-US" sz="1200" dirty="0"/>
+              <a:t> a </a:t>
+            </a:r>
+            <a:r>
+              <a:rPr lang="en-US" sz="1200" dirty="0" err="1"/>
+              <a:t>caso</a:t>
+            </a:r>
+            <a:r>
+              <a:rPr lang="en-US" sz="1200" dirty="0"/>
+              <a:t>, </a:t>
+            </a:r>
+            <a:r>
+              <a:rPr lang="en-US" sz="1200" dirty="0" err="1"/>
+              <a:t>estraendo</a:t>
+            </a:r>
+            <a:r>
+              <a:rPr lang="en-US" sz="1200" dirty="0"/>
+              <a:t> due </a:t>
+            </a:r>
+            <a:r>
+              <a:rPr lang="en-US" sz="1200" dirty="0" err="1"/>
+              <a:t>indipendenti</a:t>
+            </a:r>
+            <a:r>
+              <a:rPr lang="en-US" sz="1200" dirty="0"/>
+              <a:t>, la </a:t>
+            </a:r>
+            <a:r>
+              <a:rPr lang="en-US" sz="1200" dirty="0" err="1"/>
+              <a:t>probabilita</a:t>
+            </a:r>
+            <a:r>
+              <a:rPr lang="en-US" sz="1200" dirty="0"/>
+              <a:t> </a:t>
+            </a:r>
+            <a:r>
+              <a:rPr lang="en-US" sz="1200" dirty="0" err="1"/>
+              <a:t>che</a:t>
+            </a:r>
+            <a:r>
+              <a:rPr lang="en-US" sz="1200" dirty="0"/>
+              <a:t> esca albergo è del 2%.</a:t>
+            </a:r>
+          </a:p>
+        </p:txBody>
+      </p:sp>
+      <p:sp>
+        <p:nvSpPr>
+          <p:cNvPr id="31" name="Text 15">
+            <a:extLst>
+              <a:ext uri="{FF2B5EF4-FFF2-40B4-BE49-F238E27FC236}">
+                <a16:creationId xmlns:a16="http://schemas.microsoft.com/office/drawing/2014/main" id="{D7BD9676-DA5F-8531-2304-A3D617E27FEA}"/>
+              </a:ext>
+            </a:extLst>
+          </p:cNvPr>
+          <p:cNvSpPr/>
+          <p:nvPr/>
+        </p:nvSpPr>
+        <p:spPr>
+          <a:xfrm>
+            <a:off x="1371600" y="4806227"/>
+            <a:ext cx="9741560" cy="546811"/>
           </a:xfrm>
           <a:prstGeom prst="rect">
             <a:avLst/>
@@ -6229,99 +8288,26 @@
               <a:buNone/>
             </a:pPr>
             <a:r>
-              <a:rPr lang="en-US" sz="1100" dirty="0">
-                <a:solidFill>
-                  <a:srgbClr val="5B6B75"/>
-                </a:solidFill>
-                <a:latin typeface="Calibri" pitchFamily="34" charset="0"/>
-                <a:ea typeface="Calibri" pitchFamily="34" charset="-122"/>
-                <a:cs typeface="Calibri" pitchFamily="34" charset="-120"/>
-              </a:rPr>
-              <a:t>15 righe · somma = 6.250</a:t>
-            </a:r>
-            <a:endParaRPr lang="en-US" sz="1100" dirty="0"/>
-          </a:p>
-        </p:txBody>
-      </p:sp>
-      <p:sp>
-        <p:nvSpPr>
-          <p:cNvPr id="25" name="Text 21"/>
-          <p:cNvSpPr/>
-          <p:nvPr/>
-        </p:nvSpPr>
-        <p:spPr>
-          <a:xfrm>
-            <a:off x="457200" y="6473952"/>
-            <a:ext cx="5486400" cy="274320"/>
-          </a:xfrm>
-          <a:prstGeom prst="rect">
-            <a:avLst/>
-          </a:prstGeom>
-          <a:noFill/>
-          <a:ln/>
-        </p:spPr>
-        <p:txBody>
-          <a:bodyPr wrap="square" rtlCol="0" anchor="ctr"/>
-          <a:lstStyle/>
-          <a:p>
-            <a:pPr marL="0" indent="0" algn="l">
-              <a:buNone/>
-            </a:pPr>
-            <a:r>
-              <a:rPr lang="en-US" sz="900" dirty="0">
-                <a:solidFill>
-                  <a:srgbClr val="5B6B75"/>
-                </a:solidFill>
-                <a:latin typeface="Calibri" pitchFamily="34" charset="0"/>
-                <a:ea typeface="Calibri" pitchFamily="34" charset="-122"/>
-                <a:cs typeface="Calibri" pitchFamily="34" charset="-120"/>
-              </a:rPr>
-              <a:t>Regione Marche — Patrimonio Ricettivo</a:t>
-            </a:r>
-            <a:endParaRPr lang="en-US" sz="900" dirty="0"/>
-          </a:p>
-        </p:txBody>
-      </p:sp>
-      <p:sp>
-        <p:nvSpPr>
-          <p:cNvPr id="26" name="Text 22"/>
-          <p:cNvSpPr/>
-          <p:nvPr/>
-        </p:nvSpPr>
-        <p:spPr>
-          <a:xfrm>
-            <a:off x="11274552" y="6473952"/>
-            <a:ext cx="457200" cy="274320"/>
-          </a:xfrm>
-          <a:prstGeom prst="rect">
-            <a:avLst/>
-          </a:prstGeom>
-          <a:noFill/>
-          <a:ln/>
-        </p:spPr>
-        <p:txBody>
-          <a:bodyPr wrap="square" rtlCol="0" anchor="ctr"/>
-          <a:lstStyle/>
-          <a:p>
-            <a:pPr marL="0" indent="0" algn="r">
-              <a:buNone/>
-            </a:pPr>
-            <a:r>
-              <a:rPr lang="en-US" sz="900" dirty="0">
-                <a:solidFill>
-                  <a:srgbClr val="5B6B75"/>
-                </a:solidFill>
-                <a:latin typeface="Calibri" pitchFamily="34" charset="0"/>
-                <a:ea typeface="Calibri" pitchFamily="34" charset="-122"/>
-                <a:cs typeface="Calibri" pitchFamily="34" charset="-120"/>
-              </a:rPr>
-              <a:t>4</a:t>
-            </a:r>
-            <a:endParaRPr lang="en-US" sz="900" dirty="0"/>
+              <a:rPr lang="en-US" sz="1500" b="1" dirty="0">
+                <a:solidFill>
+                  <a:srgbClr val="1A2733"/>
+                </a:solidFill>
+                <a:latin typeface="Cambria" pitchFamily="34" charset="0"/>
+                <a:ea typeface="Cambria" pitchFamily="34" charset="-122"/>
+                <a:cs typeface="Cambria" pitchFamily="34" charset="-120"/>
+              </a:rPr>
+              <a:t>Es. 10</a:t>
+            </a:r>
+            <a:endParaRPr lang="en-US" sz="1500" dirty="0"/>
           </a:p>
         </p:txBody>
       </p:sp>
     </p:spTree>
+    <p:extLst>
+      <p:ext uri="{BB962C8B-B14F-4D97-AF65-F5344CB8AC3E}">
+        <p14:creationId xmlns:p14="http://schemas.microsoft.com/office/powerpoint/2010/main" val="3569127481"/>
+      </p:ext>
+    </p:extLst>
   </p:cSld>
   <p:clrMapOvr>
     <a:masterClrMapping/>
@@ -6331,7 +8317,7 @@
 
 <file path=ppt/slides/slide5.xml><?xml version="1.0" encoding="utf-8"?>
 <p:sld xmlns:a="http://schemas.openxmlformats.org/drawingml/2006/main" xmlns:r="http://schemas.openxmlformats.org/officeDocument/2006/relationships" xmlns:p="http://schemas.openxmlformats.org/presentationml/2006/main">
-  <p:cSld name="Slide 5">
+  <p:cSld>
     <p:bg>
       <p:bgPr>
         <a:solidFill>
@@ -6342,7 +8328,13 @@
     </p:bg>
     <p:spTree>
       <p:nvGrpSpPr>
-        <p:cNvPr id="1" name=""/>
+        <p:cNvPr id="1" name="">
+          <a:extLst>
+            <a:ext uri="{FF2B5EF4-FFF2-40B4-BE49-F238E27FC236}">
+              <a16:creationId xmlns:a16="http://schemas.microsoft.com/office/drawing/2014/main" id="{22E3B73A-D253-1A15-084A-A30A397D7405}"/>
+            </a:ext>
+          </a:extLst>
+        </p:cNvPr>
         <p:cNvGrpSpPr/>
         <p:nvPr/>
       </p:nvGrpSpPr>
@@ -6356,14 +8348,20 @@
       </p:grpSpPr>
       <p:sp>
         <p:nvSpPr>
-          <p:cNvPr id="2" name="Text 0"/>
+          <p:cNvPr id="2" name="Text 0">
+            <a:extLst>
+              <a:ext uri="{FF2B5EF4-FFF2-40B4-BE49-F238E27FC236}">
+                <a16:creationId xmlns:a16="http://schemas.microsoft.com/office/drawing/2014/main" id="{CFE9D344-0D84-520F-AAD9-14770DDE68CF}"/>
+              </a:ext>
+            </a:extLst>
+          </p:cNvPr>
           <p:cNvSpPr/>
           <p:nvPr/>
         </p:nvSpPr>
         <p:spPr>
           <a:xfrm>
             <a:off x="640080" y="457200"/>
-            <a:ext cx="10058400" cy="548640"/>
+            <a:ext cx="9144000" cy="548640"/>
           </a:xfrm>
           <a:prstGeom prst="rect">
             <a:avLst/>
@@ -6379,15 +8377,54 @@
               <a:buNone/>
             </a:pPr>
             <a:r>
-              <a:rPr lang="en-US" sz="3000" b="1" dirty="0">
+              <a:rPr lang="en-US" sz="3000" b="1" dirty="0" err="1">
                 <a:solidFill>
                   <a:srgbClr val="1A2733"/>
                 </a:solidFill>
                 <a:latin typeface="Cambria" pitchFamily="34" charset="0"/>
                 <a:ea typeface="Cambria" pitchFamily="34" charset="-122"/>
-                <a:cs typeface="Cambria" pitchFamily="34" charset="-120"/>
-              </a:rPr>
-              <a:t>Strumenti di ricerca e sintesi</a:t>
+              </a:rPr>
+              <a:t>Probabilita</a:t>
+            </a:r>
+            <a:r>
+              <a:rPr lang="en-US" sz="3000" b="1" dirty="0">
+                <a:solidFill>
+                  <a:srgbClr val="1A2733"/>
+                </a:solidFill>
+                <a:latin typeface="Cambria" pitchFamily="34" charset="0"/>
+                <a:ea typeface="Cambria" pitchFamily="34" charset="-122"/>
+              </a:rPr>
+              <a:t> e </a:t>
+            </a:r>
+            <a:r>
+              <a:rPr lang="en-US" sz="3000" b="1" dirty="0" err="1">
+                <a:solidFill>
+                  <a:srgbClr val="1A2733"/>
+                </a:solidFill>
+                <a:latin typeface="Cambria" pitchFamily="34" charset="0"/>
+                <a:ea typeface="Cambria" pitchFamily="34" charset="-122"/>
+              </a:rPr>
+              <a:t>distribuzione</a:t>
+            </a:r>
+            <a:r>
+              <a:rPr lang="en-US" sz="3000" b="1" dirty="0">
+                <a:solidFill>
+                  <a:srgbClr val="1A2733"/>
+                </a:solidFill>
+                <a:latin typeface="Cambria" pitchFamily="34" charset="0"/>
+                <a:ea typeface="Cambria" pitchFamily="34" charset="-122"/>
+              </a:rPr>
+              <a:t> </a:t>
+            </a:r>
+            <a:r>
+              <a:rPr lang="en-US" sz="3000" b="1" dirty="0" err="1">
+                <a:solidFill>
+                  <a:srgbClr val="1A2733"/>
+                </a:solidFill>
+                <a:latin typeface="Cambria" pitchFamily="34" charset="0"/>
+                <a:ea typeface="Cambria" pitchFamily="34" charset="-122"/>
+              </a:rPr>
+              <a:t>normale</a:t>
             </a:r>
             <a:endParaRPr lang="en-US" sz="3000" dirty="0"/>
           </a:p>
@@ -6395,7 +8432,13 @@
       </p:sp>
       <p:sp>
         <p:nvSpPr>
-          <p:cNvPr id="3" name="Text 1"/>
+          <p:cNvPr id="3" name="Text 1">
+            <a:extLst>
+              <a:ext uri="{FF2B5EF4-FFF2-40B4-BE49-F238E27FC236}">
+                <a16:creationId xmlns:a16="http://schemas.microsoft.com/office/drawing/2014/main" id="{6F97B837-ACAB-C395-82A2-F1F93548B256}"/>
+              </a:ext>
+            </a:extLst>
+          </p:cNvPr>
           <p:cNvSpPr/>
           <p:nvPr/>
         </p:nvSpPr>
@@ -6414,11 +8457,8 @@
           <a:bodyPr wrap="square" rtlCol="0" anchor="ctr"/>
           <a:lstStyle/>
           <a:p>
-            <a:pPr marL="0" indent="0">
-              <a:buNone/>
-            </a:pPr>
-            <a:r>
-              <a:rPr lang="en-US" sz="1400" dirty="0">
+            <a:r>
+              <a:rPr lang="it-IT" sz="1400" dirty="0">
                 <a:solidFill>
                   <a:srgbClr val="5B6B75"/>
                 </a:solidFill>
@@ -6426,7 +8466,7 @@
                 <a:ea typeface="Calibri" pitchFamily="34" charset="-122"/>
                 <a:cs typeface="Calibri" pitchFamily="34" charset="-120"/>
               </a:rPr>
-              <a:t>Un foglio interattivo per interrogare i dati, senza toccare le tabelle sorgente</a:t>
+              <a:t>caricati entrambi i file in Power Query, individuate le colonne e i problemi di qualità nei dati grezzi (spazi, duplicati, righe di scarto, dati fuori posto)</a:t>
             </a:r>
             <a:endParaRPr lang="en-US" sz="1400" dirty="0"/>
           </a:p>
@@ -6434,20 +8474,26 @@
       </p:sp>
       <p:sp>
         <p:nvSpPr>
-          <p:cNvPr id="4" name="Shape 2"/>
-          <p:cNvSpPr/>
-          <p:nvPr/>
-        </p:nvSpPr>
-        <p:spPr>
-          <a:xfrm>
-            <a:off x="640080" y="1737360"/>
+          <p:cNvPr id="4" name="Shape 2">
+            <a:extLst>
+              <a:ext uri="{FF2B5EF4-FFF2-40B4-BE49-F238E27FC236}">
+                <a16:creationId xmlns:a16="http://schemas.microsoft.com/office/drawing/2014/main" id="{84D857B4-EA8E-C82A-300E-C81206EEF948}"/>
+              </a:ext>
+            </a:extLst>
+          </p:cNvPr>
+          <p:cNvSpPr/>
+          <p:nvPr/>
+        </p:nvSpPr>
+        <p:spPr>
+          <a:xfrm>
+            <a:off x="640080" y="1691640"/>
             <a:ext cx="502920" cy="502920"/>
           </a:xfrm>
           <a:prstGeom prst="ellipse">
             <a:avLst/>
           </a:prstGeom>
           <a:solidFill>
-            <a:srgbClr val="0F3057"/>
+            <a:srgbClr val="1C7293"/>
           </a:solidFill>
           <a:ln/>
         </p:spPr>
@@ -6461,7 +8507,13 @@
       </p:sp>
       <p:pic>
         <p:nvPicPr>
-          <p:cNvPr id="5" name="Image 0" descr="/home/claude/deck/icon_search.png"/>
+          <p:cNvPr id="5" name="Image 0" descr="/home/claude/deck/icon_filter.png">
+            <a:extLst>
+              <a:ext uri="{FF2B5EF4-FFF2-40B4-BE49-F238E27FC236}">
+                <a16:creationId xmlns:a16="http://schemas.microsoft.com/office/drawing/2014/main" id="{D046D4DE-2573-18B5-CAFE-7FD3C4205E3E}"/>
+              </a:ext>
+            </a:extLst>
+          </p:cNvPr>
           <p:cNvPicPr>
             <a:picLocks noChangeAspect="1"/>
           </p:cNvPicPr>
@@ -6475,7 +8527,7 @@
         </p:blipFill>
         <p:spPr>
           <a:xfrm>
-            <a:off x="770839" y="1868119"/>
+            <a:off x="770839" y="1822399"/>
             <a:ext cx="241402" cy="241402"/>
           </a:xfrm>
           <a:prstGeom prst="rect">
@@ -6485,14 +8537,20 @@
       </p:pic>
       <p:sp>
         <p:nvSpPr>
-          <p:cNvPr id="6" name="Text 3"/>
-          <p:cNvSpPr/>
-          <p:nvPr/>
-        </p:nvSpPr>
-        <p:spPr>
-          <a:xfrm>
-            <a:off x="1371600" y="1737360"/>
-            <a:ext cx="4572000" cy="365760"/>
+          <p:cNvPr id="6" name="Text 3">
+            <a:extLst>
+              <a:ext uri="{FF2B5EF4-FFF2-40B4-BE49-F238E27FC236}">
+                <a16:creationId xmlns:a16="http://schemas.microsoft.com/office/drawing/2014/main" id="{6968275B-3D00-068C-F540-B1EF38533543}"/>
+              </a:ext>
+            </a:extLst>
+          </p:cNvPr>
+          <p:cNvSpPr/>
+          <p:nvPr/>
+        </p:nvSpPr>
+        <p:spPr>
+          <a:xfrm>
+            <a:off x="1371600" y="1664208"/>
+            <a:ext cx="9692640" cy="329184"/>
           </a:xfrm>
           <a:prstGeom prst="rect">
             <a:avLst/>
@@ -6508,7 +8566,7 @@
               <a:buNone/>
             </a:pPr>
             <a:r>
-              <a:rPr lang="en-US" sz="1600" b="1" dirty="0">
+              <a:rPr lang="en-US" sz="1500" b="1" dirty="0">
                 <a:solidFill>
                   <a:srgbClr val="1A2733"/>
                 </a:solidFill>
@@ -6516,7 +8574,455 @@
                 <a:ea typeface="Cambria" pitchFamily="34" charset="-122"/>
                 <a:cs typeface="Cambria" pitchFamily="34" charset="-120"/>
               </a:rPr>
-              <a:t>Foglio RICERCA</a:t>
+              <a:t>Es.11 </a:t>
+            </a:r>
+            <a:endParaRPr lang="en-US" sz="1500" dirty="0"/>
+          </a:p>
+        </p:txBody>
+      </p:sp>
+      <p:sp>
+        <p:nvSpPr>
+          <p:cNvPr id="7" name="Text 4">
+            <a:extLst>
+              <a:ext uri="{FF2B5EF4-FFF2-40B4-BE49-F238E27FC236}">
+                <a16:creationId xmlns:a16="http://schemas.microsoft.com/office/drawing/2014/main" id="{4C327FCF-B7BF-07FB-F8D2-FFF415FE5B9F}"/>
+              </a:ext>
+            </a:extLst>
+          </p:cNvPr>
+          <p:cNvSpPr/>
+          <p:nvPr/>
+        </p:nvSpPr>
+        <p:spPr>
+          <a:xfrm>
+            <a:off x="1371600" y="1993392"/>
+            <a:ext cx="9966960" cy="960120"/>
+          </a:xfrm>
+          <a:prstGeom prst="rect">
+            <a:avLst/>
+          </a:prstGeom>
+          <a:noFill/>
+          <a:ln/>
+        </p:spPr>
+        <p:txBody>
+          <a:bodyPr wrap="square" rtlCol="0" anchor="t"/>
+          <a:lstStyle/>
+          <a:p>
+            <a:endParaRPr lang="en-US" sz="1200" dirty="0"/>
+          </a:p>
+        </p:txBody>
+      </p:sp>
+      <p:sp>
+        <p:nvSpPr>
+          <p:cNvPr id="12" name="Shape 8">
+            <a:extLst>
+              <a:ext uri="{FF2B5EF4-FFF2-40B4-BE49-F238E27FC236}">
+                <a16:creationId xmlns:a16="http://schemas.microsoft.com/office/drawing/2014/main" id="{E209EAEA-5D24-6CBF-4494-433F8A0658A5}"/>
+              </a:ext>
+            </a:extLst>
+          </p:cNvPr>
+          <p:cNvSpPr/>
+          <p:nvPr/>
+        </p:nvSpPr>
+        <p:spPr>
+          <a:xfrm>
+            <a:off x="620421" y="2841041"/>
+            <a:ext cx="502920" cy="502920"/>
+          </a:xfrm>
+          <a:prstGeom prst="ellipse">
+            <a:avLst/>
+          </a:prstGeom>
+          <a:solidFill>
+            <a:srgbClr val="1C7293"/>
+          </a:solidFill>
+          <a:ln/>
+        </p:spPr>
+        <p:txBody>
+          <a:bodyPr/>
+          <a:lstStyle/>
+          <a:p>
+            <a:endParaRPr lang="it-IT"/>
+          </a:p>
+        </p:txBody>
+      </p:sp>
+      <p:pic>
+        <p:nvPicPr>
+          <p:cNvPr id="13" name="Image 2" descr="/home/claude/deck/icon_filter.png">
+            <a:extLst>
+              <a:ext uri="{FF2B5EF4-FFF2-40B4-BE49-F238E27FC236}">
+                <a16:creationId xmlns:a16="http://schemas.microsoft.com/office/drawing/2014/main" id="{9B853EA6-E987-88B5-E0A7-96F55693004F}"/>
+              </a:ext>
+            </a:extLst>
+          </p:cNvPr>
+          <p:cNvPicPr>
+            <a:picLocks noChangeAspect="1"/>
+          </p:cNvPicPr>
+          <p:nvPr/>
+        </p:nvPicPr>
+        <p:blipFill>
+          <a:blip r:embed="rId3"/>
+          <a:stretch>
+            <a:fillRect/>
+          </a:stretch>
+        </p:blipFill>
+        <p:spPr>
+          <a:xfrm>
+            <a:off x="770839" y="2991002"/>
+            <a:ext cx="241402" cy="241402"/>
+          </a:xfrm>
+          <a:prstGeom prst="rect">
+            <a:avLst/>
+          </a:prstGeom>
+        </p:spPr>
+      </p:pic>
+      <p:sp>
+        <p:nvSpPr>
+          <p:cNvPr id="14" name="Text 9">
+            <a:extLst>
+              <a:ext uri="{FF2B5EF4-FFF2-40B4-BE49-F238E27FC236}">
+                <a16:creationId xmlns:a16="http://schemas.microsoft.com/office/drawing/2014/main" id="{16577381-FAF6-3404-12DF-7741DD40D915}"/>
+              </a:ext>
+            </a:extLst>
+          </p:cNvPr>
+          <p:cNvSpPr/>
+          <p:nvPr/>
+        </p:nvSpPr>
+        <p:spPr>
+          <a:xfrm>
+            <a:off x="1322679" y="2697480"/>
+            <a:ext cx="9692640" cy="329184"/>
+          </a:xfrm>
+          <a:prstGeom prst="rect">
+            <a:avLst/>
+          </a:prstGeom>
+          <a:noFill/>
+          <a:ln/>
+        </p:spPr>
+        <p:txBody>
+          <a:bodyPr wrap="square" rtlCol="0" anchor="ctr"/>
+          <a:lstStyle/>
+          <a:p>
+            <a:pPr marL="0" indent="0">
+              <a:buNone/>
+            </a:pPr>
+            <a:r>
+              <a:rPr lang="en-US" sz="1500" b="1" dirty="0">
+                <a:solidFill>
+                  <a:srgbClr val="1A2733"/>
+                </a:solidFill>
+                <a:latin typeface="Cambria" pitchFamily="34" charset="0"/>
+                <a:ea typeface="Cambria" pitchFamily="34" charset="-122"/>
+              </a:rPr>
+              <a:t>Es.12/13</a:t>
+            </a:r>
+            <a:endParaRPr lang="en-US" sz="1500" dirty="0"/>
+          </a:p>
+        </p:txBody>
+      </p:sp>
+      <p:sp>
+        <p:nvSpPr>
+          <p:cNvPr id="15" name="Text 10">
+            <a:extLst>
+              <a:ext uri="{FF2B5EF4-FFF2-40B4-BE49-F238E27FC236}">
+                <a16:creationId xmlns:a16="http://schemas.microsoft.com/office/drawing/2014/main" id="{B07A2C09-C044-0829-5102-2E0D758C9788}"/>
+              </a:ext>
+            </a:extLst>
+          </p:cNvPr>
+          <p:cNvSpPr/>
+          <p:nvPr/>
+        </p:nvSpPr>
+        <p:spPr>
+          <a:xfrm>
+            <a:off x="1371600" y="3785616"/>
+            <a:ext cx="9966960" cy="502920"/>
+          </a:xfrm>
+          <a:prstGeom prst="rect">
+            <a:avLst/>
+          </a:prstGeom>
+          <a:noFill/>
+          <a:ln/>
+        </p:spPr>
+        <p:txBody>
+          <a:bodyPr wrap="square" rtlCol="0" anchor="t"/>
+          <a:lstStyle/>
+          <a:p>
+            <a:pPr marL="0" indent="0">
+              <a:buNone/>
+            </a:pPr>
+            <a:endParaRPr lang="en-US" sz="1200" dirty="0"/>
+          </a:p>
+        </p:txBody>
+      </p:sp>
+      <p:sp>
+        <p:nvSpPr>
+          <p:cNvPr id="19" name="Text 13">
+            <a:extLst>
+              <a:ext uri="{FF2B5EF4-FFF2-40B4-BE49-F238E27FC236}">
+                <a16:creationId xmlns:a16="http://schemas.microsoft.com/office/drawing/2014/main" id="{95F40B20-BF24-52F2-D1F1-3733DA170B84}"/>
+              </a:ext>
+            </a:extLst>
+          </p:cNvPr>
+          <p:cNvSpPr/>
+          <p:nvPr/>
+        </p:nvSpPr>
+        <p:spPr>
+          <a:xfrm>
+            <a:off x="1322680" y="4233672"/>
+            <a:ext cx="9966960" cy="764885"/>
+          </a:xfrm>
+          <a:prstGeom prst="rect">
+            <a:avLst/>
+          </a:prstGeom>
+          <a:noFill/>
+          <a:ln/>
+        </p:spPr>
+        <p:txBody>
+          <a:bodyPr wrap="square" rtlCol="0" anchor="t"/>
+          <a:lstStyle/>
+          <a:p>
+            <a:r>
+              <a:rPr lang="it-IT" sz="1200" dirty="0"/>
+              <a:t>Confronto tra 90%/95%/99% (ampiezza crescente) e dimostrazione che quadruplicando n il margine si dimezza. Confronto prezzo medio città-con-alberghi vs città-con-agriturismi: differenza di soli 0,39€, non significativa (p-</a:t>
+            </a:r>
+            <a:r>
+              <a:rPr lang="it-IT" sz="1200" dirty="0" err="1"/>
+              <a:t>value</a:t>
+            </a:r>
+            <a:r>
+              <a:rPr lang="it-IT" sz="1200" dirty="0"/>
+              <a:t> ≈ 0,90) — nessuna relazione rilevante , per questo calcolo creo due tabelle nel foglio prezzi HA ALBERGHI e HA AGRITURISMO.</a:t>
+            </a:r>
+          </a:p>
+          <a:p>
+            <a:endParaRPr lang="en-US" sz="1200" dirty="0"/>
+          </a:p>
+        </p:txBody>
+      </p:sp>
+      <p:sp>
+        <p:nvSpPr>
+          <p:cNvPr id="20" name="Shape 14">
+            <a:extLst>
+              <a:ext uri="{FF2B5EF4-FFF2-40B4-BE49-F238E27FC236}">
+                <a16:creationId xmlns:a16="http://schemas.microsoft.com/office/drawing/2014/main" id="{9482485C-47FB-F6A7-3A00-D29D6668E1BB}"/>
+              </a:ext>
+            </a:extLst>
+          </p:cNvPr>
+          <p:cNvSpPr/>
+          <p:nvPr/>
+        </p:nvSpPr>
+        <p:spPr>
+          <a:xfrm>
+            <a:off x="640538" y="3985870"/>
+            <a:ext cx="502920" cy="502920"/>
+          </a:xfrm>
+          <a:prstGeom prst="ellipse">
+            <a:avLst/>
+          </a:prstGeom>
+          <a:solidFill>
+            <a:srgbClr val="1C7293"/>
+          </a:solidFill>
+          <a:ln/>
+        </p:spPr>
+        <p:txBody>
+          <a:bodyPr/>
+          <a:lstStyle/>
+          <a:p>
+            <a:endParaRPr lang="it-IT" dirty="0"/>
+          </a:p>
+        </p:txBody>
+      </p:sp>
+      <p:pic>
+        <p:nvPicPr>
+          <p:cNvPr id="21" name="Image 4" descr="/home/claude/deck/icon_filter.png">
+            <a:extLst>
+              <a:ext uri="{FF2B5EF4-FFF2-40B4-BE49-F238E27FC236}">
+                <a16:creationId xmlns:a16="http://schemas.microsoft.com/office/drawing/2014/main" id="{77BAFC88-1D10-865C-F00B-B693D5450499}"/>
+              </a:ext>
+            </a:extLst>
+          </p:cNvPr>
+          <p:cNvPicPr>
+            <a:picLocks noChangeAspect="1"/>
+          </p:cNvPicPr>
+          <p:nvPr/>
+        </p:nvPicPr>
+        <p:blipFill>
+          <a:blip r:embed="rId3"/>
+          <a:stretch>
+            <a:fillRect/>
+          </a:stretch>
+        </p:blipFill>
+        <p:spPr>
+          <a:xfrm>
+            <a:off x="770839" y="4112971"/>
+            <a:ext cx="241402" cy="241402"/>
+          </a:xfrm>
+          <a:prstGeom prst="rect">
+            <a:avLst/>
+          </a:prstGeom>
+        </p:spPr>
+      </p:pic>
+      <p:sp>
+        <p:nvSpPr>
+          <p:cNvPr id="22" name="Text 15">
+            <a:extLst>
+              <a:ext uri="{FF2B5EF4-FFF2-40B4-BE49-F238E27FC236}">
+                <a16:creationId xmlns:a16="http://schemas.microsoft.com/office/drawing/2014/main" id="{A497BB17-7246-BF3D-60BF-DC9C0DA889C0}"/>
+              </a:ext>
+            </a:extLst>
+          </p:cNvPr>
+          <p:cNvSpPr/>
+          <p:nvPr/>
+        </p:nvSpPr>
+        <p:spPr>
+          <a:xfrm>
+            <a:off x="1362456" y="3741724"/>
+            <a:ext cx="9741560" cy="546811"/>
+          </a:xfrm>
+          <a:prstGeom prst="rect">
+            <a:avLst/>
+          </a:prstGeom>
+          <a:noFill/>
+          <a:ln/>
+        </p:spPr>
+        <p:txBody>
+          <a:bodyPr wrap="square" rtlCol="0" anchor="ctr"/>
+          <a:lstStyle/>
+          <a:p>
+            <a:pPr marL="0" indent="0">
+              <a:buNone/>
+            </a:pPr>
+            <a:r>
+              <a:rPr lang="en-US" sz="1500" b="1" dirty="0">
+                <a:solidFill>
+                  <a:srgbClr val="1A2733"/>
+                </a:solidFill>
+                <a:latin typeface="Cambria" pitchFamily="34" charset="0"/>
+                <a:ea typeface="Cambria" pitchFamily="34" charset="-122"/>
+                <a:cs typeface="Cambria" pitchFamily="34" charset="-120"/>
+              </a:rPr>
+              <a:t>Es. 14 / 15 </a:t>
+            </a:r>
+            <a:endParaRPr lang="en-US" sz="1500" dirty="0"/>
+          </a:p>
+        </p:txBody>
+      </p:sp>
+      <p:sp>
+        <p:nvSpPr>
+          <p:cNvPr id="23" name="Text 16">
+            <a:extLst>
+              <a:ext uri="{FF2B5EF4-FFF2-40B4-BE49-F238E27FC236}">
+                <a16:creationId xmlns:a16="http://schemas.microsoft.com/office/drawing/2014/main" id="{249B7A28-1152-E1B8-CC12-5C83D9F04553}"/>
+              </a:ext>
+            </a:extLst>
+          </p:cNvPr>
+          <p:cNvSpPr/>
+          <p:nvPr/>
+        </p:nvSpPr>
+        <p:spPr>
+          <a:xfrm>
+            <a:off x="1322680" y="3063240"/>
+            <a:ext cx="9966960" cy="502920"/>
+          </a:xfrm>
+          <a:prstGeom prst="rect">
+            <a:avLst/>
+          </a:prstGeom>
+          <a:noFill/>
+          <a:ln/>
+        </p:spPr>
+        <p:txBody>
+          <a:bodyPr wrap="square" rtlCol="0" anchor="t"/>
+          <a:lstStyle/>
+          <a:p>
+            <a:r>
+              <a:rPr lang="it-IT" sz="1200" dirty="0"/>
+              <a:t>Calcolo z-score e DISTRIB.NORM.ST per una città a scelta ( Peglio) creo tendina di scelta città, con interpretazione della probabilità cumulativa. Calcolato l’</a:t>
+            </a:r>
+            <a:r>
+              <a:rPr lang="it-IT" sz="1200" dirty="0" err="1"/>
+              <a:t>ntervallo</a:t>
+            </a:r>
+            <a:r>
+              <a:rPr lang="it-IT" sz="1200" dirty="0"/>
+              <a:t> di confidenza al 95% sulla media con CONFIDENZA.NORM: (69,97€ ; 77,03€ quindi il 95% degli intervalli così costruiti conterrebbe il vero lavoro.</a:t>
+            </a:r>
+            <a:endParaRPr lang="en-US" sz="1200" dirty="0"/>
+          </a:p>
+        </p:txBody>
+      </p:sp>
+      <p:sp>
+        <p:nvSpPr>
+          <p:cNvPr id="24" name="Shape 17">
+            <a:extLst>
+              <a:ext uri="{FF2B5EF4-FFF2-40B4-BE49-F238E27FC236}">
+                <a16:creationId xmlns:a16="http://schemas.microsoft.com/office/drawing/2014/main" id="{E5B8E865-5B77-3DB0-1648-486C0C76E592}"/>
+              </a:ext>
+            </a:extLst>
+          </p:cNvPr>
+          <p:cNvSpPr/>
+          <p:nvPr/>
+        </p:nvSpPr>
+        <p:spPr>
+          <a:xfrm>
+            <a:off x="9070848" y="91440"/>
+            <a:ext cx="2834640" cy="777240"/>
+          </a:xfrm>
+          <a:prstGeom prst="roundRect">
+            <a:avLst>
+              <a:gd name="adj" fmla="val 7059"/>
+            </a:avLst>
+          </a:prstGeom>
+          <a:solidFill>
+            <a:srgbClr val="0F3057"/>
+          </a:solidFill>
+          <a:ln/>
+        </p:spPr>
+        <p:txBody>
+          <a:bodyPr/>
+          <a:lstStyle/>
+          <a:p>
+            <a:endParaRPr lang="it-IT"/>
+          </a:p>
+        </p:txBody>
+      </p:sp>
+      <p:sp>
+        <p:nvSpPr>
+          <p:cNvPr id="25" name="Text 18">
+            <a:extLst>
+              <a:ext uri="{FF2B5EF4-FFF2-40B4-BE49-F238E27FC236}">
+                <a16:creationId xmlns:a16="http://schemas.microsoft.com/office/drawing/2014/main" id="{8AC888C4-5D80-10D6-A460-ACC543DBCEFD}"/>
+              </a:ext>
+            </a:extLst>
+          </p:cNvPr>
+          <p:cNvSpPr/>
+          <p:nvPr/>
+        </p:nvSpPr>
+        <p:spPr>
+          <a:xfrm>
+            <a:off x="9070848" y="73152"/>
+            <a:ext cx="2834640" cy="365760"/>
+          </a:xfrm>
+          <a:prstGeom prst="rect">
+            <a:avLst/>
+          </a:prstGeom>
+          <a:noFill/>
+          <a:ln/>
+        </p:spPr>
+        <p:txBody>
+          <a:bodyPr wrap="square" rtlCol="0" anchor="ctr"/>
+          <a:lstStyle/>
+          <a:p>
+            <a:pPr marL="0" indent="0" algn="ctr">
+              <a:buNone/>
+            </a:pPr>
+            <a:r>
+              <a:rPr lang="en-US" sz="1600" b="1" dirty="0">
+                <a:solidFill>
+                  <a:srgbClr val="FFFFFF"/>
+                </a:solidFill>
+                <a:latin typeface="Cambria" pitchFamily="34" charset="0"/>
+                <a:ea typeface="Cambria" pitchFamily="34" charset="-122"/>
+                <a:cs typeface="Cambria" pitchFamily="34" charset="-120"/>
+              </a:rPr>
+              <a:t>6.258 → 6.250</a:t>
             </a:r>
             <a:endParaRPr lang="en-US" sz="1600" dirty="0"/>
           </a:p>
@@ -6524,197 +9030,267 @@
       </p:sp>
       <p:sp>
         <p:nvSpPr>
-          <p:cNvPr id="7" name="Shape 4"/>
-          <p:cNvSpPr/>
-          <p:nvPr/>
-        </p:nvSpPr>
-        <p:spPr>
-          <a:xfrm>
-            <a:off x="1371600" y="2313432"/>
-            <a:ext cx="82296" cy="82296"/>
-          </a:xfrm>
-          <a:prstGeom prst="ellipse">
-            <a:avLst/>
-          </a:prstGeom>
-          <a:solidFill>
-            <a:srgbClr val="E8871E"/>
-          </a:solidFill>
-          <a:ln/>
-        </p:spPr>
-        <p:txBody>
-          <a:bodyPr/>
-          <a:lstStyle/>
-          <a:p>
-            <a:endParaRPr lang="it-IT"/>
-          </a:p>
-        </p:txBody>
-      </p:sp>
-      <p:sp>
-        <p:nvSpPr>
-          <p:cNvPr id="8" name="Text 5"/>
-          <p:cNvSpPr/>
-          <p:nvPr/>
-        </p:nvSpPr>
-        <p:spPr>
-          <a:xfrm>
-            <a:off x="1581912" y="2185416"/>
-            <a:ext cx="4480560" cy="457200"/>
-          </a:xfrm>
-          <a:prstGeom prst="rect">
-            <a:avLst/>
-          </a:prstGeom>
-          <a:noFill/>
-          <a:ln/>
-        </p:spPr>
-        <p:txBody>
-          <a:bodyPr wrap="square" rtlCol="0" anchor="t"/>
-          <a:lstStyle/>
-          <a:p>
-            <a:pPr marL="0" indent="0">
-              <a:buNone/>
-            </a:pPr>
-            <a:r>
-              <a:rPr lang="en-US" sz="1200" dirty="0">
-                <a:solidFill>
-                  <a:srgbClr val="1A2733"/>
+          <p:cNvPr id="26" name="Text 19">
+            <a:extLst>
+              <a:ext uri="{FF2B5EF4-FFF2-40B4-BE49-F238E27FC236}">
+                <a16:creationId xmlns:a16="http://schemas.microsoft.com/office/drawing/2014/main" id="{9141CB2D-DEA5-C268-167C-620A62E051EC}"/>
+              </a:ext>
+            </a:extLst>
+          </p:cNvPr>
+          <p:cNvSpPr/>
+          <p:nvPr/>
+        </p:nvSpPr>
+        <p:spPr>
+          <a:xfrm>
+            <a:off x="9171432" y="402336"/>
+            <a:ext cx="2834640" cy="274320"/>
+          </a:xfrm>
+          <a:prstGeom prst="rect">
+            <a:avLst/>
+          </a:prstGeom>
+          <a:noFill/>
+          <a:ln/>
+        </p:spPr>
+        <p:txBody>
+          <a:bodyPr wrap="square" rtlCol="0" anchor="ctr"/>
+          <a:lstStyle/>
+          <a:p>
+            <a:pPr marL="0" indent="0" algn="ctr">
+              <a:buNone/>
+            </a:pPr>
+            <a:r>
+              <a:rPr lang="en-US" sz="1050" dirty="0">
+                <a:solidFill>
+                  <a:srgbClr val="CADCE8"/>
                 </a:solidFill>
                 <a:latin typeface="Calibri" pitchFamily="34" charset="0"/>
                 <a:ea typeface="Calibri" pitchFamily="34" charset="-122"/>
                 <a:cs typeface="Calibri" pitchFamily="34" charset="-120"/>
               </a:rPr>
-              <a:t>Menu a tendina sul nome struttura (Convalida dati → Elenco)</a:t>
-            </a:r>
-            <a:endParaRPr lang="en-US" sz="1200" dirty="0"/>
-          </a:p>
-        </p:txBody>
-      </p:sp>
-      <p:sp>
-        <p:nvSpPr>
-          <p:cNvPr id="9" name="Shape 6"/>
-          <p:cNvSpPr/>
-          <p:nvPr/>
-        </p:nvSpPr>
-        <p:spPr>
-          <a:xfrm>
-            <a:off x="1371600" y="2880360"/>
-            <a:ext cx="82296" cy="82296"/>
-          </a:xfrm>
-          <a:prstGeom prst="ellipse">
-            <a:avLst/>
-          </a:prstGeom>
-          <a:solidFill>
-            <a:srgbClr val="E8871E"/>
-          </a:solidFill>
-          <a:ln/>
-        </p:spPr>
-        <p:txBody>
-          <a:bodyPr/>
-          <a:lstStyle/>
-          <a:p>
-            <a:endParaRPr lang="it-IT"/>
-          </a:p>
-        </p:txBody>
-      </p:sp>
-      <p:sp>
-        <p:nvSpPr>
-          <p:cNvPr id="10" name="Text 7"/>
-          <p:cNvSpPr/>
-          <p:nvPr/>
-        </p:nvSpPr>
-        <p:spPr>
-          <a:xfrm>
-            <a:off x="1581912" y="2752344"/>
-            <a:ext cx="4480560" cy="457200"/>
-          </a:xfrm>
-          <a:prstGeom prst="rect">
-            <a:avLst/>
-          </a:prstGeom>
-          <a:noFill/>
-          <a:ln/>
-        </p:spPr>
-        <p:txBody>
-          <a:bodyPr wrap="square" rtlCol="0" anchor="t"/>
-          <a:lstStyle/>
-          <a:p>
-            <a:pPr marL="0" indent="0">
-              <a:buNone/>
-            </a:pPr>
-            <a:r>
-              <a:rPr lang="en-US" sz="1200" dirty="0">
-                <a:solidFill>
-                  <a:srgbClr val="1A2733"/>
+              <a:t>righe pulite</a:t>
+            </a:r>
+            <a:endParaRPr lang="en-US" sz="1050" dirty="0"/>
+          </a:p>
+        </p:txBody>
+      </p:sp>
+      <p:sp>
+        <p:nvSpPr>
+          <p:cNvPr id="27" name="Text 20">
+            <a:extLst>
+              <a:ext uri="{FF2B5EF4-FFF2-40B4-BE49-F238E27FC236}">
+                <a16:creationId xmlns:a16="http://schemas.microsoft.com/office/drawing/2014/main" id="{1960F274-BCAC-7CA9-7F54-493321975F8F}"/>
+              </a:ext>
+            </a:extLst>
+          </p:cNvPr>
+          <p:cNvSpPr/>
+          <p:nvPr/>
+        </p:nvSpPr>
+        <p:spPr>
+          <a:xfrm>
+            <a:off x="457200" y="6473952"/>
+            <a:ext cx="5486400" cy="274320"/>
+          </a:xfrm>
+          <a:prstGeom prst="rect">
+            <a:avLst/>
+          </a:prstGeom>
+          <a:noFill/>
+          <a:ln/>
+        </p:spPr>
+        <p:txBody>
+          <a:bodyPr wrap="square" rtlCol="0" anchor="ctr"/>
+          <a:lstStyle/>
+          <a:p>
+            <a:pPr marL="0" indent="0" algn="l">
+              <a:buNone/>
+            </a:pPr>
+            <a:r>
+              <a:rPr lang="en-US" sz="900" dirty="0">
+                <a:solidFill>
+                  <a:srgbClr val="5B6B75"/>
                 </a:solidFill>
                 <a:latin typeface="Calibri" pitchFamily="34" charset="0"/>
                 <a:ea typeface="Calibri" pitchFamily="34" charset="-122"/>
                 <a:cs typeface="Calibri" pitchFamily="34" charset="-120"/>
               </a:rPr>
-              <a:t>INDEX + CONFRONTA recuperano Città, Indirizzo, Email, Sito</a:t>
-            </a:r>
-            <a:endParaRPr lang="en-US" sz="1200" dirty="0"/>
-          </a:p>
-        </p:txBody>
-      </p:sp>
-      <p:sp>
-        <p:nvSpPr>
-          <p:cNvPr id="11" name="Shape 8"/>
-          <p:cNvSpPr/>
-          <p:nvPr/>
-        </p:nvSpPr>
-        <p:spPr>
-          <a:xfrm>
-            <a:off x="1371600" y="3447288"/>
-            <a:ext cx="82296" cy="82296"/>
-          </a:xfrm>
-          <a:prstGeom prst="ellipse">
-            <a:avLst/>
-          </a:prstGeom>
-          <a:solidFill>
-            <a:srgbClr val="E8871E"/>
-          </a:solidFill>
-          <a:ln/>
-        </p:spPr>
-        <p:txBody>
-          <a:bodyPr/>
-          <a:lstStyle/>
-          <a:p>
-            <a:endParaRPr lang="it-IT"/>
-          </a:p>
-        </p:txBody>
-      </p:sp>
-      <p:sp>
-        <p:nvSpPr>
-          <p:cNvPr id="12" name="Text 9"/>
-          <p:cNvSpPr/>
-          <p:nvPr/>
-        </p:nvSpPr>
-        <p:spPr>
-          <a:xfrm>
-            <a:off x="1581912" y="3319272"/>
-            <a:ext cx="4480560" cy="457200"/>
-          </a:xfrm>
-          <a:prstGeom prst="rect">
-            <a:avLst/>
-          </a:prstGeom>
-          <a:noFill/>
-          <a:ln/>
-        </p:spPr>
-        <p:txBody>
-          <a:bodyPr wrap="square" rtlCol="0" anchor="t"/>
-          <a:lstStyle/>
-          <a:p>
-            <a:pPr marL="0" indent="0">
-              <a:buNone/>
-            </a:pPr>
-            <a:r>
-              <a:rPr lang="en-US" sz="1200" dirty="0">
-                <a:solidFill>
-                  <a:srgbClr val="1A2733"/>
+              <a:t>Regione Marche — Patrimonio Ricettivo</a:t>
+            </a:r>
+            <a:endParaRPr lang="en-US" sz="900" dirty="0"/>
+          </a:p>
+        </p:txBody>
+      </p:sp>
+      <p:sp>
+        <p:nvSpPr>
+          <p:cNvPr id="28" name="Text 21">
+            <a:extLst>
+              <a:ext uri="{FF2B5EF4-FFF2-40B4-BE49-F238E27FC236}">
+                <a16:creationId xmlns:a16="http://schemas.microsoft.com/office/drawing/2014/main" id="{9B9B4EAB-230A-C06C-C20C-0319A4614360}"/>
+              </a:ext>
+            </a:extLst>
+          </p:cNvPr>
+          <p:cNvSpPr/>
+          <p:nvPr/>
+        </p:nvSpPr>
+        <p:spPr>
+          <a:xfrm>
+            <a:off x="11274552" y="6473952"/>
+            <a:ext cx="457200" cy="274320"/>
+          </a:xfrm>
+          <a:prstGeom prst="rect">
+            <a:avLst/>
+          </a:prstGeom>
+          <a:noFill/>
+          <a:ln/>
+        </p:spPr>
+        <p:txBody>
+          <a:bodyPr wrap="square" rtlCol="0" anchor="ctr"/>
+          <a:lstStyle/>
+          <a:p>
+            <a:pPr marL="0" indent="0" algn="r">
+              <a:buNone/>
+            </a:pPr>
+            <a:r>
+              <a:rPr lang="en-US" sz="900" dirty="0">
+                <a:solidFill>
+                  <a:srgbClr val="5B6B75"/>
                 </a:solidFill>
                 <a:latin typeface="Calibri" pitchFamily="34" charset="0"/>
                 <a:ea typeface="Calibri" pitchFamily="34" charset="-122"/>
                 <a:cs typeface="Calibri" pitchFamily="34" charset="-120"/>
               </a:rPr>
-              <a:t>IFERROR gestisce il caso "struttura non trovata"</a:t>
+              <a:t>3</a:t>
+            </a:r>
+            <a:endParaRPr lang="en-US" sz="900" dirty="0"/>
+          </a:p>
+        </p:txBody>
+      </p:sp>
+      <p:sp>
+        <p:nvSpPr>
+          <p:cNvPr id="9" name="CasellaDiTesto 8">
+            <a:extLst>
+              <a:ext uri="{FF2B5EF4-FFF2-40B4-BE49-F238E27FC236}">
+                <a16:creationId xmlns:a16="http://schemas.microsoft.com/office/drawing/2014/main" id="{2B66C9DC-72E7-87DB-03E5-03AB3702F04B}"/>
+              </a:ext>
+            </a:extLst>
+          </p:cNvPr>
+          <p:cNvSpPr txBox="1"/>
+          <p:nvPr/>
+        </p:nvSpPr>
+        <p:spPr>
+          <a:xfrm>
+            <a:off x="1322679" y="2063418"/>
+            <a:ext cx="10098481" cy="461665"/>
+          </a:xfrm>
+          <a:prstGeom prst="rect">
+            <a:avLst/>
+          </a:prstGeom>
+          <a:noFill/>
+        </p:spPr>
+        <p:txBody>
+          <a:bodyPr wrap="square">
+            <a:spAutoFit/>
+          </a:bodyPr>
+          <a:lstStyle/>
+          <a:p>
+            <a:r>
+              <a:rPr lang="it-IT" sz="1200" dirty="0"/>
+              <a:t>I numeri non tornano con quelli di una vera distribuzione normale: meno città del previsto sono concentrate vicino alla media (55,6% invece di 68,3%), mentre tutte rientrano già in ±2σ (100% invece di 95,5%, che di solito lascia fuori un piccolo 4,5%)</a:t>
+            </a:r>
+          </a:p>
+        </p:txBody>
+      </p:sp>
+      <p:sp>
+        <p:nvSpPr>
+          <p:cNvPr id="11" name="Shape 14">
+            <a:extLst>
+              <a:ext uri="{FF2B5EF4-FFF2-40B4-BE49-F238E27FC236}">
+                <a16:creationId xmlns:a16="http://schemas.microsoft.com/office/drawing/2014/main" id="{4C0B7BF5-A0F9-AEB2-F106-77AFB75EC47E}"/>
+              </a:ext>
+            </a:extLst>
+          </p:cNvPr>
+          <p:cNvSpPr/>
+          <p:nvPr/>
+        </p:nvSpPr>
+        <p:spPr>
+          <a:xfrm>
+            <a:off x="640538" y="5033772"/>
+            <a:ext cx="502920" cy="502920"/>
+          </a:xfrm>
+          <a:prstGeom prst="ellipse">
+            <a:avLst/>
+          </a:prstGeom>
+          <a:solidFill>
+            <a:srgbClr val="1C7293"/>
+          </a:solidFill>
+          <a:ln/>
+        </p:spPr>
+        <p:txBody>
+          <a:bodyPr/>
+          <a:lstStyle/>
+          <a:p>
+            <a:endParaRPr lang="it-IT" dirty="0"/>
+          </a:p>
+        </p:txBody>
+      </p:sp>
+      <p:pic>
+        <p:nvPicPr>
+          <p:cNvPr id="17" name="Image 4" descr="/home/claude/deck/icon_filter.png">
+            <a:extLst>
+              <a:ext uri="{FF2B5EF4-FFF2-40B4-BE49-F238E27FC236}">
+                <a16:creationId xmlns:a16="http://schemas.microsoft.com/office/drawing/2014/main" id="{79AD740B-BCA4-E632-4C87-66EE533BA2B8}"/>
+              </a:ext>
+            </a:extLst>
+          </p:cNvPr>
+          <p:cNvPicPr>
+            <a:picLocks noChangeAspect="1"/>
+          </p:cNvPicPr>
+          <p:nvPr/>
+        </p:nvPicPr>
+        <p:blipFill>
+          <a:blip r:embed="rId3"/>
+          <a:stretch>
+            <a:fillRect/>
+          </a:stretch>
+        </p:blipFill>
+        <p:spPr>
+          <a:xfrm>
+            <a:off x="813129" y="5179162"/>
+            <a:ext cx="220219" cy="220219"/>
+          </a:xfrm>
+          <a:prstGeom prst="rect">
+            <a:avLst/>
+          </a:prstGeom>
+        </p:spPr>
+      </p:pic>
+      <p:sp>
+        <p:nvSpPr>
+          <p:cNvPr id="29" name="Text 13">
+            <a:extLst>
+              <a:ext uri="{FF2B5EF4-FFF2-40B4-BE49-F238E27FC236}">
+                <a16:creationId xmlns:a16="http://schemas.microsoft.com/office/drawing/2014/main" id="{687F6CDC-FA57-1824-F892-18E712A6BA05}"/>
+              </a:ext>
+            </a:extLst>
+          </p:cNvPr>
+          <p:cNvSpPr/>
+          <p:nvPr/>
+        </p:nvSpPr>
+        <p:spPr>
+          <a:xfrm>
+            <a:off x="1307592" y="5357937"/>
+            <a:ext cx="9966960" cy="502920"/>
+          </a:xfrm>
+          <a:prstGeom prst="rect">
+            <a:avLst/>
+          </a:prstGeom>
+          <a:noFill/>
+          <a:ln/>
+        </p:spPr>
+        <p:txBody>
+          <a:bodyPr wrap="square" rtlCol="0" anchor="t"/>
+          <a:lstStyle/>
+          <a:p>
+            <a:r>
+              <a:rPr lang="it-IT" sz="1200" dirty="0"/>
+              <a:t>Covarianza e correlazione tra numero di strutture e prezzo medio per città: r ≈ 0,0044, praticamente nullo</a:t>
             </a:r>
             <a:endParaRPr lang="en-US" sz="1200" dirty="0"/>
           </a:p>
@@ -6722,96 +9298,36 @@
       </p:sp>
       <p:sp>
         <p:nvSpPr>
-          <p:cNvPr id="13" name="Shape 10"/>
-          <p:cNvSpPr/>
-          <p:nvPr/>
-        </p:nvSpPr>
-        <p:spPr>
-          <a:xfrm>
-            <a:off x="1371600" y="4014216"/>
-            <a:ext cx="82296" cy="82296"/>
-          </a:xfrm>
-          <a:prstGeom prst="ellipse">
-            <a:avLst/>
-          </a:prstGeom>
-          <a:solidFill>
-            <a:srgbClr val="E8871E"/>
-          </a:solidFill>
-          <a:ln/>
-        </p:spPr>
-        <p:txBody>
-          <a:bodyPr/>
-          <a:lstStyle/>
-          <a:p>
-            <a:endParaRPr lang="it-IT"/>
-          </a:p>
-        </p:txBody>
-      </p:sp>
-      <p:sp>
-        <p:nvSpPr>
-          <p:cNvPr id="14" name="Text 11"/>
-          <p:cNvSpPr/>
-          <p:nvPr/>
-        </p:nvSpPr>
-        <p:spPr>
-          <a:xfrm>
-            <a:off x="1581912" y="3886200"/>
-            <a:ext cx="4480560" cy="457200"/>
-          </a:xfrm>
-          <a:prstGeom prst="rect">
-            <a:avLst/>
-          </a:prstGeom>
-          <a:noFill/>
-          <a:ln/>
-        </p:spPr>
-        <p:txBody>
-          <a:bodyPr wrap="square" rtlCol="0" anchor="t"/>
+          <p:cNvPr id="31" name="Text 15">
+            <a:extLst>
+              <a:ext uri="{FF2B5EF4-FFF2-40B4-BE49-F238E27FC236}">
+                <a16:creationId xmlns:a16="http://schemas.microsoft.com/office/drawing/2014/main" id="{B0685C52-C099-6DEE-693C-5489B7EE921B}"/>
+              </a:ext>
+            </a:extLst>
+          </p:cNvPr>
+          <p:cNvSpPr/>
+          <p:nvPr/>
+        </p:nvSpPr>
+        <p:spPr>
+          <a:xfrm>
+            <a:off x="1371600" y="4806227"/>
+            <a:ext cx="9741560" cy="546811"/>
+          </a:xfrm>
+          <a:prstGeom prst="rect">
+            <a:avLst/>
+          </a:prstGeom>
+          <a:noFill/>
+          <a:ln/>
+        </p:spPr>
+        <p:txBody>
+          <a:bodyPr wrap="square" rtlCol="0" anchor="ctr"/>
           <a:lstStyle/>
           <a:p>
             <a:pPr marL="0" indent="0">
               <a:buNone/>
             </a:pPr>
             <a:r>
-              <a:rPr lang="en-US" sz="1200" dirty="0">
-                <a:solidFill>
-                  <a:srgbClr val="1A2733"/>
-                </a:solidFill>
-                <a:latin typeface="Calibri" pitchFamily="34" charset="0"/>
-                <a:ea typeface="Calibri" pitchFamily="34" charset="-122"/>
-                <a:cs typeface="Calibri" pitchFamily="34" charset="-120"/>
-              </a:rPr>
-              <a:t>Celle grigie: totale regionale (6.250) e strutture nella città cercata</a:t>
-            </a:r>
-            <a:endParaRPr lang="en-US" sz="1200" dirty="0"/>
-          </a:p>
-        </p:txBody>
-      </p:sp>
-      <p:sp>
-        <p:nvSpPr>
-          <p:cNvPr id="15" name="Text 12"/>
-          <p:cNvSpPr/>
-          <p:nvPr/>
-        </p:nvSpPr>
-        <p:spPr>
-          <a:xfrm>
-            <a:off x="1371600" y="4645152"/>
-            <a:ext cx="4572000" cy="365760"/>
-          </a:xfrm>
-          <a:prstGeom prst="rect">
-            <a:avLst/>
-          </a:prstGeom>
-          <a:noFill/>
-          <a:ln/>
-        </p:spPr>
-        <p:txBody>
-          <a:bodyPr wrap="square" rtlCol="0" anchor="ctr"/>
-          <a:lstStyle/>
-          <a:p>
-            <a:pPr marL="0" indent="0">
-              <a:buNone/>
-            </a:pPr>
-            <a:r>
-              <a:rPr lang="en-US" sz="1600" b="1" dirty="0">
+              <a:rPr lang="en-US" sz="1500" b="1" dirty="0">
                 <a:solidFill>
                   <a:srgbClr val="1A2733"/>
                 </a:solidFill>
@@ -6819,185 +9335,18 @@
                 <a:ea typeface="Cambria" pitchFamily="34" charset="-122"/>
                 <a:cs typeface="Cambria" pitchFamily="34" charset="-120"/>
               </a:rPr>
-              <a:t>Tabella strutturata per città</a:t>
-            </a:r>
-            <a:endParaRPr lang="en-US" sz="1600" dirty="0"/>
-          </a:p>
-        </p:txBody>
-      </p:sp>
-      <p:sp>
-        <p:nvSpPr>
-          <p:cNvPr id="16" name="Text 13"/>
-          <p:cNvSpPr/>
-          <p:nvPr/>
-        </p:nvSpPr>
-        <p:spPr>
-          <a:xfrm>
-            <a:off x="1371600" y="5056632"/>
-            <a:ext cx="4572000" cy="548640"/>
-          </a:xfrm>
-          <a:prstGeom prst="rect">
-            <a:avLst/>
-          </a:prstGeom>
-          <a:noFill/>
-          <a:ln/>
-        </p:spPr>
-        <p:txBody>
-          <a:bodyPr wrap="square" rtlCol="0" anchor="t"/>
-          <a:lstStyle/>
-          <a:p>
-            <a:pPr marL="0" indent="0">
-              <a:buNone/>
-            </a:pPr>
-            <a:r>
-              <a:rPr lang="en-US" sz="1200" dirty="0">
-                <a:solidFill>
-                  <a:srgbClr val="5B6B75"/>
-                </a:solidFill>
-                <a:latin typeface="Calibri" pitchFamily="34" charset="0"/>
-                <a:ea typeface="Calibri" pitchFamily="34" charset="-122"/>
-                <a:cs typeface="Calibri" pitchFamily="34" charset="-120"/>
-              </a:rPr>
-              <a:t>Esempio: le 4 strutture di Bolognola estratte, ordinate per categoria, dentro una vera Tabella Excel (Ctrl+T)</a:t>
-            </a:r>
-            <a:endParaRPr lang="en-US" sz="1200" dirty="0"/>
-          </a:p>
-        </p:txBody>
-      </p:sp>
-      <p:sp>
-        <p:nvSpPr>
-          <p:cNvPr id="17" name="Text 14"/>
-          <p:cNvSpPr/>
-          <p:nvPr/>
-        </p:nvSpPr>
-        <p:spPr>
-          <a:xfrm>
-            <a:off x="6400800" y="1737360"/>
-            <a:ext cx="5120640" cy="320040"/>
-          </a:xfrm>
-          <a:prstGeom prst="rect">
-            <a:avLst/>
-          </a:prstGeom>
-          <a:noFill/>
-          <a:ln/>
-        </p:spPr>
-        <p:txBody>
-          <a:bodyPr wrap="square" rtlCol="0" anchor="ctr"/>
-          <a:lstStyle/>
-          <a:p>
-            <a:pPr marL="0" indent="0">
-              <a:buNone/>
-            </a:pPr>
-            <a:r>
-              <a:rPr lang="en-US" sz="1300" b="1" dirty="0">
-                <a:solidFill>
-                  <a:srgbClr val="1A2733"/>
-                </a:solidFill>
-                <a:latin typeface="Calibri" pitchFamily="34" charset="0"/>
-                <a:ea typeface="Calibri" pitchFamily="34" charset="-122"/>
-                <a:cs typeface="Calibri" pitchFamily="34" charset="-120"/>
-              </a:rPr>
-              <a:t>Categorie ordinate per numero di strutture</a:t>
-            </a:r>
-            <a:endParaRPr lang="en-US" sz="1300" dirty="0"/>
-          </a:p>
-        </p:txBody>
-      </p:sp>
-      <p:graphicFrame>
-        <p:nvGraphicFramePr>
-          <p:cNvPr id="18" name="Chart 0"/>
-          <p:cNvGraphicFramePr/>
-          <p:nvPr/>
-        </p:nvGraphicFramePr>
-        <p:xfrm>
-          <a:off x="6309360" y="2103120"/>
-          <a:ext cx="5212080" cy="4114800"/>
-        </p:xfrm>
-        <a:graphic>
-          <a:graphicData uri="http://schemas.openxmlformats.org/drawingml/2006/chart">
-            <c:chart xmlns:c="http://schemas.openxmlformats.org/drawingml/2006/chart" xmlns:r="http://schemas.openxmlformats.org/officeDocument/2006/relationships" r:id="rId4"/>
-          </a:graphicData>
-        </a:graphic>
-      </p:graphicFrame>
-      <p:sp>
-        <p:nvSpPr>
-          <p:cNvPr id="19" name="Text 15"/>
-          <p:cNvSpPr/>
-          <p:nvPr/>
-        </p:nvSpPr>
-        <p:spPr>
-          <a:xfrm>
-            <a:off x="457200" y="6473952"/>
-            <a:ext cx="5486400" cy="274320"/>
-          </a:xfrm>
-          <a:prstGeom prst="rect">
-            <a:avLst/>
-          </a:prstGeom>
-          <a:noFill/>
-          <a:ln/>
-        </p:spPr>
-        <p:txBody>
-          <a:bodyPr wrap="square" rtlCol="0" anchor="ctr"/>
-          <a:lstStyle/>
-          <a:p>
-            <a:pPr marL="0" indent="0" algn="l">
-              <a:buNone/>
-            </a:pPr>
-            <a:r>
-              <a:rPr lang="en-US" sz="900" dirty="0">
-                <a:solidFill>
-                  <a:srgbClr val="5B6B75"/>
-                </a:solidFill>
-                <a:latin typeface="Calibri" pitchFamily="34" charset="0"/>
-                <a:ea typeface="Calibri" pitchFamily="34" charset="-122"/>
-                <a:cs typeface="Calibri" pitchFamily="34" charset="-120"/>
-              </a:rPr>
-              <a:t>Regione Marche — Patrimonio Ricettivo</a:t>
-            </a:r>
-            <a:endParaRPr lang="en-US" sz="900" dirty="0"/>
-          </a:p>
-        </p:txBody>
-      </p:sp>
-      <p:sp>
-        <p:nvSpPr>
-          <p:cNvPr id="20" name="Text 16"/>
-          <p:cNvSpPr/>
-          <p:nvPr/>
-        </p:nvSpPr>
-        <p:spPr>
-          <a:xfrm>
-            <a:off x="11274552" y="6473952"/>
-            <a:ext cx="457200" cy="274320"/>
-          </a:xfrm>
-          <a:prstGeom prst="rect">
-            <a:avLst/>
-          </a:prstGeom>
-          <a:noFill/>
-          <a:ln/>
-        </p:spPr>
-        <p:txBody>
-          <a:bodyPr wrap="square" rtlCol="0" anchor="ctr"/>
-          <a:lstStyle/>
-          <a:p>
-            <a:pPr marL="0" indent="0" algn="r">
-              <a:buNone/>
-            </a:pPr>
-            <a:r>
-              <a:rPr lang="en-US" sz="900" dirty="0">
-                <a:solidFill>
-                  <a:srgbClr val="5B6B75"/>
-                </a:solidFill>
-                <a:latin typeface="Calibri" pitchFamily="34" charset="0"/>
-                <a:ea typeface="Calibri" pitchFamily="34" charset="-122"/>
-                <a:cs typeface="Calibri" pitchFamily="34" charset="-120"/>
-              </a:rPr>
-              <a:t>5</a:t>
-            </a:r>
-            <a:endParaRPr lang="en-US" sz="900" dirty="0"/>
+              <a:t>Es. 16</a:t>
+            </a:r>
+            <a:endParaRPr lang="en-US" sz="1500" dirty="0"/>
           </a:p>
         </p:txBody>
       </p:sp>
     </p:spTree>
+    <p:extLst>
+      <p:ext uri="{BB962C8B-B14F-4D97-AF65-F5344CB8AC3E}">
+        <p14:creationId xmlns:p14="http://schemas.microsoft.com/office/powerpoint/2010/main" val="314148423"/>
+      </p:ext>
+    </p:extLst>
   </p:cSld>
   <p:clrMapOvr>
     <a:masterClrMapping/>
@@ -7006,6 +9355,748 @@
 </file>
 
 <file path=ppt/slides/slide6.xml><?xml version="1.0" encoding="utf-8"?>
+<p:sld xmlns:a="http://schemas.openxmlformats.org/drawingml/2006/main" xmlns:r="http://schemas.openxmlformats.org/officeDocument/2006/relationships" xmlns:p="http://schemas.openxmlformats.org/presentationml/2006/main">
+  <p:cSld>
+    <p:bg>
+      <p:bgPr>
+        <a:solidFill>
+          <a:srgbClr val="F7F9FB"/>
+        </a:solidFill>
+        <a:effectLst/>
+      </p:bgPr>
+    </p:bg>
+    <p:spTree>
+      <p:nvGrpSpPr>
+        <p:cNvPr id="1" name="">
+          <a:extLst>
+            <a:ext uri="{FF2B5EF4-FFF2-40B4-BE49-F238E27FC236}">
+              <a16:creationId xmlns:a16="http://schemas.microsoft.com/office/drawing/2014/main" id="{E7F2FB03-ADED-D09D-E1AF-437F01F34C8F}"/>
+            </a:ext>
+          </a:extLst>
+        </p:cNvPr>
+        <p:cNvGrpSpPr/>
+        <p:nvPr/>
+      </p:nvGrpSpPr>
+      <p:grpSpPr>
+        <a:xfrm>
+          <a:off x="0" y="0"/>
+          <a:ext cx="0" cy="0"/>
+          <a:chOff x="0" y="0"/>
+          <a:chExt cx="0" cy="0"/>
+        </a:xfrm>
+      </p:grpSpPr>
+      <p:sp>
+        <p:nvSpPr>
+          <p:cNvPr id="2" name="Text 0">
+            <a:extLst>
+              <a:ext uri="{FF2B5EF4-FFF2-40B4-BE49-F238E27FC236}">
+                <a16:creationId xmlns:a16="http://schemas.microsoft.com/office/drawing/2014/main" id="{F34ABDF9-948C-A4DF-E5A9-51D2D9924323}"/>
+              </a:ext>
+            </a:extLst>
+          </p:cNvPr>
+          <p:cNvSpPr/>
+          <p:nvPr/>
+        </p:nvSpPr>
+        <p:spPr>
+          <a:xfrm>
+            <a:off x="640080" y="457200"/>
+            <a:ext cx="9144000" cy="548640"/>
+          </a:xfrm>
+          <a:prstGeom prst="rect">
+            <a:avLst/>
+          </a:prstGeom>
+          <a:noFill/>
+          <a:ln/>
+        </p:spPr>
+        <p:txBody>
+          <a:bodyPr wrap="square" rtlCol="0" anchor="ctr"/>
+          <a:lstStyle/>
+          <a:p>
+            <a:pPr marL="0" indent="0">
+              <a:buNone/>
+            </a:pPr>
+            <a:r>
+              <a:rPr lang="en-US" sz="3000" b="1" dirty="0" err="1">
+                <a:solidFill>
+                  <a:srgbClr val="1A2733"/>
+                </a:solidFill>
+                <a:latin typeface="Cambria" pitchFamily="34" charset="0"/>
+                <a:ea typeface="Cambria" pitchFamily="34" charset="-122"/>
+              </a:rPr>
+              <a:t>Correlazione</a:t>
+            </a:r>
+            <a:r>
+              <a:rPr lang="en-US" sz="3000" b="1" dirty="0">
+                <a:solidFill>
+                  <a:srgbClr val="1A2733"/>
+                </a:solidFill>
+                <a:latin typeface="Cambria" pitchFamily="34" charset="0"/>
+                <a:ea typeface="Cambria" pitchFamily="34" charset="-122"/>
+              </a:rPr>
+              <a:t> e Distribuzione</a:t>
+            </a:r>
+            <a:endParaRPr lang="en-US" sz="3000" dirty="0"/>
+          </a:p>
+        </p:txBody>
+      </p:sp>
+      <p:sp>
+        <p:nvSpPr>
+          <p:cNvPr id="3" name="Text 1">
+            <a:extLst>
+              <a:ext uri="{FF2B5EF4-FFF2-40B4-BE49-F238E27FC236}">
+                <a16:creationId xmlns:a16="http://schemas.microsoft.com/office/drawing/2014/main" id="{B98CD407-40FA-9792-0756-94C499827926}"/>
+              </a:ext>
+            </a:extLst>
+          </p:cNvPr>
+          <p:cNvSpPr/>
+          <p:nvPr/>
+        </p:nvSpPr>
+        <p:spPr>
+          <a:xfrm>
+            <a:off x="640080" y="987552"/>
+            <a:ext cx="9144000" cy="365760"/>
+          </a:xfrm>
+          <a:prstGeom prst="rect">
+            <a:avLst/>
+          </a:prstGeom>
+          <a:noFill/>
+          <a:ln/>
+        </p:spPr>
+        <p:txBody>
+          <a:bodyPr wrap="square" rtlCol="0" anchor="ctr"/>
+          <a:lstStyle/>
+          <a:p>
+            <a:r>
+              <a:rPr lang="it-IT" sz="1400" dirty="0">
+                <a:solidFill>
+                  <a:srgbClr val="5B6B75"/>
+                </a:solidFill>
+                <a:latin typeface="Calibri" pitchFamily="34" charset="0"/>
+                <a:ea typeface="Calibri" pitchFamily="34" charset="-122"/>
+                <a:cs typeface="Calibri" pitchFamily="34" charset="-120"/>
+              </a:rPr>
+              <a:t>caricati entrambi i file in Power Query, individuate le colonne e i problemi di qualità nei dati grezzi (spazi, duplicati, righe di scarto, dati fuori posto)</a:t>
+            </a:r>
+            <a:endParaRPr lang="en-US" sz="1400" dirty="0"/>
+          </a:p>
+        </p:txBody>
+      </p:sp>
+      <p:sp>
+        <p:nvSpPr>
+          <p:cNvPr id="4" name="Shape 2">
+            <a:extLst>
+              <a:ext uri="{FF2B5EF4-FFF2-40B4-BE49-F238E27FC236}">
+                <a16:creationId xmlns:a16="http://schemas.microsoft.com/office/drawing/2014/main" id="{73A7A22F-9564-8595-B810-A16B08794506}"/>
+              </a:ext>
+            </a:extLst>
+          </p:cNvPr>
+          <p:cNvSpPr/>
+          <p:nvPr/>
+        </p:nvSpPr>
+        <p:spPr>
+          <a:xfrm>
+            <a:off x="640080" y="1691640"/>
+            <a:ext cx="502920" cy="502920"/>
+          </a:xfrm>
+          <a:prstGeom prst="ellipse">
+            <a:avLst/>
+          </a:prstGeom>
+          <a:solidFill>
+            <a:srgbClr val="1C7293"/>
+          </a:solidFill>
+          <a:ln/>
+        </p:spPr>
+        <p:txBody>
+          <a:bodyPr/>
+          <a:lstStyle/>
+          <a:p>
+            <a:endParaRPr lang="it-IT"/>
+          </a:p>
+        </p:txBody>
+      </p:sp>
+      <p:pic>
+        <p:nvPicPr>
+          <p:cNvPr id="5" name="Image 0" descr="/home/claude/deck/icon_filter.png">
+            <a:extLst>
+              <a:ext uri="{FF2B5EF4-FFF2-40B4-BE49-F238E27FC236}">
+                <a16:creationId xmlns:a16="http://schemas.microsoft.com/office/drawing/2014/main" id="{F427E3B0-20A2-0BDF-F599-DB62FFD4D7AF}"/>
+              </a:ext>
+            </a:extLst>
+          </p:cNvPr>
+          <p:cNvPicPr>
+            <a:picLocks noChangeAspect="1"/>
+          </p:cNvPicPr>
+          <p:nvPr/>
+        </p:nvPicPr>
+        <p:blipFill>
+          <a:blip r:embed="rId3"/>
+          <a:stretch>
+            <a:fillRect/>
+          </a:stretch>
+        </p:blipFill>
+        <p:spPr>
+          <a:xfrm>
+            <a:off x="770839" y="1822399"/>
+            <a:ext cx="241402" cy="241402"/>
+          </a:xfrm>
+          <a:prstGeom prst="rect">
+            <a:avLst/>
+          </a:prstGeom>
+        </p:spPr>
+      </p:pic>
+      <p:sp>
+        <p:nvSpPr>
+          <p:cNvPr id="6" name="Text 3">
+            <a:extLst>
+              <a:ext uri="{FF2B5EF4-FFF2-40B4-BE49-F238E27FC236}">
+                <a16:creationId xmlns:a16="http://schemas.microsoft.com/office/drawing/2014/main" id="{DF8E28F4-FD1C-90F6-EE2B-77FB36263369}"/>
+              </a:ext>
+            </a:extLst>
+          </p:cNvPr>
+          <p:cNvSpPr/>
+          <p:nvPr/>
+        </p:nvSpPr>
+        <p:spPr>
+          <a:xfrm>
+            <a:off x="1371600" y="1664208"/>
+            <a:ext cx="9692640" cy="329184"/>
+          </a:xfrm>
+          <a:prstGeom prst="rect">
+            <a:avLst/>
+          </a:prstGeom>
+          <a:noFill/>
+          <a:ln/>
+        </p:spPr>
+        <p:txBody>
+          <a:bodyPr wrap="square" rtlCol="0" anchor="ctr"/>
+          <a:lstStyle/>
+          <a:p>
+            <a:pPr marL="0" indent="0">
+              <a:buNone/>
+            </a:pPr>
+            <a:r>
+              <a:rPr lang="en-US" sz="1500" b="1" dirty="0">
+                <a:solidFill>
+                  <a:srgbClr val="1A2733"/>
+                </a:solidFill>
+                <a:latin typeface="Cambria" pitchFamily="34" charset="0"/>
+                <a:ea typeface="Cambria" pitchFamily="34" charset="-122"/>
+                <a:cs typeface="Cambria" pitchFamily="34" charset="-120"/>
+              </a:rPr>
+              <a:t>Es.17 </a:t>
+            </a:r>
+            <a:endParaRPr lang="en-US" sz="1500" dirty="0"/>
+          </a:p>
+        </p:txBody>
+      </p:sp>
+      <p:sp>
+        <p:nvSpPr>
+          <p:cNvPr id="7" name="Text 4">
+            <a:extLst>
+              <a:ext uri="{FF2B5EF4-FFF2-40B4-BE49-F238E27FC236}">
+                <a16:creationId xmlns:a16="http://schemas.microsoft.com/office/drawing/2014/main" id="{3EF0B057-1837-8246-56E4-91EBB1D9F4E3}"/>
+              </a:ext>
+            </a:extLst>
+          </p:cNvPr>
+          <p:cNvSpPr/>
+          <p:nvPr/>
+        </p:nvSpPr>
+        <p:spPr>
+          <a:xfrm>
+            <a:off x="1371600" y="1993392"/>
+            <a:ext cx="9966960" cy="960120"/>
+          </a:xfrm>
+          <a:prstGeom prst="rect">
+            <a:avLst/>
+          </a:prstGeom>
+          <a:noFill/>
+          <a:ln/>
+        </p:spPr>
+        <p:txBody>
+          <a:bodyPr wrap="square" rtlCol="0" anchor="t"/>
+          <a:lstStyle/>
+          <a:p>
+            <a:endParaRPr lang="en-US" sz="1200" dirty="0"/>
+          </a:p>
+        </p:txBody>
+      </p:sp>
+      <p:sp>
+        <p:nvSpPr>
+          <p:cNvPr id="12" name="Shape 8">
+            <a:extLst>
+              <a:ext uri="{FF2B5EF4-FFF2-40B4-BE49-F238E27FC236}">
+                <a16:creationId xmlns:a16="http://schemas.microsoft.com/office/drawing/2014/main" id="{597565D4-DE52-B050-3F70-ABE9536B6FC4}"/>
+              </a:ext>
+            </a:extLst>
+          </p:cNvPr>
+          <p:cNvSpPr/>
+          <p:nvPr/>
+        </p:nvSpPr>
+        <p:spPr>
+          <a:xfrm>
+            <a:off x="640080" y="3440887"/>
+            <a:ext cx="502920" cy="502920"/>
+          </a:xfrm>
+          <a:prstGeom prst="ellipse">
+            <a:avLst/>
+          </a:prstGeom>
+          <a:solidFill>
+            <a:srgbClr val="1C7293"/>
+          </a:solidFill>
+          <a:ln/>
+        </p:spPr>
+        <p:txBody>
+          <a:bodyPr/>
+          <a:lstStyle/>
+          <a:p>
+            <a:endParaRPr lang="it-IT"/>
+          </a:p>
+        </p:txBody>
+      </p:sp>
+      <p:sp>
+        <p:nvSpPr>
+          <p:cNvPr id="14" name="Text 9">
+            <a:extLst>
+              <a:ext uri="{FF2B5EF4-FFF2-40B4-BE49-F238E27FC236}">
+                <a16:creationId xmlns:a16="http://schemas.microsoft.com/office/drawing/2014/main" id="{9275135B-0EDD-9DE8-1AA5-2638191540C5}"/>
+              </a:ext>
+            </a:extLst>
+          </p:cNvPr>
+          <p:cNvSpPr/>
+          <p:nvPr/>
+        </p:nvSpPr>
+        <p:spPr>
+          <a:xfrm>
+            <a:off x="1273759" y="3357677"/>
+            <a:ext cx="9692640" cy="329184"/>
+          </a:xfrm>
+          <a:prstGeom prst="rect">
+            <a:avLst/>
+          </a:prstGeom>
+          <a:noFill/>
+          <a:ln/>
+        </p:spPr>
+        <p:txBody>
+          <a:bodyPr wrap="square" rtlCol="0" anchor="ctr"/>
+          <a:lstStyle/>
+          <a:p>
+            <a:pPr marL="0" indent="0">
+              <a:buNone/>
+            </a:pPr>
+            <a:r>
+              <a:rPr lang="en-US" sz="1500" b="1" dirty="0">
+                <a:solidFill>
+                  <a:srgbClr val="1A2733"/>
+                </a:solidFill>
+                <a:latin typeface="Cambria" pitchFamily="34" charset="0"/>
+                <a:ea typeface="Cambria" pitchFamily="34" charset="-122"/>
+              </a:rPr>
+              <a:t>Es.18</a:t>
+            </a:r>
+            <a:endParaRPr lang="en-US" sz="1500" dirty="0"/>
+          </a:p>
+        </p:txBody>
+      </p:sp>
+      <p:sp>
+        <p:nvSpPr>
+          <p:cNvPr id="15" name="Text 10">
+            <a:extLst>
+              <a:ext uri="{FF2B5EF4-FFF2-40B4-BE49-F238E27FC236}">
+                <a16:creationId xmlns:a16="http://schemas.microsoft.com/office/drawing/2014/main" id="{6BC69629-E8E3-204F-BF15-6A765D4E6874}"/>
+              </a:ext>
+            </a:extLst>
+          </p:cNvPr>
+          <p:cNvSpPr/>
+          <p:nvPr/>
+        </p:nvSpPr>
+        <p:spPr>
+          <a:xfrm>
+            <a:off x="1371600" y="3785616"/>
+            <a:ext cx="9966960" cy="502920"/>
+          </a:xfrm>
+          <a:prstGeom prst="rect">
+            <a:avLst/>
+          </a:prstGeom>
+          <a:noFill/>
+          <a:ln/>
+        </p:spPr>
+        <p:txBody>
+          <a:bodyPr wrap="square" rtlCol="0" anchor="t"/>
+          <a:lstStyle/>
+          <a:p>
+            <a:pPr marL="0" indent="0">
+              <a:buNone/>
+            </a:pPr>
+            <a:endParaRPr lang="en-US" sz="1200" dirty="0"/>
+          </a:p>
+        </p:txBody>
+      </p:sp>
+      <p:pic>
+        <p:nvPicPr>
+          <p:cNvPr id="21" name="Image 4" descr="/home/claude/deck/icon_filter.png">
+            <a:extLst>
+              <a:ext uri="{FF2B5EF4-FFF2-40B4-BE49-F238E27FC236}">
+                <a16:creationId xmlns:a16="http://schemas.microsoft.com/office/drawing/2014/main" id="{12E1D8B2-981B-64FB-413C-D79C878A9143}"/>
+              </a:ext>
+            </a:extLst>
+          </p:cNvPr>
+          <p:cNvPicPr>
+            <a:picLocks noChangeAspect="1"/>
+          </p:cNvPicPr>
+          <p:nvPr/>
+        </p:nvPicPr>
+        <p:blipFill>
+          <a:blip r:embed="rId3"/>
+          <a:stretch>
+            <a:fillRect/>
+          </a:stretch>
+        </p:blipFill>
+        <p:spPr>
+          <a:xfrm>
+            <a:off x="770839" y="3594506"/>
+            <a:ext cx="241402" cy="241402"/>
+          </a:xfrm>
+          <a:prstGeom prst="rect">
+            <a:avLst/>
+          </a:prstGeom>
+        </p:spPr>
+      </p:pic>
+      <p:sp>
+        <p:nvSpPr>
+          <p:cNvPr id="23" name="Text 16">
+            <a:extLst>
+              <a:ext uri="{FF2B5EF4-FFF2-40B4-BE49-F238E27FC236}">
+                <a16:creationId xmlns:a16="http://schemas.microsoft.com/office/drawing/2014/main" id="{63EA90BC-1F6A-D9EB-09BE-36F5FCF6C261}"/>
+              </a:ext>
+            </a:extLst>
+          </p:cNvPr>
+          <p:cNvSpPr/>
+          <p:nvPr/>
+        </p:nvSpPr>
+        <p:spPr>
+          <a:xfrm>
+            <a:off x="1240079" y="3792930"/>
+            <a:ext cx="9966960" cy="2333549"/>
+          </a:xfrm>
+          <a:prstGeom prst="rect">
+            <a:avLst/>
+          </a:prstGeom>
+          <a:noFill/>
+          <a:ln/>
+        </p:spPr>
+        <p:txBody>
+          <a:bodyPr wrap="square" rtlCol="0" anchor="t"/>
+          <a:lstStyle/>
+          <a:p>
+            <a:r>
+              <a:rPr lang="it-IT" sz="1200" dirty="0"/>
+              <a:t>Usando il modello di regressione, la stima del prezzo medio per una città con 50 strutture è di 73,56€ — un valore praticamente identico alla media generale (73,5€), indipendentemente dal numero di strutture inserito, perché la pendenza della retta è quasi zero. Questa previsione va interpretata con tre limiti fondamentali:</a:t>
+            </a:r>
+          </a:p>
+          <a:p>
+            <a:pPr lvl="0"/>
+            <a:r>
+              <a:rPr lang="it-IT" sz="1200" dirty="0"/>
+              <a:t>-1 Estrapolazione oltre i dati osservati: il modello è costruito su città con un numero di strutture compreso tra 1 e 420. Stimare il prezzo di una città con, ad esempio, 1.000 strutture significherebbe estrapolare ben oltre l'intervallo osservato, dove il modello non ha alcuna garanzia di validità.</a:t>
+            </a:r>
+          </a:p>
+          <a:p>
+            <a:pPr lvl="0"/>
+            <a:r>
+              <a:rPr lang="it-IT" sz="1200" dirty="0"/>
+              <a:t>-2 Correlazione non implica causalità: anche se il legame fosse stato più forte, non potremmo concludere che il numero di strutture "causa" un certo prezzo (o viceversa) — eventuali fattori esterni comuni (attrattività turistica, posizione geografica) potrebbero influenzare entrambe le variabili.</a:t>
+            </a:r>
+          </a:p>
+          <a:p>
+            <a:pPr lvl="0"/>
+            <a:r>
+              <a:rPr lang="it-IT" sz="1200" dirty="0"/>
+              <a:t>-3 Il limite più importante in questo caso specifico: dato che R² è praticamente zero (0,00002) e la Significatività F non è statisticamente significativa (0,9465), il modello non ha alcun reale potere predittivo. La stima di 73,56€ non è altro che la media generale travestita da previsione: usare questo modello per decisioni concrete su una città specifica sarebbe fuorviante. La conclusione onesta è che, con i dati disponibili, il numero di strutture semplicemente non permette di prevedere il prezzo medio di una città.</a:t>
+            </a:r>
+          </a:p>
+          <a:p>
+            <a:endParaRPr lang="en-US" sz="1200" dirty="0"/>
+          </a:p>
+        </p:txBody>
+      </p:sp>
+      <p:sp>
+        <p:nvSpPr>
+          <p:cNvPr id="24" name="Shape 17">
+            <a:extLst>
+              <a:ext uri="{FF2B5EF4-FFF2-40B4-BE49-F238E27FC236}">
+                <a16:creationId xmlns:a16="http://schemas.microsoft.com/office/drawing/2014/main" id="{9B2DBDEF-2321-BC23-2975-E923F7C272F3}"/>
+              </a:ext>
+            </a:extLst>
+          </p:cNvPr>
+          <p:cNvSpPr/>
+          <p:nvPr/>
+        </p:nvSpPr>
+        <p:spPr>
+          <a:xfrm>
+            <a:off x="9070848" y="91440"/>
+            <a:ext cx="2834640" cy="777240"/>
+          </a:xfrm>
+          <a:prstGeom prst="roundRect">
+            <a:avLst>
+              <a:gd name="adj" fmla="val 7059"/>
+            </a:avLst>
+          </a:prstGeom>
+          <a:solidFill>
+            <a:srgbClr val="0F3057"/>
+          </a:solidFill>
+          <a:ln/>
+        </p:spPr>
+        <p:txBody>
+          <a:bodyPr/>
+          <a:lstStyle/>
+          <a:p>
+            <a:endParaRPr lang="it-IT"/>
+          </a:p>
+        </p:txBody>
+      </p:sp>
+      <p:sp>
+        <p:nvSpPr>
+          <p:cNvPr id="25" name="Text 18">
+            <a:extLst>
+              <a:ext uri="{FF2B5EF4-FFF2-40B4-BE49-F238E27FC236}">
+                <a16:creationId xmlns:a16="http://schemas.microsoft.com/office/drawing/2014/main" id="{462E72FF-E605-A017-4677-9919727B9A77}"/>
+              </a:ext>
+            </a:extLst>
+          </p:cNvPr>
+          <p:cNvSpPr/>
+          <p:nvPr/>
+        </p:nvSpPr>
+        <p:spPr>
+          <a:xfrm>
+            <a:off x="9070848" y="73152"/>
+            <a:ext cx="2834640" cy="365760"/>
+          </a:xfrm>
+          <a:prstGeom prst="rect">
+            <a:avLst/>
+          </a:prstGeom>
+          <a:noFill/>
+          <a:ln/>
+        </p:spPr>
+        <p:txBody>
+          <a:bodyPr wrap="square" rtlCol="0" anchor="ctr"/>
+          <a:lstStyle/>
+          <a:p>
+            <a:pPr marL="0" indent="0" algn="ctr">
+              <a:buNone/>
+            </a:pPr>
+            <a:r>
+              <a:rPr lang="en-US" sz="1600" b="1" dirty="0">
+                <a:solidFill>
+                  <a:srgbClr val="FFFFFF"/>
+                </a:solidFill>
+                <a:latin typeface="Cambria" pitchFamily="34" charset="0"/>
+                <a:ea typeface="Cambria" pitchFamily="34" charset="-122"/>
+                <a:cs typeface="Cambria" pitchFamily="34" charset="-120"/>
+              </a:rPr>
+              <a:t>6.258 → 6.250</a:t>
+            </a:r>
+            <a:endParaRPr lang="en-US" sz="1600" dirty="0"/>
+          </a:p>
+        </p:txBody>
+      </p:sp>
+      <p:sp>
+        <p:nvSpPr>
+          <p:cNvPr id="26" name="Text 19">
+            <a:extLst>
+              <a:ext uri="{FF2B5EF4-FFF2-40B4-BE49-F238E27FC236}">
+                <a16:creationId xmlns:a16="http://schemas.microsoft.com/office/drawing/2014/main" id="{011C29B8-F4E1-9ACB-69A8-70FA5E20CF5F}"/>
+              </a:ext>
+            </a:extLst>
+          </p:cNvPr>
+          <p:cNvSpPr/>
+          <p:nvPr/>
+        </p:nvSpPr>
+        <p:spPr>
+          <a:xfrm>
+            <a:off x="9171432" y="402336"/>
+            <a:ext cx="2834640" cy="274320"/>
+          </a:xfrm>
+          <a:prstGeom prst="rect">
+            <a:avLst/>
+          </a:prstGeom>
+          <a:noFill/>
+          <a:ln/>
+        </p:spPr>
+        <p:txBody>
+          <a:bodyPr wrap="square" rtlCol="0" anchor="ctr"/>
+          <a:lstStyle/>
+          <a:p>
+            <a:pPr marL="0" indent="0" algn="ctr">
+              <a:buNone/>
+            </a:pPr>
+            <a:r>
+              <a:rPr lang="en-US" sz="1050" dirty="0">
+                <a:solidFill>
+                  <a:srgbClr val="CADCE8"/>
+                </a:solidFill>
+                <a:latin typeface="Calibri" pitchFamily="34" charset="0"/>
+                <a:ea typeface="Calibri" pitchFamily="34" charset="-122"/>
+                <a:cs typeface="Calibri" pitchFamily="34" charset="-120"/>
+              </a:rPr>
+              <a:t>righe pulite</a:t>
+            </a:r>
+            <a:endParaRPr lang="en-US" sz="1050" dirty="0"/>
+          </a:p>
+        </p:txBody>
+      </p:sp>
+      <p:sp>
+        <p:nvSpPr>
+          <p:cNvPr id="27" name="Text 20">
+            <a:extLst>
+              <a:ext uri="{FF2B5EF4-FFF2-40B4-BE49-F238E27FC236}">
+                <a16:creationId xmlns:a16="http://schemas.microsoft.com/office/drawing/2014/main" id="{A97FF970-4EFD-CD51-A552-43D4C95DF8BD}"/>
+              </a:ext>
+            </a:extLst>
+          </p:cNvPr>
+          <p:cNvSpPr/>
+          <p:nvPr/>
+        </p:nvSpPr>
+        <p:spPr>
+          <a:xfrm>
+            <a:off x="457200" y="6473952"/>
+            <a:ext cx="5486400" cy="274320"/>
+          </a:xfrm>
+          <a:prstGeom prst="rect">
+            <a:avLst/>
+          </a:prstGeom>
+          <a:noFill/>
+          <a:ln/>
+        </p:spPr>
+        <p:txBody>
+          <a:bodyPr wrap="square" rtlCol="0" anchor="ctr"/>
+          <a:lstStyle/>
+          <a:p>
+            <a:pPr marL="0" indent="0" algn="l">
+              <a:buNone/>
+            </a:pPr>
+            <a:r>
+              <a:rPr lang="en-US" sz="900" dirty="0">
+                <a:solidFill>
+                  <a:srgbClr val="5B6B75"/>
+                </a:solidFill>
+                <a:latin typeface="Calibri" pitchFamily="34" charset="0"/>
+                <a:ea typeface="Calibri" pitchFamily="34" charset="-122"/>
+                <a:cs typeface="Calibri" pitchFamily="34" charset="-120"/>
+              </a:rPr>
+              <a:t>Regione Marche — Patrimonio Ricettivo</a:t>
+            </a:r>
+            <a:endParaRPr lang="en-US" sz="900" dirty="0"/>
+          </a:p>
+        </p:txBody>
+      </p:sp>
+      <p:sp>
+        <p:nvSpPr>
+          <p:cNvPr id="28" name="Text 21">
+            <a:extLst>
+              <a:ext uri="{FF2B5EF4-FFF2-40B4-BE49-F238E27FC236}">
+                <a16:creationId xmlns:a16="http://schemas.microsoft.com/office/drawing/2014/main" id="{EBD7AC32-2ADA-23FC-EFA9-BBA3CE97CFBD}"/>
+              </a:ext>
+            </a:extLst>
+          </p:cNvPr>
+          <p:cNvSpPr/>
+          <p:nvPr/>
+        </p:nvSpPr>
+        <p:spPr>
+          <a:xfrm>
+            <a:off x="11274552" y="6473952"/>
+            <a:ext cx="457200" cy="274320"/>
+          </a:xfrm>
+          <a:prstGeom prst="rect">
+            <a:avLst/>
+          </a:prstGeom>
+          <a:noFill/>
+          <a:ln/>
+        </p:spPr>
+        <p:txBody>
+          <a:bodyPr wrap="square" rtlCol="0" anchor="ctr"/>
+          <a:lstStyle/>
+          <a:p>
+            <a:pPr marL="0" indent="0" algn="r">
+              <a:buNone/>
+            </a:pPr>
+            <a:r>
+              <a:rPr lang="en-US" sz="900" dirty="0">
+                <a:solidFill>
+                  <a:srgbClr val="5B6B75"/>
+                </a:solidFill>
+                <a:latin typeface="Calibri" pitchFamily="34" charset="0"/>
+                <a:ea typeface="Calibri" pitchFamily="34" charset="-122"/>
+                <a:cs typeface="Calibri" pitchFamily="34" charset="-120"/>
+              </a:rPr>
+              <a:t>3</a:t>
+            </a:r>
+            <a:endParaRPr lang="en-US" sz="900" dirty="0"/>
+          </a:p>
+        </p:txBody>
+      </p:sp>
+      <p:sp>
+        <p:nvSpPr>
+          <p:cNvPr id="9" name="CasellaDiTesto 8">
+            <a:extLst>
+              <a:ext uri="{FF2B5EF4-FFF2-40B4-BE49-F238E27FC236}">
+                <a16:creationId xmlns:a16="http://schemas.microsoft.com/office/drawing/2014/main" id="{4135C884-1094-1E67-D06E-2E7E21336ECC}"/>
+              </a:ext>
+            </a:extLst>
+          </p:cNvPr>
+          <p:cNvSpPr txBox="1"/>
+          <p:nvPr/>
+        </p:nvSpPr>
+        <p:spPr>
+          <a:xfrm>
+            <a:off x="1240079" y="1932749"/>
+            <a:ext cx="10098481" cy="1200329"/>
+          </a:xfrm>
+          <a:prstGeom prst="rect">
+            <a:avLst/>
+          </a:prstGeom>
+          <a:noFill/>
+        </p:spPr>
+        <p:txBody>
+          <a:bodyPr wrap="square">
+            <a:spAutoFit/>
+          </a:bodyPr>
+          <a:lstStyle/>
+          <a:p>
+            <a:r>
+              <a:rPr lang="it-IT" sz="1200" dirty="0"/>
+              <a:t>Il diagramma a dispersione mostra i punti (numero di strutture, prezzo medio) completamente sparsi, senza alcun pattern visibile: città con pochissime strutture hanno prezzi che spaziano da 30€ a 120€ tanto quanto le città con centinaia di strutture. La linea di tendenza lineare è praticamente piatta: la Significatività F = 0,9465 è ben al di sopra della soglia standard di 0,05, quindi il modello nel suo complesso non è statisticamente significativo. Anche il p-</a:t>
+            </a:r>
+            <a:r>
+              <a:rPr lang="it-IT" sz="1200" dirty="0" err="1"/>
+              <a:t>value</a:t>
+            </a:r>
+            <a:r>
+              <a:rPr lang="it-IT" sz="1200" dirty="0"/>
+              <a:t> del coefficiente della variabile "numero di strutture" è 0,9465 — non possiamo rifiutare l'ipotesi nulla che il vero coefficiente angolare sia zero.</a:t>
+            </a:r>
+          </a:p>
+          <a:p>
+            <a:r>
+              <a:rPr lang="it-IT" sz="1200" dirty="0"/>
+              <a:t>Conclusione: il numero di strutture ricettive di una città non ha alcun potere predittivo sul suo prezzo medio in questo dataset. Le due variabili sono sostanzialmente indipendenti</a:t>
+            </a:r>
+          </a:p>
+        </p:txBody>
+      </p:sp>
+    </p:spTree>
+    <p:extLst>
+      <p:ext uri="{BB962C8B-B14F-4D97-AF65-F5344CB8AC3E}">
+        <p14:creationId xmlns:p14="http://schemas.microsoft.com/office/powerpoint/2010/main" val="4073091238"/>
+      </p:ext>
+    </p:extLst>
+  </p:cSld>
+  <p:clrMapOvr>
+    <a:masterClrMapping/>
+  </p:clrMapOvr>
+</p:sld>
+</file>
+
+<file path=ppt/slides/slide7.xml><?xml version="1.0" encoding="utf-8"?>
 <p:sld xmlns:a="http://schemas.openxmlformats.org/drawingml/2006/main" xmlns:r="http://schemas.openxmlformats.org/officeDocument/2006/relationships" xmlns:p="http://schemas.openxmlformats.org/presentationml/2006/main">
   <p:cSld name="Slide 6">
     <p:bg>
@@ -7775,7 +10866,7 @@
 </p:sld>
 </file>
 
-<file path=ppt/slides/slide7.xml><?xml version="1.0" encoding="utf-8"?>
+<file path=ppt/slides/slide8.xml><?xml version="1.0" encoding="utf-8"?>
 <p:sld xmlns:a="http://schemas.openxmlformats.org/drawingml/2006/main" xmlns:r="http://schemas.openxmlformats.org/officeDocument/2006/relationships" xmlns:p="http://schemas.openxmlformats.org/presentationml/2006/main">
   <p:cSld name="Slide 7">
     <p:bg>
@@ -9005,7 +12096,7 @@
 </p:sld>
 </file>
 
-<file path=ppt/slides/slide8.xml><?xml version="1.0" encoding="utf-8"?>
+<file path=ppt/slides/slide9.xml><?xml version="1.0" encoding="utf-8"?>
 <p:sld xmlns:a="http://schemas.openxmlformats.org/drawingml/2006/main" xmlns:r="http://schemas.openxmlformats.org/officeDocument/2006/relationships" xmlns:p="http://schemas.openxmlformats.org/presentationml/2006/main">
   <p:cSld name="Slide 8">
     <p:bg>
@@ -9834,1168 +12925,6 @@
                 <a:cs typeface="Calibri" pitchFamily="34" charset="-120"/>
               </a:rPr>
               <a:t>8</a:t>
-            </a:r>
-            <a:endParaRPr lang="en-US" sz="900" dirty="0"/>
-          </a:p>
-        </p:txBody>
-      </p:sp>
-    </p:spTree>
-  </p:cSld>
-  <p:clrMapOvr>
-    <a:masterClrMapping/>
-  </p:clrMapOvr>
-</p:sld>
-</file>
-
-<file path=ppt/slides/slide9.xml><?xml version="1.0" encoding="utf-8"?>
-<p:sld xmlns:a="http://schemas.openxmlformats.org/drawingml/2006/main" xmlns:r="http://schemas.openxmlformats.org/officeDocument/2006/relationships" xmlns:p="http://schemas.openxmlformats.org/presentationml/2006/main">
-  <p:cSld name="Slide 9">
-    <p:bg>
-      <p:bgPr>
-        <a:solidFill>
-          <a:srgbClr val="F7F9FB"/>
-        </a:solidFill>
-        <a:effectLst/>
-      </p:bgPr>
-    </p:bg>
-    <p:spTree>
-      <p:nvGrpSpPr>
-        <p:cNvPr id="1" name=""/>
-        <p:cNvGrpSpPr/>
-        <p:nvPr/>
-      </p:nvGrpSpPr>
-      <p:grpSpPr>
-        <a:xfrm>
-          <a:off x="0" y="0"/>
-          <a:ext cx="0" cy="0"/>
-          <a:chOff x="0" y="0"/>
-          <a:chExt cx="0" cy="0"/>
-        </a:xfrm>
-      </p:grpSpPr>
-      <p:sp>
-        <p:nvSpPr>
-          <p:cNvPr id="2" name="Text 0"/>
-          <p:cNvSpPr/>
-          <p:nvPr/>
-        </p:nvSpPr>
-        <p:spPr>
-          <a:xfrm>
-            <a:off x="640080" y="457200"/>
-            <a:ext cx="10058400" cy="548640"/>
-          </a:xfrm>
-          <a:prstGeom prst="rect">
-            <a:avLst/>
-          </a:prstGeom>
-          <a:noFill/>
-          <a:ln/>
-        </p:spPr>
-        <p:txBody>
-          <a:bodyPr wrap="square" rtlCol="0" anchor="ctr"/>
-          <a:lstStyle/>
-          <a:p>
-            <a:pPr marL="0" indent="0">
-              <a:buNone/>
-            </a:pPr>
-            <a:r>
-              <a:rPr lang="en-US" sz="3000" b="1" dirty="0">
-                <a:solidFill>
-                  <a:srgbClr val="1A2733"/>
-                </a:solidFill>
-                <a:latin typeface="Cambria" pitchFamily="34" charset="0"/>
-                <a:ea typeface="Cambria" pitchFamily="34" charset="-122"/>
-                <a:cs typeface="Cambria" pitchFamily="34" charset="-120"/>
-              </a:rPr>
-              <a:t>Struttura del file finale</a:t>
-            </a:r>
-            <a:endParaRPr lang="en-US" sz="3000" dirty="0"/>
-          </a:p>
-        </p:txBody>
-      </p:sp>
-      <p:sp>
-        <p:nvSpPr>
-          <p:cNvPr id="3" name="Text 1"/>
-          <p:cNvSpPr/>
-          <p:nvPr/>
-        </p:nvSpPr>
-        <p:spPr>
-          <a:xfrm>
-            <a:off x="640080" y="987552"/>
-            <a:ext cx="9144000" cy="365760"/>
-          </a:xfrm>
-          <a:prstGeom prst="rect">
-            <a:avLst/>
-          </a:prstGeom>
-          <a:noFill/>
-          <a:ln/>
-        </p:spPr>
-        <p:txBody>
-          <a:bodyPr wrap="square" rtlCol="0" anchor="ctr"/>
-          <a:lstStyle/>
-          <a:p>
-            <a:pPr marL="0" indent="0">
-              <a:buNone/>
-            </a:pPr>
-            <a:r>
-              <a:rPr lang="en-US" sz="1400" dirty="0">
-                <a:solidFill>
-                  <a:srgbClr val="5B6B75"/>
-                </a:solidFill>
-                <a:latin typeface="Calibri" pitchFamily="34" charset="0"/>
-                <a:ea typeface="Calibri" pitchFamily="34" charset="-122"/>
-                <a:cs typeface="Calibri" pitchFamily="34" charset="-120"/>
-              </a:rPr>
-              <a:t>Sette fogli, ciascuno con uno scopo preciso nel flusso dati → analisi</a:t>
-            </a:r>
-            <a:endParaRPr lang="en-US" sz="1400" dirty="0"/>
-          </a:p>
-        </p:txBody>
-      </p:sp>
-      <p:sp>
-        <p:nvSpPr>
-          <p:cNvPr id="4" name="Shape 2"/>
-          <p:cNvSpPr/>
-          <p:nvPr/>
-        </p:nvSpPr>
-        <p:spPr>
-          <a:xfrm>
-            <a:off x="640080" y="1691640"/>
-            <a:ext cx="5257800" cy="914400"/>
-          </a:xfrm>
-          <a:prstGeom prst="roundRect">
-            <a:avLst>
-              <a:gd name="adj" fmla="val 6000"/>
-            </a:avLst>
-          </a:prstGeom>
-          <a:solidFill>
-            <a:srgbClr val="FFFFFF"/>
-          </a:solidFill>
-          <a:ln w="12700">
-            <a:solidFill>
-              <a:srgbClr val="E3E9ED"/>
-            </a:solidFill>
-            <a:prstDash val="solid"/>
-          </a:ln>
-        </p:spPr>
-        <p:txBody>
-          <a:bodyPr/>
-          <a:lstStyle/>
-          <a:p>
-            <a:endParaRPr lang="it-IT"/>
-          </a:p>
-        </p:txBody>
-      </p:sp>
-      <p:sp>
-        <p:nvSpPr>
-          <p:cNvPr id="5" name="Shape 3"/>
-          <p:cNvSpPr/>
-          <p:nvPr/>
-        </p:nvSpPr>
-        <p:spPr>
-          <a:xfrm>
-            <a:off x="640080" y="1691640"/>
-            <a:ext cx="82296" cy="914400"/>
-          </a:xfrm>
-          <a:prstGeom prst="rect">
-            <a:avLst/>
-          </a:prstGeom>
-          <a:solidFill>
-            <a:srgbClr val="1C7293"/>
-          </a:solidFill>
-          <a:ln/>
-        </p:spPr>
-        <p:txBody>
-          <a:bodyPr/>
-          <a:lstStyle/>
-          <a:p>
-            <a:endParaRPr lang="it-IT"/>
-          </a:p>
-        </p:txBody>
-      </p:sp>
-      <p:sp>
-        <p:nvSpPr>
-          <p:cNvPr id="6" name="Text 4"/>
-          <p:cNvSpPr/>
-          <p:nvPr/>
-        </p:nvSpPr>
-        <p:spPr>
-          <a:xfrm>
-            <a:off x="868680" y="1764792"/>
-            <a:ext cx="4892040" cy="320040"/>
-          </a:xfrm>
-          <a:prstGeom prst="rect">
-            <a:avLst/>
-          </a:prstGeom>
-          <a:noFill/>
-          <a:ln/>
-        </p:spPr>
-        <p:txBody>
-          <a:bodyPr wrap="square" rtlCol="0" anchor="ctr"/>
-          <a:lstStyle/>
-          <a:p>
-            <a:pPr marL="0" indent="0">
-              <a:buNone/>
-            </a:pPr>
-            <a:r>
-              <a:rPr lang="en-US" sz="1350" b="1" dirty="0">
-                <a:solidFill>
-                  <a:srgbClr val="1A2733"/>
-                </a:solidFill>
-                <a:latin typeface="Cambria" pitchFamily="34" charset="0"/>
-                <a:ea typeface="Cambria" pitchFamily="34" charset="-122"/>
-                <a:cs typeface="Cambria" pitchFamily="34" charset="-120"/>
-              </a:rPr>
-              <a:t>Strutture ricettive</a:t>
-            </a:r>
-            <a:endParaRPr lang="en-US" sz="1350" dirty="0"/>
-          </a:p>
-        </p:txBody>
-      </p:sp>
-      <p:sp>
-        <p:nvSpPr>
-          <p:cNvPr id="7" name="Text 5"/>
-          <p:cNvSpPr/>
-          <p:nvPr/>
-        </p:nvSpPr>
-        <p:spPr>
-          <a:xfrm>
-            <a:off x="868680" y="2075688"/>
-            <a:ext cx="4892040" cy="502920"/>
-          </a:xfrm>
-          <a:prstGeom prst="rect">
-            <a:avLst/>
-          </a:prstGeom>
-          <a:noFill/>
-          <a:ln/>
-        </p:spPr>
-        <p:txBody>
-          <a:bodyPr wrap="square" rtlCol="0" anchor="t"/>
-          <a:lstStyle/>
-          <a:p>
-            <a:pPr marL="0" indent="0">
-              <a:buNone/>
-            </a:pPr>
-            <a:r>
-              <a:rPr lang="en-US" sz="1050" dirty="0">
-                <a:solidFill>
-                  <a:srgbClr val="5B6B75"/>
-                </a:solidFill>
-                <a:latin typeface="Calibri" pitchFamily="34" charset="0"/>
-                <a:ea typeface="Calibri" pitchFamily="34" charset="-122"/>
-                <a:cs typeface="Calibri" pitchFamily="34" charset="-120"/>
-              </a:rPr>
-              <a:t>Tabella sorgente pulita, 6.250 righe, con colonne di qualità (Sito_valido, Email_multiple) e prezzo collegato</a:t>
-            </a:r>
-            <a:endParaRPr lang="en-US" sz="1050" dirty="0"/>
-          </a:p>
-        </p:txBody>
-      </p:sp>
-      <p:sp>
-        <p:nvSpPr>
-          <p:cNvPr id="8" name="Shape 6"/>
-          <p:cNvSpPr/>
-          <p:nvPr/>
-        </p:nvSpPr>
-        <p:spPr>
-          <a:xfrm>
-            <a:off x="640080" y="2743200"/>
-            <a:ext cx="5257800" cy="914400"/>
-          </a:xfrm>
-          <a:prstGeom prst="roundRect">
-            <a:avLst>
-              <a:gd name="adj" fmla="val 6000"/>
-            </a:avLst>
-          </a:prstGeom>
-          <a:solidFill>
-            <a:srgbClr val="FFFFFF"/>
-          </a:solidFill>
-          <a:ln w="12700">
-            <a:solidFill>
-              <a:srgbClr val="E3E9ED"/>
-            </a:solidFill>
-            <a:prstDash val="solid"/>
-          </a:ln>
-        </p:spPr>
-        <p:txBody>
-          <a:bodyPr/>
-          <a:lstStyle/>
-          <a:p>
-            <a:endParaRPr lang="it-IT"/>
-          </a:p>
-        </p:txBody>
-      </p:sp>
-      <p:sp>
-        <p:nvSpPr>
-          <p:cNvPr id="9" name="Shape 7"/>
-          <p:cNvSpPr/>
-          <p:nvPr/>
-        </p:nvSpPr>
-        <p:spPr>
-          <a:xfrm>
-            <a:off x="640080" y="2743200"/>
-            <a:ext cx="82296" cy="914400"/>
-          </a:xfrm>
-          <a:prstGeom prst="rect">
-            <a:avLst/>
-          </a:prstGeom>
-          <a:solidFill>
-            <a:srgbClr val="E8871E"/>
-          </a:solidFill>
-          <a:ln/>
-        </p:spPr>
-        <p:txBody>
-          <a:bodyPr/>
-          <a:lstStyle/>
-          <a:p>
-            <a:endParaRPr lang="it-IT"/>
-          </a:p>
-        </p:txBody>
-      </p:sp>
-      <p:sp>
-        <p:nvSpPr>
-          <p:cNvPr id="10" name="Text 8"/>
-          <p:cNvSpPr/>
-          <p:nvPr/>
-        </p:nvSpPr>
-        <p:spPr>
-          <a:xfrm>
-            <a:off x="868680" y="2816352"/>
-            <a:ext cx="4892040" cy="320040"/>
-          </a:xfrm>
-          <a:prstGeom prst="rect">
-            <a:avLst/>
-          </a:prstGeom>
-          <a:noFill/>
-          <a:ln/>
-        </p:spPr>
-        <p:txBody>
-          <a:bodyPr wrap="square" rtlCol="0" anchor="ctr"/>
-          <a:lstStyle/>
-          <a:p>
-            <a:pPr marL="0" indent="0">
-              <a:buNone/>
-            </a:pPr>
-            <a:r>
-              <a:rPr lang="en-US" sz="1350" b="1" dirty="0">
-                <a:solidFill>
-                  <a:srgbClr val="1A2733"/>
-                </a:solidFill>
-                <a:latin typeface="Cambria" pitchFamily="34" charset="0"/>
-                <a:ea typeface="Cambria" pitchFamily="34" charset="-122"/>
-                <a:cs typeface="Cambria" pitchFamily="34" charset="-120"/>
-              </a:rPr>
-              <a:t>prezzi</a:t>
-            </a:r>
-            <a:endParaRPr lang="en-US" sz="1350" dirty="0"/>
-          </a:p>
-        </p:txBody>
-      </p:sp>
-      <p:sp>
-        <p:nvSpPr>
-          <p:cNvPr id="11" name="Text 9"/>
-          <p:cNvSpPr/>
-          <p:nvPr/>
-        </p:nvSpPr>
-        <p:spPr>
-          <a:xfrm>
-            <a:off x="868680" y="3127248"/>
-            <a:ext cx="4892040" cy="502920"/>
-          </a:xfrm>
-          <a:prstGeom prst="rect">
-            <a:avLst/>
-          </a:prstGeom>
-          <a:noFill/>
-          <a:ln/>
-        </p:spPr>
-        <p:txBody>
-          <a:bodyPr wrap="square" rtlCol="0" anchor="t"/>
-          <a:lstStyle/>
-          <a:p>
-            <a:pPr marL="0" indent="0">
-              <a:buNone/>
-            </a:pPr>
-            <a:r>
-              <a:rPr lang="en-US" sz="1050" dirty="0">
-                <a:solidFill>
-                  <a:srgbClr val="5B6B75"/>
-                </a:solidFill>
-                <a:latin typeface="Calibri" pitchFamily="34" charset="0"/>
-                <a:ea typeface="Calibri" pitchFamily="34" charset="-122"/>
-                <a:cs typeface="Calibri" pitchFamily="34" charset="-120"/>
-              </a:rPr>
-              <a:t>234 città con prezzo medio, intestazione ricostruita, tipizzata</a:t>
-            </a:r>
-            <a:endParaRPr lang="en-US" sz="1050" dirty="0"/>
-          </a:p>
-        </p:txBody>
-      </p:sp>
-      <p:sp>
-        <p:nvSpPr>
-          <p:cNvPr id="12" name="Shape 10"/>
-          <p:cNvSpPr/>
-          <p:nvPr/>
-        </p:nvSpPr>
-        <p:spPr>
-          <a:xfrm>
-            <a:off x="640080" y="3794760"/>
-            <a:ext cx="5257800" cy="914400"/>
-          </a:xfrm>
-          <a:prstGeom prst="roundRect">
-            <a:avLst>
-              <a:gd name="adj" fmla="val 6000"/>
-            </a:avLst>
-          </a:prstGeom>
-          <a:solidFill>
-            <a:srgbClr val="FFFFFF"/>
-          </a:solidFill>
-          <a:ln w="12700">
-            <a:solidFill>
-              <a:srgbClr val="E3E9ED"/>
-            </a:solidFill>
-            <a:prstDash val="solid"/>
-          </a:ln>
-        </p:spPr>
-        <p:txBody>
-          <a:bodyPr/>
-          <a:lstStyle/>
-          <a:p>
-            <a:endParaRPr lang="it-IT"/>
-          </a:p>
-        </p:txBody>
-      </p:sp>
-      <p:sp>
-        <p:nvSpPr>
-          <p:cNvPr id="13" name="Shape 11"/>
-          <p:cNvSpPr/>
-          <p:nvPr/>
-        </p:nvSpPr>
-        <p:spPr>
-          <a:xfrm>
-            <a:off x="640080" y="3794760"/>
-            <a:ext cx="82296" cy="914400"/>
-          </a:xfrm>
-          <a:prstGeom prst="rect">
-            <a:avLst/>
-          </a:prstGeom>
-          <a:solidFill>
-            <a:srgbClr val="1C7293"/>
-          </a:solidFill>
-          <a:ln/>
-        </p:spPr>
-        <p:txBody>
-          <a:bodyPr/>
-          <a:lstStyle/>
-          <a:p>
-            <a:endParaRPr lang="it-IT"/>
-          </a:p>
-        </p:txBody>
-      </p:sp>
-      <p:sp>
-        <p:nvSpPr>
-          <p:cNvPr id="14" name="Text 12"/>
-          <p:cNvSpPr/>
-          <p:nvPr/>
-        </p:nvSpPr>
-        <p:spPr>
-          <a:xfrm>
-            <a:off x="868680" y="3867912"/>
-            <a:ext cx="4892040" cy="320040"/>
-          </a:xfrm>
-          <a:prstGeom prst="rect">
-            <a:avLst/>
-          </a:prstGeom>
-          <a:noFill/>
-          <a:ln/>
-        </p:spPr>
-        <p:txBody>
-          <a:bodyPr wrap="square" rtlCol="0" anchor="ctr"/>
-          <a:lstStyle/>
-          <a:p>
-            <a:pPr marL="0" indent="0">
-              <a:buNone/>
-            </a:pPr>
-            <a:r>
-              <a:rPr lang="en-US" sz="1350" b="1" dirty="0">
-                <a:solidFill>
-                  <a:srgbClr val="1A2733"/>
-                </a:solidFill>
-                <a:latin typeface="Cambria" pitchFamily="34" charset="0"/>
-                <a:ea typeface="Cambria" pitchFamily="34" charset="-122"/>
-                <a:cs typeface="Cambria" pitchFamily="34" charset="-120"/>
-              </a:rPr>
-              <a:t>RICERCA</a:t>
-            </a:r>
-            <a:endParaRPr lang="en-US" sz="1350" dirty="0"/>
-          </a:p>
-        </p:txBody>
-      </p:sp>
-      <p:sp>
-        <p:nvSpPr>
-          <p:cNvPr id="15" name="Text 13"/>
-          <p:cNvSpPr/>
-          <p:nvPr/>
-        </p:nvSpPr>
-        <p:spPr>
-          <a:xfrm>
-            <a:off x="868680" y="4178808"/>
-            <a:ext cx="4892040" cy="502920"/>
-          </a:xfrm>
-          <a:prstGeom prst="rect">
-            <a:avLst/>
-          </a:prstGeom>
-          <a:noFill/>
-          <a:ln/>
-        </p:spPr>
-        <p:txBody>
-          <a:bodyPr wrap="square" rtlCol="0" anchor="t"/>
-          <a:lstStyle/>
-          <a:p>
-            <a:pPr marL="0" indent="0">
-              <a:buNone/>
-            </a:pPr>
-            <a:r>
-              <a:rPr lang="en-US" sz="1050" dirty="0">
-                <a:solidFill>
-                  <a:srgbClr val="5B6B75"/>
-                </a:solidFill>
-                <a:latin typeface="Calibri" pitchFamily="34" charset="0"/>
-                <a:ea typeface="Calibri" pitchFamily="34" charset="-122"/>
-                <a:cs typeface="Calibri" pitchFamily="34" charset="-120"/>
-              </a:rPr>
-              <a:t>Ricerca interattiva per struttura: menu a tendina + recupero automatico</a:t>
-            </a:r>
-            <a:endParaRPr lang="en-US" sz="1050" dirty="0"/>
-          </a:p>
-        </p:txBody>
-      </p:sp>
-      <p:sp>
-        <p:nvSpPr>
-          <p:cNvPr id="16" name="Shape 14"/>
-          <p:cNvSpPr/>
-          <p:nvPr/>
-        </p:nvSpPr>
-        <p:spPr>
-          <a:xfrm>
-            <a:off x="640080" y="4846320"/>
-            <a:ext cx="5257800" cy="914400"/>
-          </a:xfrm>
-          <a:prstGeom prst="roundRect">
-            <a:avLst>
-              <a:gd name="adj" fmla="val 6000"/>
-            </a:avLst>
-          </a:prstGeom>
-          <a:solidFill>
-            <a:srgbClr val="FFFFFF"/>
-          </a:solidFill>
-          <a:ln w="12700">
-            <a:solidFill>
-              <a:srgbClr val="E3E9ED"/>
-            </a:solidFill>
-            <a:prstDash val="solid"/>
-          </a:ln>
-        </p:spPr>
-        <p:txBody>
-          <a:bodyPr/>
-          <a:lstStyle/>
-          <a:p>
-            <a:endParaRPr lang="it-IT"/>
-          </a:p>
-        </p:txBody>
-      </p:sp>
-      <p:sp>
-        <p:nvSpPr>
-          <p:cNvPr id="17" name="Shape 15"/>
-          <p:cNvSpPr/>
-          <p:nvPr/>
-        </p:nvSpPr>
-        <p:spPr>
-          <a:xfrm>
-            <a:off x="640080" y="4846320"/>
-            <a:ext cx="82296" cy="914400"/>
-          </a:xfrm>
-          <a:prstGeom prst="rect">
-            <a:avLst/>
-          </a:prstGeom>
-          <a:solidFill>
-            <a:srgbClr val="E8871E"/>
-          </a:solidFill>
-          <a:ln/>
-        </p:spPr>
-        <p:txBody>
-          <a:bodyPr/>
-          <a:lstStyle/>
-          <a:p>
-            <a:endParaRPr lang="it-IT"/>
-          </a:p>
-        </p:txBody>
-      </p:sp>
-      <p:sp>
-        <p:nvSpPr>
-          <p:cNvPr id="18" name="Text 16"/>
-          <p:cNvSpPr/>
-          <p:nvPr/>
-        </p:nvSpPr>
-        <p:spPr>
-          <a:xfrm>
-            <a:off x="868680" y="4919472"/>
-            <a:ext cx="4892040" cy="320040"/>
-          </a:xfrm>
-          <a:prstGeom prst="rect">
-            <a:avLst/>
-          </a:prstGeom>
-          <a:noFill/>
-          <a:ln/>
-        </p:spPr>
-        <p:txBody>
-          <a:bodyPr wrap="square" rtlCol="0" anchor="ctr"/>
-          <a:lstStyle/>
-          <a:p>
-            <a:pPr marL="0" indent="0">
-              <a:buNone/>
-            </a:pPr>
-            <a:r>
-              <a:rPr lang="en-US" sz="1350" b="1" dirty="0">
-                <a:solidFill>
-                  <a:srgbClr val="1A2733"/>
-                </a:solidFill>
-                <a:latin typeface="Cambria" pitchFamily="34" charset="0"/>
-                <a:ea typeface="Cambria" pitchFamily="34" charset="-122"/>
-                <a:cs typeface="Cambria" pitchFamily="34" charset="-120"/>
-              </a:rPr>
-              <a:t>Sintesi_Categorie</a:t>
-            </a:r>
-            <a:endParaRPr lang="en-US" sz="1350" dirty="0"/>
-          </a:p>
-        </p:txBody>
-      </p:sp>
-      <p:sp>
-        <p:nvSpPr>
-          <p:cNvPr id="19" name="Text 17"/>
-          <p:cNvSpPr/>
-          <p:nvPr/>
-        </p:nvSpPr>
-        <p:spPr>
-          <a:xfrm>
-            <a:off x="868680" y="5230368"/>
-            <a:ext cx="4892040" cy="502920"/>
-          </a:xfrm>
-          <a:prstGeom prst="rect">
-            <a:avLst/>
-          </a:prstGeom>
-          <a:noFill/>
-          <a:ln/>
-        </p:spPr>
-        <p:txBody>
-          <a:bodyPr wrap="square" rtlCol="0" anchor="t"/>
-          <a:lstStyle/>
-          <a:p>
-            <a:pPr marL="0" indent="0">
-              <a:buNone/>
-            </a:pPr>
-            <a:r>
-              <a:rPr lang="en-US" sz="1050" dirty="0">
-                <a:solidFill>
-                  <a:srgbClr val="5B6B75"/>
-                </a:solidFill>
-                <a:latin typeface="Calibri" pitchFamily="34" charset="0"/>
-                <a:ea typeface="Calibri" pitchFamily="34" charset="-122"/>
-                <a:cs typeface="Calibri" pitchFamily="34" charset="-120"/>
-              </a:rPr>
-              <a:t>Le 15 categorie ordinate per numero di strutture (pivot sul Modello dati)</a:t>
-            </a:r>
-            <a:endParaRPr lang="en-US" sz="1050" dirty="0"/>
-          </a:p>
-        </p:txBody>
-      </p:sp>
-      <p:sp>
-        <p:nvSpPr>
-          <p:cNvPr id="20" name="Shape 18"/>
-          <p:cNvSpPr/>
-          <p:nvPr/>
-        </p:nvSpPr>
-        <p:spPr>
-          <a:xfrm>
-            <a:off x="6263640" y="1691640"/>
-            <a:ext cx="5257800" cy="914400"/>
-          </a:xfrm>
-          <a:prstGeom prst="roundRect">
-            <a:avLst>
-              <a:gd name="adj" fmla="val 6000"/>
-            </a:avLst>
-          </a:prstGeom>
-          <a:solidFill>
-            <a:srgbClr val="FFFFFF"/>
-          </a:solidFill>
-          <a:ln w="12700">
-            <a:solidFill>
-              <a:srgbClr val="E3E9ED"/>
-            </a:solidFill>
-            <a:prstDash val="solid"/>
-          </a:ln>
-        </p:spPr>
-        <p:txBody>
-          <a:bodyPr/>
-          <a:lstStyle/>
-          <a:p>
-            <a:endParaRPr lang="it-IT"/>
-          </a:p>
-        </p:txBody>
-      </p:sp>
-      <p:sp>
-        <p:nvSpPr>
-          <p:cNvPr id="21" name="Shape 19"/>
-          <p:cNvSpPr/>
-          <p:nvPr/>
-        </p:nvSpPr>
-        <p:spPr>
-          <a:xfrm>
-            <a:off x="6263640" y="1691640"/>
-            <a:ext cx="82296" cy="914400"/>
-          </a:xfrm>
-          <a:prstGeom prst="rect">
-            <a:avLst/>
-          </a:prstGeom>
-          <a:solidFill>
-            <a:srgbClr val="1C7293"/>
-          </a:solidFill>
-          <a:ln/>
-        </p:spPr>
-        <p:txBody>
-          <a:bodyPr/>
-          <a:lstStyle/>
-          <a:p>
-            <a:endParaRPr lang="it-IT"/>
-          </a:p>
-        </p:txBody>
-      </p:sp>
-      <p:sp>
-        <p:nvSpPr>
-          <p:cNvPr id="22" name="Text 20"/>
-          <p:cNvSpPr/>
-          <p:nvPr/>
-        </p:nvSpPr>
-        <p:spPr>
-          <a:xfrm>
-            <a:off x="6492240" y="1764792"/>
-            <a:ext cx="4892040" cy="320040"/>
-          </a:xfrm>
-          <a:prstGeom prst="rect">
-            <a:avLst/>
-          </a:prstGeom>
-          <a:noFill/>
-          <a:ln/>
-        </p:spPr>
-        <p:txBody>
-          <a:bodyPr wrap="square" rtlCol="0" anchor="ctr"/>
-          <a:lstStyle/>
-          <a:p>
-            <a:pPr marL="0" indent="0">
-              <a:buNone/>
-            </a:pPr>
-            <a:r>
-              <a:rPr lang="en-US" sz="1350" b="1" dirty="0">
-                <a:solidFill>
-                  <a:srgbClr val="1A2733"/>
-                </a:solidFill>
-                <a:latin typeface="Cambria" pitchFamily="34" charset="0"/>
-                <a:ea typeface="Cambria" pitchFamily="34" charset="-122"/>
-                <a:cs typeface="Cambria" pitchFamily="34" charset="-120"/>
-              </a:rPr>
-              <a:t>Estrazione_Città</a:t>
-            </a:r>
-            <a:endParaRPr lang="en-US" sz="1350" dirty="0"/>
-          </a:p>
-        </p:txBody>
-      </p:sp>
-      <p:sp>
-        <p:nvSpPr>
-          <p:cNvPr id="23" name="Text 21"/>
-          <p:cNvSpPr/>
-          <p:nvPr/>
-        </p:nvSpPr>
-        <p:spPr>
-          <a:xfrm>
-            <a:off x="6492240" y="2075688"/>
-            <a:ext cx="4892040" cy="502920"/>
-          </a:xfrm>
-          <a:prstGeom prst="rect">
-            <a:avLst/>
-          </a:prstGeom>
-          <a:noFill/>
-          <a:ln/>
-        </p:spPr>
-        <p:txBody>
-          <a:bodyPr wrap="square" rtlCol="0" anchor="t"/>
-          <a:lstStyle/>
-          <a:p>
-            <a:pPr marL="0" indent="0">
-              <a:buNone/>
-            </a:pPr>
-            <a:r>
-              <a:rPr lang="en-US" sz="1050" dirty="0">
-                <a:solidFill>
-                  <a:srgbClr val="5B6B75"/>
-                </a:solidFill>
-                <a:latin typeface="Calibri" pitchFamily="34" charset="0"/>
-                <a:ea typeface="Calibri" pitchFamily="34" charset="-122"/>
-                <a:cs typeface="Calibri" pitchFamily="34" charset="-120"/>
-              </a:rPr>
-              <a:t>Esempio di tabella strutturata: strutture di una città, ordinate per categoria</a:t>
-            </a:r>
-            <a:endParaRPr lang="en-US" sz="1050" dirty="0"/>
-          </a:p>
-        </p:txBody>
-      </p:sp>
-      <p:sp>
-        <p:nvSpPr>
-          <p:cNvPr id="24" name="Shape 22"/>
-          <p:cNvSpPr/>
-          <p:nvPr/>
-        </p:nvSpPr>
-        <p:spPr>
-          <a:xfrm>
-            <a:off x="6263640" y="2743200"/>
-            <a:ext cx="5257800" cy="914400"/>
-          </a:xfrm>
-          <a:prstGeom prst="roundRect">
-            <a:avLst>
-              <a:gd name="adj" fmla="val 6000"/>
-            </a:avLst>
-          </a:prstGeom>
-          <a:solidFill>
-            <a:srgbClr val="FFFFFF"/>
-          </a:solidFill>
-          <a:ln w="12700">
-            <a:solidFill>
-              <a:srgbClr val="E3E9ED"/>
-            </a:solidFill>
-            <a:prstDash val="solid"/>
-          </a:ln>
-        </p:spPr>
-        <p:txBody>
-          <a:bodyPr/>
-          <a:lstStyle/>
-          <a:p>
-            <a:endParaRPr lang="it-IT"/>
-          </a:p>
-        </p:txBody>
-      </p:sp>
-      <p:sp>
-        <p:nvSpPr>
-          <p:cNvPr id="25" name="Shape 23"/>
-          <p:cNvSpPr/>
-          <p:nvPr/>
-        </p:nvSpPr>
-        <p:spPr>
-          <a:xfrm>
-            <a:off x="6263640" y="2743200"/>
-            <a:ext cx="82296" cy="914400"/>
-          </a:xfrm>
-          <a:prstGeom prst="rect">
-            <a:avLst/>
-          </a:prstGeom>
-          <a:solidFill>
-            <a:srgbClr val="E8871E"/>
-          </a:solidFill>
-          <a:ln/>
-        </p:spPr>
-        <p:txBody>
-          <a:bodyPr/>
-          <a:lstStyle/>
-          <a:p>
-            <a:endParaRPr lang="it-IT"/>
-          </a:p>
-        </p:txBody>
-      </p:sp>
-      <p:sp>
-        <p:nvSpPr>
-          <p:cNvPr id="26" name="Text 24"/>
-          <p:cNvSpPr/>
-          <p:nvPr/>
-        </p:nvSpPr>
-        <p:spPr>
-          <a:xfrm>
-            <a:off x="6492240" y="2816352"/>
-            <a:ext cx="4892040" cy="320040"/>
-          </a:xfrm>
-          <a:prstGeom prst="rect">
-            <a:avLst/>
-          </a:prstGeom>
-          <a:noFill/>
-          <a:ln/>
-        </p:spPr>
-        <p:txBody>
-          <a:bodyPr wrap="square" rtlCol="0" anchor="ctr"/>
-          <a:lstStyle/>
-          <a:p>
-            <a:pPr marL="0" indent="0">
-              <a:buNone/>
-            </a:pPr>
-            <a:r>
-              <a:rPr lang="en-US" sz="1350" b="1" dirty="0">
-                <a:solidFill>
-                  <a:srgbClr val="1A2733"/>
-                </a:solidFill>
-                <a:latin typeface="Cambria" pitchFamily="34" charset="0"/>
-                <a:ea typeface="Cambria" pitchFamily="34" charset="-122"/>
-                <a:cs typeface="Cambria" pitchFamily="34" charset="-120"/>
-              </a:rPr>
-              <a:t>tabelle di controllo</a:t>
-            </a:r>
-            <a:endParaRPr lang="en-US" sz="1350" dirty="0"/>
-          </a:p>
-        </p:txBody>
-      </p:sp>
-      <p:sp>
-        <p:nvSpPr>
-          <p:cNvPr id="27" name="Text 25"/>
-          <p:cNvSpPr/>
-          <p:nvPr/>
-        </p:nvSpPr>
-        <p:spPr>
-          <a:xfrm>
-            <a:off x="6492240" y="3127248"/>
-            <a:ext cx="4892040" cy="502920"/>
-          </a:xfrm>
-          <a:prstGeom prst="rect">
-            <a:avLst/>
-          </a:prstGeom>
-          <a:noFill/>
-          <a:ln/>
-        </p:spPr>
-        <p:txBody>
-          <a:bodyPr wrap="square" rtlCol="0" anchor="t"/>
-          <a:lstStyle/>
-          <a:p>
-            <a:pPr marL="0" indent="0">
-              <a:buNone/>
-            </a:pPr>
-            <a:r>
-              <a:rPr lang="en-US" sz="1050" dirty="0">
-                <a:solidFill>
-                  <a:srgbClr val="5B6B75"/>
-                </a:solidFill>
-                <a:latin typeface="Calibri" pitchFamily="34" charset="0"/>
-                <a:ea typeface="Calibri" pitchFamily="34" charset="-122"/>
-                <a:cs typeface="Calibri" pitchFamily="34" charset="-120"/>
-              </a:rPr>
-              <a:t>Pivot di verifica del raggruppamento per città</a:t>
-            </a:r>
-            <a:endParaRPr lang="en-US" sz="1050" dirty="0"/>
-          </a:p>
-        </p:txBody>
-      </p:sp>
-      <p:sp>
-        <p:nvSpPr>
-          <p:cNvPr id="28" name="Shape 26"/>
-          <p:cNvSpPr/>
-          <p:nvPr/>
-        </p:nvSpPr>
-        <p:spPr>
-          <a:xfrm>
-            <a:off x="6263640" y="3794760"/>
-            <a:ext cx="5257800" cy="914400"/>
-          </a:xfrm>
-          <a:prstGeom prst="roundRect">
-            <a:avLst>
-              <a:gd name="adj" fmla="val 6000"/>
-            </a:avLst>
-          </a:prstGeom>
-          <a:solidFill>
-            <a:srgbClr val="FFFFFF"/>
-          </a:solidFill>
-          <a:ln w="12700">
-            <a:solidFill>
-              <a:srgbClr val="E3E9ED"/>
-            </a:solidFill>
-            <a:prstDash val="solid"/>
-          </a:ln>
-        </p:spPr>
-        <p:txBody>
-          <a:bodyPr/>
-          <a:lstStyle/>
-          <a:p>
-            <a:endParaRPr lang="it-IT"/>
-          </a:p>
-        </p:txBody>
-      </p:sp>
-      <p:sp>
-        <p:nvSpPr>
-          <p:cNvPr id="29" name="Shape 27"/>
-          <p:cNvSpPr/>
-          <p:nvPr/>
-        </p:nvSpPr>
-        <p:spPr>
-          <a:xfrm>
-            <a:off x="6263640" y="3794760"/>
-            <a:ext cx="82296" cy="914400"/>
-          </a:xfrm>
-          <a:prstGeom prst="rect">
-            <a:avLst/>
-          </a:prstGeom>
-          <a:solidFill>
-            <a:srgbClr val="1C7293"/>
-          </a:solidFill>
-          <a:ln/>
-        </p:spPr>
-        <p:txBody>
-          <a:bodyPr/>
-          <a:lstStyle/>
-          <a:p>
-            <a:endParaRPr lang="it-IT"/>
-          </a:p>
-        </p:txBody>
-      </p:sp>
-      <p:sp>
-        <p:nvSpPr>
-          <p:cNvPr id="30" name="Text 28"/>
-          <p:cNvSpPr/>
-          <p:nvPr/>
-        </p:nvSpPr>
-        <p:spPr>
-          <a:xfrm>
-            <a:off x="6492240" y="3867912"/>
-            <a:ext cx="4892040" cy="320040"/>
-          </a:xfrm>
-          <a:prstGeom prst="rect">
-            <a:avLst/>
-          </a:prstGeom>
-          <a:noFill/>
-          <a:ln/>
-        </p:spPr>
-        <p:txBody>
-          <a:bodyPr wrap="square" rtlCol="0" anchor="ctr"/>
-          <a:lstStyle/>
-          <a:p>
-            <a:pPr marL="0" indent="0">
-              <a:buNone/>
-            </a:pPr>
-            <a:r>
-              <a:rPr lang="en-US" sz="1350" b="1" dirty="0">
-                <a:solidFill>
-                  <a:srgbClr val="1A2733"/>
-                </a:solidFill>
-                <a:latin typeface="Cambria" pitchFamily="34" charset="0"/>
-                <a:ea typeface="Cambria" pitchFamily="34" charset="-122"/>
-                <a:cs typeface="Cambria" pitchFamily="34" charset="-120"/>
-              </a:rPr>
-              <a:t>Analisi_Prezzi</a:t>
-            </a:r>
-            <a:endParaRPr lang="en-US" sz="1350" dirty="0"/>
-          </a:p>
-        </p:txBody>
-      </p:sp>
-      <p:sp>
-        <p:nvSpPr>
-          <p:cNvPr id="31" name="Text 29"/>
-          <p:cNvSpPr/>
-          <p:nvPr/>
-        </p:nvSpPr>
-        <p:spPr>
-          <a:xfrm>
-            <a:off x="6492240" y="4178808"/>
-            <a:ext cx="4892040" cy="502920"/>
-          </a:xfrm>
-          <a:prstGeom prst="rect">
-            <a:avLst/>
-          </a:prstGeom>
-          <a:noFill/>
-          <a:ln/>
-        </p:spPr>
-        <p:txBody>
-          <a:bodyPr wrap="square" rtlCol="0" anchor="t"/>
-          <a:lstStyle/>
-          <a:p>
-            <a:pPr marL="0" indent="0">
-              <a:buNone/>
-            </a:pPr>
-            <a:r>
-              <a:rPr lang="en-US" sz="1050" dirty="0">
-                <a:solidFill>
-                  <a:srgbClr val="5B6B75"/>
-                </a:solidFill>
-                <a:latin typeface="Calibri" pitchFamily="34" charset="0"/>
-                <a:ea typeface="Calibri" pitchFamily="34" charset="-122"/>
-                <a:cs typeface="Calibri" pitchFamily="34" charset="-120"/>
-              </a:rPr>
-              <a:t>L'intera analisi statistica: descrittiva, probabilità, IC, regressione</a:t>
-            </a:r>
-            <a:endParaRPr lang="en-US" sz="1050" dirty="0"/>
-          </a:p>
-        </p:txBody>
-      </p:sp>
-      <p:sp>
-        <p:nvSpPr>
-          <p:cNvPr id="32" name="Text 30"/>
-          <p:cNvSpPr/>
-          <p:nvPr/>
-        </p:nvSpPr>
-        <p:spPr>
-          <a:xfrm>
-            <a:off x="457200" y="6473952"/>
-            <a:ext cx="5486400" cy="274320"/>
-          </a:xfrm>
-          <a:prstGeom prst="rect">
-            <a:avLst/>
-          </a:prstGeom>
-          <a:noFill/>
-          <a:ln/>
-        </p:spPr>
-        <p:txBody>
-          <a:bodyPr wrap="square" rtlCol="0" anchor="ctr"/>
-          <a:lstStyle/>
-          <a:p>
-            <a:pPr marL="0" indent="0" algn="l">
-              <a:buNone/>
-            </a:pPr>
-            <a:r>
-              <a:rPr lang="en-US" sz="900" dirty="0">
-                <a:solidFill>
-                  <a:srgbClr val="5B6B75"/>
-                </a:solidFill>
-                <a:latin typeface="Calibri" pitchFamily="34" charset="0"/>
-                <a:ea typeface="Calibri" pitchFamily="34" charset="-122"/>
-                <a:cs typeface="Calibri" pitchFamily="34" charset="-120"/>
-              </a:rPr>
-              <a:t>Regione Marche — Patrimonio Ricettivo</a:t>
-            </a:r>
-            <a:endParaRPr lang="en-US" sz="900" dirty="0"/>
-          </a:p>
-        </p:txBody>
-      </p:sp>
-      <p:sp>
-        <p:nvSpPr>
-          <p:cNvPr id="33" name="Text 31"/>
-          <p:cNvSpPr/>
-          <p:nvPr/>
-        </p:nvSpPr>
-        <p:spPr>
-          <a:xfrm>
-            <a:off x="11274552" y="6473952"/>
-            <a:ext cx="457200" cy="274320"/>
-          </a:xfrm>
-          <a:prstGeom prst="rect">
-            <a:avLst/>
-          </a:prstGeom>
-          <a:noFill/>
-          <a:ln/>
-        </p:spPr>
-        <p:txBody>
-          <a:bodyPr wrap="square" rtlCol="0" anchor="ctr"/>
-          <a:lstStyle/>
-          <a:p>
-            <a:pPr marL="0" indent="0" algn="r">
-              <a:buNone/>
-            </a:pPr>
-            <a:r>
-              <a:rPr lang="en-US" sz="900" dirty="0">
-                <a:solidFill>
-                  <a:srgbClr val="5B6B75"/>
-                </a:solidFill>
-                <a:latin typeface="Calibri" pitchFamily="34" charset="0"/>
-                <a:ea typeface="Calibri" pitchFamily="34" charset="-122"/>
-                <a:cs typeface="Calibri" pitchFamily="34" charset="-120"/>
-              </a:rPr>
-              <a:t>9</a:t>
             </a:r>
             <a:endParaRPr lang="en-US" sz="900" dirty="0"/>
           </a:p>
